--- a/DOC/Presentation.pptx
+++ b/DOC/Presentation.pptx
@@ -2,24 +2,25 @@
 <file path=ppt/presentation.xml><?xml version="1.0" encoding="utf-8"?>
 <p:presentation xmlns:p="http://schemas.openxmlformats.org/presentationml/2006/main">
   <p:sldMasterIdLst>
-    <p:sldMasterId xmlns:r="http://schemas.openxmlformats.org/officeDocument/2006/relationships" id="2147483648" r:id="R990c206229384d7e"/>
+    <p:sldMasterId xmlns:r="http://schemas.openxmlformats.org/officeDocument/2006/relationships" id="2147483648" r:id="R2d510e878618495b"/>
   </p:sldMasterIdLst>
   <p:notesMasterIdLst>
-    <p:notesMasterId xmlns:r="http://schemas.openxmlformats.org/officeDocument/2006/relationships" r:id="Rcf2d662e424a466c"/>
+    <p:notesMasterId xmlns:r="http://schemas.openxmlformats.org/officeDocument/2006/relationships" r:id="R5b00f6af751646a7"/>
   </p:notesMasterIdLst>
   <p:sldIdLst>
-    <p:sldId xmlns:r="http://schemas.openxmlformats.org/officeDocument/2006/relationships" id="256" r:id="R14047284b1fb477a"/>
-    <p:sldId xmlns:r="http://schemas.openxmlformats.org/officeDocument/2006/relationships" id="257" r:id="R4135827cf3b1468a"/>
-    <p:sldId xmlns:r="http://schemas.openxmlformats.org/officeDocument/2006/relationships" id="258" r:id="Red2035f45bd548df"/>
-    <p:sldId xmlns:r="http://schemas.openxmlformats.org/officeDocument/2006/relationships" id="259" r:id="Rc6b844600f614304"/>
-    <p:sldId xmlns:r="http://schemas.openxmlformats.org/officeDocument/2006/relationships" id="260" r:id="R17c9ff062aed42a9"/>
-    <p:sldId xmlns:r="http://schemas.openxmlformats.org/officeDocument/2006/relationships" id="261" r:id="R6f5b30961d6e4454"/>
-    <p:sldId xmlns:r="http://schemas.openxmlformats.org/officeDocument/2006/relationships" id="262" r:id="R5f1e9e59257c4029"/>
-    <p:sldId xmlns:r="http://schemas.openxmlformats.org/officeDocument/2006/relationships" id="263" r:id="R9b20ca9fe72541b4"/>
-    <p:sldId xmlns:r="http://schemas.openxmlformats.org/officeDocument/2006/relationships" id="264" r:id="R556e112c97e241bf"/>
-    <p:sldId xmlns:r="http://schemas.openxmlformats.org/officeDocument/2006/relationships" id="265" r:id="R6d4ea548ca5d4b37"/>
-    <p:sldId xmlns:r="http://schemas.openxmlformats.org/officeDocument/2006/relationships" id="266" r:id="Rfea121468d504800"/>
-    <p:sldId xmlns:r="http://schemas.openxmlformats.org/officeDocument/2006/relationships" id="267" r:id="R992482740d1b44b0"/>
+    <p:sldId xmlns:r="http://schemas.openxmlformats.org/officeDocument/2006/relationships" id="256" r:id="Rcd25cd13f03d44ef"/>
+    <p:sldId xmlns:r="http://schemas.openxmlformats.org/officeDocument/2006/relationships" id="257" r:id="R1d9a39a274924359"/>
+    <p:sldId xmlns:r="http://schemas.openxmlformats.org/officeDocument/2006/relationships" id="258" r:id="Re2fef374c12448b2"/>
+    <p:sldId xmlns:r="http://schemas.openxmlformats.org/officeDocument/2006/relationships" id="259" r:id="R67d03d221f5f439f"/>
+    <p:sldId xmlns:r="http://schemas.openxmlformats.org/officeDocument/2006/relationships" id="260" r:id="Ra8e5208c323e4c6c"/>
+    <p:sldId xmlns:r="http://schemas.openxmlformats.org/officeDocument/2006/relationships" id="261" r:id="R48ff1c889f454325"/>
+    <p:sldId xmlns:r="http://schemas.openxmlformats.org/officeDocument/2006/relationships" id="262" r:id="Rd3625e4deecf4078"/>
+    <p:sldId xmlns:r="http://schemas.openxmlformats.org/officeDocument/2006/relationships" id="263" r:id="R76d1a2c65cfc493d"/>
+    <p:sldId xmlns:r="http://schemas.openxmlformats.org/officeDocument/2006/relationships" id="264" r:id="Rb2f01e930e914bac"/>
+    <p:sldId xmlns:r="http://schemas.openxmlformats.org/officeDocument/2006/relationships" id="265" r:id="Rcba604a370e84b12"/>
+    <p:sldId xmlns:r="http://schemas.openxmlformats.org/officeDocument/2006/relationships" id="266" r:id="R2597b51498be46a6"/>
+    <p:sldId xmlns:r="http://schemas.openxmlformats.org/officeDocument/2006/relationships" id="267" r:id="R0b035cf6ef7d45b9"/>
+    <p:sldId xmlns:r="http://schemas.openxmlformats.org/officeDocument/2006/relationships" id="268" r:id="R9d5940760bac4ee6"/>
   </p:sldIdLst>
   <p:sldSz cx="12192000" cy="6858000"/>
   <p:notesSz cx="6858000" cy="9144000"/>
@@ -772,6 +773,72 @@
 </p:notes>
 </file>
 
+<file path=ppt/notesSlides/notesSlide13.xml><?xml version="1.0" encoding="utf-8"?>
+<p:notes xmlns:p="http://schemas.openxmlformats.org/presentationml/2006/main">
+  <p:cSld>
+    <p:spTree>
+      <p:nvGrpSpPr>
+        <p:cNvPr id="1" name=""/>
+        <p:cNvGrpSpPr/>
+        <p:nvPr/>
+      </p:nvGrpSpPr>
+      <p:grpSpPr>
+        <a:xfrm xmlns:a="http://schemas.openxmlformats.org/drawingml/2006/main"/>
+      </p:grpSpPr>
+      <p:sp>
+        <p:nvSpPr>
+          <p:cNvPr id="2" name="Slide Image Placeholder 1"/>
+          <p:cNvSpPr>
+            <a:spLocks xmlns:a="http://schemas.openxmlformats.org/drawingml/2006/main" noGrp="1"/>
+          </p:cNvSpPr>
+          <p:nvPr>
+            <p:ph type="sldImg" idx="0"/>
+          </p:nvPr>
+        </p:nvSpPr>
+        <p:spPr/>
+      </p:sp>
+      <p:sp>
+        <p:nvSpPr>
+          <p:cNvPr id="3" name="Notes Placeholder 2"/>
+          <p:cNvSpPr>
+            <a:spLocks xmlns:a="http://schemas.openxmlformats.org/drawingml/2006/main" noGrp="1"/>
+          </p:cNvSpPr>
+          <p:nvPr>
+            <p:ph type="body" idx="1"/>
+          </p:nvPr>
+        </p:nvSpPr>
+        <p:spPr/>
+        <p:txBody>
+          <a:bodyPr xmlns:a="http://schemas.openxmlformats.org/drawingml/2006/main"/>
+          <a:lstStyle xmlns:a="http://schemas.openxmlformats.org/drawingml/2006/main"/>
+          <a:p xmlns:a="http://schemas.openxmlformats.org/drawingml/2006/main"/>
+        </p:txBody>
+      </p:sp>
+      <p:sp>
+        <p:nvSpPr>
+          <p:cNvPr id="4" name="Slide Number Placeholder 3"/>
+          <p:cNvSpPr>
+            <a:spLocks xmlns:a="http://schemas.openxmlformats.org/drawingml/2006/main" noGrp="1"/>
+          </p:cNvSpPr>
+          <p:nvPr>
+            <p:ph type="sldNum" idx="5"/>
+          </p:nvPr>
+        </p:nvSpPr>
+        <p:spPr/>
+        <p:txBody>
+          <a:bodyPr xmlns:a="http://schemas.openxmlformats.org/drawingml/2006/main"/>
+          <a:lstStyle xmlns:a="http://schemas.openxmlformats.org/drawingml/2006/main"/>
+          <a:p xmlns:a="http://schemas.openxmlformats.org/drawingml/2006/main"/>
+        </p:txBody>
+      </p:sp>
+    </p:spTree>
+  </p:cSld>
+  <p:clrMapOvr>
+    <a:masterClrMapping xmlns:a="http://schemas.openxmlformats.org/drawingml/2006/main"/>
+  </p:clrMapOvr>
+</p:notes>
+</file>
+
 <file path=ppt/notesSlides/notesSlide2.xml><?xml version="1.0" encoding="utf-8"?>
 <p:notes xmlns:p="http://schemas.openxmlformats.org/presentationml/2006/main">
   <p:cSld>
@@ -1338,7 +1405,7 @@
   </p:cSld>
   <p:clrMap bg1="lt1" tx1="dk1" bg2="lt2" tx2="dk2" accent1="accent1" accent2="accent2" accent3="accent3" accent4="accent4" accent5="accent5" accent6="accent6" hlink="hlink" folHlink="folHlink"/>
   <p:sldLayoutIdLst>
-    <p:sldLayoutId xmlns:r="http://schemas.openxmlformats.org/officeDocument/2006/relationships" id="2147483649" r:id="R3df57916453b4a18"/>
+    <p:sldLayoutId xmlns:r="http://schemas.openxmlformats.org/officeDocument/2006/relationships" id="2147483649" r:id="R86f35a2685934c88"/>
   </p:sldLayoutIdLst>
   <p:txStyles>
     <p:titleStyle>
@@ -1886,7 +1953,7 @@
           <p:nvPr/>
         </p:nvPicPr>
         <p:blipFill>
-          <a:blip xmlns:r="http://schemas.openxmlformats.org/officeDocument/2006/relationships" xmlns:a="http://schemas.openxmlformats.org/drawingml/2006/main" r:embed="R7355bafc1f8a4bbc"/>
+          <a:blip xmlns:r="http://schemas.openxmlformats.org/officeDocument/2006/relationships" xmlns:a="http://schemas.openxmlformats.org/drawingml/2006/main" r:embed="Rc53ebd354cf04477"/>
           <a:srcRect xmlns:a="http://schemas.openxmlformats.org/drawingml/2006/main" l="0" t="0" r="0" b="0"/>
           <a:stretch xmlns:a="http://schemas.openxmlformats.org/drawingml/2006/main">
             <a:fillRect l="0" t="0" r="0" b="0"/>
@@ -1944,7 +2011,7 @@
           <p:nvPr/>
         </p:nvPicPr>
         <p:blipFill>
-          <a:blip xmlns:r="http://schemas.openxmlformats.org/officeDocument/2006/relationships" xmlns:a="http://schemas.openxmlformats.org/drawingml/2006/main" r:embed="Re7436acb5617426a"/>
+          <a:blip xmlns:r="http://schemas.openxmlformats.org/officeDocument/2006/relationships" xmlns:a="http://schemas.openxmlformats.org/drawingml/2006/main" r:embed="Red464547537945d3"/>
           <a:stretch xmlns:a="http://schemas.openxmlformats.org/drawingml/2006/main"/>
         </p:blipFill>
         <p:spPr>
@@ -1966,7 +2033,7 @@
           <p:nvPr/>
         </p:nvPicPr>
         <p:blipFill>
-          <a:blip xmlns:r="http://schemas.openxmlformats.org/officeDocument/2006/relationships" xmlns:a="http://schemas.openxmlformats.org/drawingml/2006/main" r:embed="Rd647e96a08f24b1b"/>
+          <a:blip xmlns:r="http://schemas.openxmlformats.org/officeDocument/2006/relationships" xmlns:a="http://schemas.openxmlformats.org/drawingml/2006/main" r:embed="R2b10bc8cc5754d1e"/>
           <a:stretch xmlns:a="http://schemas.openxmlformats.org/drawingml/2006/main"/>
         </p:blipFill>
         <p:spPr>
@@ -2311,7 +2378,7 @@
           <p:cNvPr id="1" name="">
             <a:extLst xmlns:a="http://schemas.openxmlformats.org/drawingml/2006/main">
               <a:ext uri="{FF2B5EF4-FFF2-40B4-BE49-F238E27FC236}">
-                <a16:creationId xmlns:a16="http://schemas.microsoft.com/office/drawing/2014/main" id="{281B1B7B-264B-4CB3-860E-D0D6737710DF}"/>
+                <a16:creationId xmlns:a16="http://schemas.microsoft.com/office/drawing/2014/main" id="{52B683D1-8435-4833-91BA-B6771448C957}"/>
               </a:ext>
             </a:extLst>
           </p:cNvPr>
@@ -2342,7 +2409,7 @@
           <p:cNvPr id="2" name="">
             <a:extLst xmlns:a="http://schemas.openxmlformats.org/drawingml/2006/main">
               <a:ext uri="{FF2B5EF4-FFF2-40B4-BE49-F238E27FC236}">
-                <a16:creationId xmlns:a16="http://schemas.microsoft.com/office/drawing/2014/main" id="{46647C81-9DC4-481F-9CD0-5D192D233ED1}"/>
+                <a16:creationId xmlns:a16="http://schemas.microsoft.com/office/drawing/2014/main" id="{450E4865-5B0D-40A4-98E6-9A3C6DB0ECC5}"/>
               </a:ext>
             </a:extLst>
           </p:cNvPr>
@@ -2402,7 +2469,7 @@
           <p:cNvPr id="3" name="">
             <a:extLst xmlns:a="http://schemas.openxmlformats.org/drawingml/2006/main">
               <a:ext uri="{FF2B5EF4-FFF2-40B4-BE49-F238E27FC236}">
-                <a16:creationId xmlns:a16="http://schemas.microsoft.com/office/drawing/2014/main" id="{3DD52DF3-19E3-4826-83B9-7739C5FA416B}"/>
+                <a16:creationId xmlns:a16="http://schemas.microsoft.com/office/drawing/2014/main" id="{4FA79CE5-5ACD-45A7-AA1F-B45FF3090BC6}"/>
               </a:ext>
             </a:extLst>
           </p:cNvPr>
@@ -2462,7 +2529,7 @@
           <p:cNvPr id="4" name="">
             <a:extLst xmlns:a="http://schemas.openxmlformats.org/drawingml/2006/main">
               <a:ext uri="{FF2B5EF4-FFF2-40B4-BE49-F238E27FC236}">
-                <a16:creationId xmlns:a16="http://schemas.microsoft.com/office/drawing/2014/main" id="{BC7FF1E7-78A2-4E60-A3F5-BF6E4B523681}"/>
+                <a16:creationId xmlns:a16="http://schemas.microsoft.com/office/drawing/2014/main" id="{DF6C63E4-21BA-4265-8FF8-F6C82CF848F6}"/>
               </a:ext>
             </a:extLst>
           </p:cNvPr>
@@ -2512,7 +2579,7 @@
                 <a:ea typeface="Arial"/>
                 <a:cs typeface="Arial"/>
               </a:rPr>
-              <a:t>ROBUSTNESS</a:t>
+              <a:t>VALIDATION</a:t>
             </a:r>
           </a:p>
         </p:txBody>
@@ -2522,7 +2589,7 @@
           <p:cNvPr id="5" name="">
             <a:extLst xmlns:a="http://schemas.openxmlformats.org/drawingml/2006/main">
               <a:ext uri="{FF2B5EF4-FFF2-40B4-BE49-F238E27FC236}">
-                <a16:creationId xmlns:a16="http://schemas.microsoft.com/office/drawing/2014/main" id="{46B2198F-06D4-44D2-85B9-54EC78614144}"/>
+                <a16:creationId xmlns:a16="http://schemas.microsoft.com/office/drawing/2014/main" id="{A5A22EAD-ECC9-4F92-9B5C-D900B387E438}"/>
               </a:ext>
             </a:extLst>
           </p:cNvPr>
@@ -2553,7 +2620,7 @@
           <p:cNvPr id="6" name="">
             <a:extLst xmlns:a="http://schemas.openxmlformats.org/drawingml/2006/main">
               <a:ext uri="{FF2B5EF4-FFF2-40B4-BE49-F238E27FC236}">
-                <a16:creationId xmlns:a16="http://schemas.microsoft.com/office/drawing/2014/main" id="{663F210B-CBA7-49B2-9A41-A246D17E6D27}"/>
+                <a16:creationId xmlns:a16="http://schemas.microsoft.com/office/drawing/2014/main" id="{07F74510-4CD3-48D1-9E38-9BFB471977D8}"/>
               </a:ext>
             </a:extLst>
           </p:cNvPr>
@@ -2603,7 +2670,7 @@
                 <a:ea typeface="Arial"/>
                 <a:cs typeface="Arial"/>
               </a:rPr>
-              <a:t>Experiment 3: Randomization Effects</a:t>
+              <a:t>Experiment 2: Champion Comparison</a:t>
             </a:r>
           </a:p>
         </p:txBody>
@@ -2613,7 +2680,7 @@
           <p:cNvPr id="7" name="">
             <a:extLst xmlns:a="http://schemas.openxmlformats.org/drawingml/2006/main">
               <a:ext uri="{FF2B5EF4-FFF2-40B4-BE49-F238E27FC236}">
-                <a16:creationId xmlns:a16="http://schemas.microsoft.com/office/drawing/2014/main" id="{C7FDE9AE-5D48-45D5-AA73-6175E4D5D96B}"/>
+                <a16:creationId xmlns:a16="http://schemas.microsoft.com/office/drawing/2014/main" id="{1440976C-715E-450E-B308-916F699AF73B}"/>
               </a:ext>
             </a:extLst>
           </p:cNvPr>
@@ -2625,7 +2692,7 @@
         <p:spPr>
           <a:xfrm xmlns:a="http://schemas.openxmlformats.org/drawingml/2006/main">
             <a:off x="666750" y="2076450"/>
-            <a:ext cx="8001000" cy="304800"/>
+            <a:ext cx="8572500" cy="304800"/>
           </a:xfrm>
           <a:prstGeom xmlns:a="http://schemas.openxmlformats.org/drawingml/2006/main" prst="rect">
             <a:avLst/>
@@ -2663,7 +2730,7 @@
                 <a:ea typeface="Arial"/>
                 <a:cs typeface="Arial"/>
               </a:rPr>
-              <a:t>The final policy was tested under 20 different reset seeds.</a:t>
+              <a:t>Each generation best policy is re-tested using the same validation seeds.</a:t>
             </a:r>
           </a:p>
         </p:txBody>
@@ -2673,19 +2740,19 @@
           <p:cNvPr id="8" name="">
             <a:extLst xmlns:a="http://schemas.openxmlformats.org/drawingml/2006/main">
               <a:ext uri="{FF2B5EF4-FFF2-40B4-BE49-F238E27FC236}">
-                <a16:creationId xmlns:a16="http://schemas.microsoft.com/office/drawing/2014/main" id="{A2C16CDA-F88E-462C-A1DD-C9BD6383C3A5}"/>
-              </a:ext>
-            </a:extLst>
-          </p:cNvPr>
-          <p:cNvSpPr>
-            <a:spLocks xmlns:a="http://schemas.openxmlformats.org/drawingml/2006/main" noGrp="1"/>
-          </p:cNvSpPr>
-          <p:nvPr/>
-        </p:nvSpPr>
-        <p:spPr>
-          <a:xfrm xmlns:a="http://schemas.openxmlformats.org/drawingml/2006/main">
-            <a:off x="647700" y="2628900"/>
-            <a:ext cx="7048500" cy="3638550"/>
+                <a16:creationId xmlns:a16="http://schemas.microsoft.com/office/drawing/2014/main" id="{55F66687-2A80-4960-9402-520648C5AAA7}"/>
+              </a:ext>
+            </a:extLst>
+          </p:cNvPr>
+          <p:cNvSpPr>
+            <a:spLocks xmlns:a="http://schemas.openxmlformats.org/drawingml/2006/main" noGrp="1"/>
+          </p:cNvSpPr>
+          <p:nvPr/>
+        </p:nvSpPr>
+        <p:spPr>
+          <a:xfrm xmlns:a="http://schemas.openxmlformats.org/drawingml/2006/main">
+            <a:off x="666750" y="2647950"/>
+            <a:ext cx="4857750" cy="2400300"/>
           </a:xfrm>
           <a:prstGeom xmlns:a="http://schemas.openxmlformats.org/drawingml/2006/main" prst="rect">
             <a:avLst/>
@@ -2703,20 +2770,20 @@
       </p:sp>
       <p:pic>
         <p:nvPicPr>
-          <p:cNvPr id="29" name=""/>
+          <p:cNvPr id="28" name=""/>
           <p:cNvPicPr>
             <a:picLocks xmlns:a="http://schemas.openxmlformats.org/drawingml/2006/main" noChangeAspect="1"/>
           </p:cNvPicPr>
           <p:nvPr/>
         </p:nvPicPr>
         <p:blipFill>
-          <a:blip xmlns:r="http://schemas.openxmlformats.org/officeDocument/2006/relationships" xmlns:a="http://schemas.openxmlformats.org/drawingml/2006/main" r:embed="Rc8a10b93f410498a"/>
+          <a:blip xmlns:r="http://schemas.openxmlformats.org/officeDocument/2006/relationships" xmlns:a="http://schemas.openxmlformats.org/drawingml/2006/main" r:embed="Rfd01827c93f746fa"/>
           <a:stretch xmlns:a="http://schemas.openxmlformats.org/drawingml/2006/main"/>
         </p:blipFill>
         <p:spPr>
           <a:xfrm xmlns:a="http://schemas.openxmlformats.org/drawingml/2006/main">
-            <a:off x="1671638" y="2781300"/>
-            <a:ext cx="5000625" cy="3333750"/>
+            <a:off x="962025" y="2781300"/>
+            <a:ext cx="4267200" cy="2133600"/>
           </a:xfrm>
           <a:prstGeom xmlns:a="http://schemas.openxmlformats.org/drawingml/2006/main" prst="rect">
             <a:avLst/>
@@ -2728,25 +2795,25 @@
           <p:cNvPr id="10" name="">
             <a:extLst xmlns:a="http://schemas.openxmlformats.org/drawingml/2006/main">
               <a:ext uri="{FF2B5EF4-FFF2-40B4-BE49-F238E27FC236}">
-                <a16:creationId xmlns:a16="http://schemas.microsoft.com/office/drawing/2014/main" id="{15006FA4-E8F5-4310-B0B7-44428090D829}"/>
-              </a:ext>
-            </a:extLst>
-          </p:cNvPr>
-          <p:cNvSpPr>
-            <a:spLocks xmlns:a="http://schemas.openxmlformats.org/drawingml/2006/main" noGrp="1"/>
-          </p:cNvSpPr>
-          <p:nvPr/>
-        </p:nvSpPr>
-        <p:spPr>
-          <a:xfrm xmlns:a="http://schemas.openxmlformats.org/drawingml/2006/main">
-            <a:off x="8191500" y="2914650"/>
-            <a:ext cx="2190750" cy="819150"/>
+                <a16:creationId xmlns:a16="http://schemas.microsoft.com/office/drawing/2014/main" id="{F0D231BC-7F65-4B9E-A2B1-C47A50539461}"/>
+              </a:ext>
+            </a:extLst>
+          </p:cNvPr>
+          <p:cNvSpPr>
+            <a:spLocks xmlns:a="http://schemas.openxmlformats.org/drawingml/2006/main" noGrp="1"/>
+          </p:cNvSpPr>
+          <p:nvPr/>
+        </p:nvSpPr>
+        <p:spPr>
+          <a:xfrm xmlns:a="http://schemas.openxmlformats.org/drawingml/2006/main">
+            <a:off x="6000750" y="2647950"/>
+            <a:ext cx="4857750" cy="2400300"/>
           </a:xfrm>
           <a:prstGeom xmlns:a="http://schemas.openxmlformats.org/drawingml/2006/main" prst="rect">
             <a:avLst/>
           </a:prstGeom>
           <a:solidFill xmlns:a="http://schemas.openxmlformats.org/drawingml/2006/main">
-            <a:srgbClr val="F4F7FA"/>
+            <a:srgbClr val="FFFFFF"/>
           </a:solidFill>
           <a:ln xmlns:a="http://schemas.openxmlformats.org/drawingml/2006/main" w="9525">
             <a:solidFill>
@@ -2756,275 +2823,206 @@
           </a:ln>
         </p:spPr>
       </p:sp>
-      <p:sp>
-        <p:nvSpPr>
-          <p:cNvPr id="11" name="">
-            <a:extLst xmlns:a="http://schemas.openxmlformats.org/drawingml/2006/main">
-              <a:ext uri="{FF2B5EF4-FFF2-40B4-BE49-F238E27FC236}">
-                <a16:creationId xmlns:a16="http://schemas.microsoft.com/office/drawing/2014/main" id="{EEAB93A4-AA00-45AE-B8C2-F76B486806A3}"/>
-              </a:ext>
-            </a:extLst>
-          </p:cNvPr>
-          <p:cNvSpPr>
-            <a:spLocks xmlns:a="http://schemas.openxmlformats.org/drawingml/2006/main" noGrp="1"/>
-          </p:cNvSpPr>
-          <p:nvPr/>
-        </p:nvSpPr>
-        <p:spPr>
-          <a:xfrm xmlns:a="http://schemas.openxmlformats.org/drawingml/2006/main">
-            <a:off x="8362950" y="3048000"/>
-            <a:ext cx="1847850" cy="304800"/>
-          </a:xfrm>
-          <a:prstGeom xmlns:a="http://schemas.openxmlformats.org/drawingml/2006/main" prst="rect">
-            <a:avLst/>
-          </a:prstGeom>
-          <a:noFill xmlns:a="http://schemas.openxmlformats.org/drawingml/2006/main"/>
-          <a:ln xmlns:a="http://schemas.openxmlformats.org/drawingml/2006/main" w="0">
-            <a:noFill/>
-            <a:prstDash val="solid"/>
-          </a:ln>
-        </p:spPr>
-        <p:txBody>
-          <a:bodyPr xmlns:a="http://schemas.openxmlformats.org/drawingml/2006/main"/>
-          <a:lstStyle xmlns:a="http://schemas.openxmlformats.org/drawingml/2006/main"/>
-          <a:p xmlns:a="http://schemas.openxmlformats.org/drawingml/2006/main">
-            <a:pPr algn="ctr">
-              <a:lnSpc>
-                <a:spcPct val="110000"/>
-              </a:lnSpc>
-              <a:buNone/>
-              <a:defRPr sz="1875" b="1">
-                <a:solidFill>
-                  <a:srgbClr val="073763"/>
-                </a:solidFill>
-                <a:latin typeface="Arial"/>
-                <a:ea typeface="Arial"/>
-                <a:cs typeface="Arial"/>
-              </a:defRPr>
-            </a:pPr>
-            <a:r>
-              <a:rPr sz="1875" b="1">
-                <a:solidFill>
-                  <a:srgbClr val="073763"/>
-                </a:solidFill>
-                <a:latin typeface="Arial"/>
-                <a:ea typeface="Arial"/>
-                <a:cs typeface="Arial"/>
-              </a:rPr>
-              <a:t>20/20</a:t>
-            </a:r>
-          </a:p>
-        </p:txBody>
-      </p:sp>
+      <p:pic>
+        <p:nvPicPr>
+          <p:cNvPr id="30" name=""/>
+          <p:cNvPicPr>
+            <a:picLocks xmlns:a="http://schemas.openxmlformats.org/drawingml/2006/main" noChangeAspect="1"/>
+          </p:cNvPicPr>
+          <p:nvPr/>
+        </p:nvPicPr>
+        <p:blipFill>
+          <a:blip xmlns:r="http://schemas.openxmlformats.org/officeDocument/2006/relationships" xmlns:a="http://schemas.openxmlformats.org/drawingml/2006/main" r:embed="R1fa6bf7a791f4738"/>
+          <a:stretch xmlns:a="http://schemas.openxmlformats.org/drawingml/2006/main"/>
+        </p:blipFill>
+        <p:spPr>
+          <a:xfrm xmlns:a="http://schemas.openxmlformats.org/drawingml/2006/main">
+            <a:off x="6296025" y="2781300"/>
+            <a:ext cx="4267200" cy="2133600"/>
+          </a:xfrm>
+          <a:prstGeom xmlns:a="http://schemas.openxmlformats.org/drawingml/2006/main" prst="rect">
+            <a:avLst/>
+          </a:prstGeom>
+        </p:spPr>
+      </p:pic>
       <p:sp>
         <p:nvSpPr>
           <p:cNvPr id="12" name="">
             <a:extLst xmlns:a="http://schemas.openxmlformats.org/drawingml/2006/main">
               <a:ext uri="{FF2B5EF4-FFF2-40B4-BE49-F238E27FC236}">
-                <a16:creationId xmlns:a16="http://schemas.microsoft.com/office/drawing/2014/main" id="{D636D766-BA01-46F5-A9F0-38C0C0DB6E65}"/>
-              </a:ext>
-            </a:extLst>
-          </p:cNvPr>
-          <p:cNvSpPr>
-            <a:spLocks xmlns:a="http://schemas.openxmlformats.org/drawingml/2006/main" noGrp="1"/>
-          </p:cNvSpPr>
-          <p:nvPr/>
-        </p:nvSpPr>
-        <p:spPr>
-          <a:xfrm xmlns:a="http://schemas.openxmlformats.org/drawingml/2006/main">
-            <a:off x="8343900" y="3390900"/>
-            <a:ext cx="1885950" cy="209550"/>
-          </a:xfrm>
-          <a:prstGeom xmlns:a="http://schemas.openxmlformats.org/drawingml/2006/main" prst="rect">
-            <a:avLst/>
-          </a:prstGeom>
-          <a:noFill xmlns:a="http://schemas.openxmlformats.org/drawingml/2006/main"/>
-          <a:ln xmlns:a="http://schemas.openxmlformats.org/drawingml/2006/main" w="0">
-            <a:noFill/>
-            <a:prstDash val="solid"/>
-          </a:ln>
-        </p:spPr>
-        <p:txBody>
-          <a:bodyPr xmlns:a="http://schemas.openxmlformats.org/drawingml/2006/main"/>
-          <a:lstStyle xmlns:a="http://schemas.openxmlformats.org/drawingml/2006/main"/>
-          <a:p xmlns:a="http://schemas.openxmlformats.org/drawingml/2006/main">
-            <a:pPr algn="ctr">
-              <a:lnSpc>
-                <a:spcPct val="110000"/>
-              </a:lnSpc>
-              <a:buNone/>
-              <a:defRPr sz="900" b="1">
-                <a:solidFill>
-                  <a:srgbClr val="5F6B7A"/>
-                </a:solidFill>
-                <a:latin typeface="Arial"/>
-                <a:ea typeface="Arial"/>
-                <a:cs typeface="Arial"/>
-              </a:defRPr>
-            </a:pPr>
-            <a:r>
-              <a:rPr sz="900" b="1">
-                <a:solidFill>
-                  <a:srgbClr val="5F6B7A"/>
-                </a:solidFill>
-                <a:latin typeface="Arial"/>
-                <a:ea typeface="Arial"/>
-                <a:cs typeface="Arial"/>
-              </a:rPr>
-              <a:t>trials succeeded</a:t>
-            </a:r>
-          </a:p>
-        </p:txBody>
+                <a16:creationId xmlns:a16="http://schemas.microsoft.com/office/drawing/2014/main" id="{67BDDCEA-5096-49B0-AE3E-C5F4FDD71783}"/>
+              </a:ext>
+            </a:extLst>
+          </p:cNvPr>
+          <p:cNvSpPr>
+            <a:spLocks xmlns:a="http://schemas.openxmlformats.org/drawingml/2006/main" noGrp="1"/>
+          </p:cNvSpPr>
+          <p:nvPr/>
+        </p:nvSpPr>
+        <p:spPr>
+          <a:xfrm xmlns:a="http://schemas.openxmlformats.org/drawingml/2006/main">
+            <a:off x="1524000" y="5410200"/>
+            <a:ext cx="85725" cy="85725"/>
+          </a:xfrm>
+          <a:prstGeom xmlns:a="http://schemas.openxmlformats.org/drawingml/2006/main" prst="rect">
+            <a:avLst/>
+          </a:prstGeom>
+          <a:solidFill xmlns:a="http://schemas.openxmlformats.org/drawingml/2006/main">
+            <a:srgbClr val="005AA9"/>
+          </a:solidFill>
+          <a:ln xmlns:a="http://schemas.openxmlformats.org/drawingml/2006/main" w="0">
+            <a:noFill/>
+            <a:prstDash val="solid"/>
+          </a:ln>
+        </p:spPr>
       </p:sp>
       <p:sp>
         <p:nvSpPr>
           <p:cNvPr id="13" name="">
             <a:extLst xmlns:a="http://schemas.openxmlformats.org/drawingml/2006/main">
               <a:ext uri="{FF2B5EF4-FFF2-40B4-BE49-F238E27FC236}">
-                <a16:creationId xmlns:a16="http://schemas.microsoft.com/office/drawing/2014/main" id="{15A2379E-2BC6-4B6D-A0FD-48EBFD6C0F64}"/>
-              </a:ext>
-            </a:extLst>
-          </p:cNvPr>
-          <p:cNvSpPr>
-            <a:spLocks xmlns:a="http://schemas.openxmlformats.org/drawingml/2006/main" noGrp="1"/>
-          </p:cNvSpPr>
-          <p:nvPr/>
-        </p:nvSpPr>
-        <p:spPr>
-          <a:xfrm xmlns:a="http://schemas.openxmlformats.org/drawingml/2006/main">
-            <a:off x="8191500" y="3962400"/>
-            <a:ext cx="2190750" cy="819150"/>
+                <a16:creationId xmlns:a16="http://schemas.microsoft.com/office/drawing/2014/main" id="{06608694-D935-4F3A-8E6C-E5F4014BF85D}"/>
+              </a:ext>
+            </a:extLst>
+          </p:cNvPr>
+          <p:cNvSpPr>
+            <a:spLocks xmlns:a="http://schemas.openxmlformats.org/drawingml/2006/main" noGrp="1"/>
+          </p:cNvSpPr>
+          <p:nvPr/>
+        </p:nvSpPr>
+        <p:spPr>
+          <a:xfrm xmlns:a="http://schemas.openxmlformats.org/drawingml/2006/main">
+            <a:off x="1752600" y="5334000"/>
+            <a:ext cx="7867650" cy="361950"/>
+          </a:xfrm>
+          <a:prstGeom xmlns:a="http://schemas.openxmlformats.org/drawingml/2006/main" prst="rect">
+            <a:avLst/>
+          </a:prstGeom>
+          <a:noFill xmlns:a="http://schemas.openxmlformats.org/drawingml/2006/main"/>
+          <a:ln xmlns:a="http://schemas.openxmlformats.org/drawingml/2006/main" w="0">
+            <a:noFill/>
+            <a:prstDash val="solid"/>
+          </a:ln>
+        </p:spPr>
+        <p:txBody>
+          <a:bodyPr xmlns:a="http://schemas.openxmlformats.org/drawingml/2006/main"/>
+          <a:lstStyle xmlns:a="http://schemas.openxmlformats.org/drawingml/2006/main"/>
+          <a:p xmlns:a="http://schemas.openxmlformats.org/drawingml/2006/main">
+            <a:pPr algn="l">
+              <a:lnSpc>
+                <a:spcPct val="108000"/>
+              </a:lnSpc>
+              <a:buNone/>
+              <a:defRPr sz="1200" b="0">
+                <a:solidFill>
+                  <a:srgbClr val="101820"/>
+                </a:solidFill>
+                <a:latin typeface="Arial"/>
+                <a:ea typeface="Arial"/>
+                <a:cs typeface="Arial"/>
+              </a:defRPr>
+            </a:pPr>
+            <a:r>
+              <a:rPr sz="1200" b="0">
+                <a:solidFill>
+                  <a:srgbClr val="101820"/>
+                </a:solidFill>
+                <a:latin typeface="Arial"/>
+                <a:ea typeface="Arial"/>
+                <a:cs typeface="Arial"/>
+              </a:rPr>
+              <a:t>Generation 1: 0% success</a:t>
+            </a:r>
+          </a:p>
+        </p:txBody>
+      </p:sp>
+      <p:sp>
+        <p:nvSpPr>
+          <p:cNvPr id="14" name="">
+            <a:extLst xmlns:a="http://schemas.openxmlformats.org/drawingml/2006/main">
+              <a:ext uri="{FF2B5EF4-FFF2-40B4-BE49-F238E27FC236}">
+                <a16:creationId xmlns:a16="http://schemas.microsoft.com/office/drawing/2014/main" id="{3F1D5DE9-4B8E-4C53-910F-3668C8C98D12}"/>
+              </a:ext>
+            </a:extLst>
+          </p:cNvPr>
+          <p:cNvSpPr>
+            <a:spLocks xmlns:a="http://schemas.openxmlformats.org/drawingml/2006/main" noGrp="1"/>
+          </p:cNvSpPr>
+          <p:nvPr/>
+        </p:nvSpPr>
+        <p:spPr>
+          <a:xfrm xmlns:a="http://schemas.openxmlformats.org/drawingml/2006/main">
+            <a:off x="1524000" y="5695950"/>
+            <a:ext cx="85725" cy="85725"/>
           </a:xfrm>
           <a:prstGeom xmlns:a="http://schemas.openxmlformats.org/drawingml/2006/main" prst="rect">
             <a:avLst/>
           </a:prstGeom>
           <a:solidFill xmlns:a="http://schemas.openxmlformats.org/drawingml/2006/main">
-            <a:srgbClr val="F4F7FA"/>
+            <a:srgbClr val="005AA9"/>
           </a:solidFill>
-          <a:ln xmlns:a="http://schemas.openxmlformats.org/drawingml/2006/main" w="9525">
-            <a:solidFill>
-              <a:srgbClr val="D7DEE8"/>
-            </a:solidFill>
-            <a:prstDash val="solid"/>
-          </a:ln>
-        </p:spPr>
-      </p:sp>
-      <p:sp>
-        <p:nvSpPr>
-          <p:cNvPr id="14" name="">
-            <a:extLst xmlns:a="http://schemas.openxmlformats.org/drawingml/2006/main">
-              <a:ext uri="{FF2B5EF4-FFF2-40B4-BE49-F238E27FC236}">
-                <a16:creationId xmlns:a16="http://schemas.microsoft.com/office/drawing/2014/main" id="{A17D7349-88B4-4C6A-AC63-29BA57669833}"/>
-              </a:ext>
-            </a:extLst>
-          </p:cNvPr>
-          <p:cNvSpPr>
-            <a:spLocks xmlns:a="http://schemas.openxmlformats.org/drawingml/2006/main" noGrp="1"/>
-          </p:cNvSpPr>
-          <p:nvPr/>
-        </p:nvSpPr>
-        <p:spPr>
-          <a:xfrm xmlns:a="http://schemas.openxmlformats.org/drawingml/2006/main">
-            <a:off x="8362950" y="4095750"/>
-            <a:ext cx="1847850" cy="304800"/>
-          </a:xfrm>
-          <a:prstGeom xmlns:a="http://schemas.openxmlformats.org/drawingml/2006/main" prst="rect">
-            <a:avLst/>
-          </a:prstGeom>
-          <a:noFill xmlns:a="http://schemas.openxmlformats.org/drawingml/2006/main"/>
-          <a:ln xmlns:a="http://schemas.openxmlformats.org/drawingml/2006/main" w="0">
-            <a:noFill/>
-            <a:prstDash val="solid"/>
-          </a:ln>
-        </p:spPr>
-        <p:txBody>
-          <a:bodyPr xmlns:a="http://schemas.openxmlformats.org/drawingml/2006/main"/>
-          <a:lstStyle xmlns:a="http://schemas.openxmlformats.org/drawingml/2006/main"/>
-          <a:p xmlns:a="http://schemas.openxmlformats.org/drawingml/2006/main">
-            <a:pPr algn="ctr">
-              <a:lnSpc>
-                <a:spcPct val="110000"/>
-              </a:lnSpc>
-              <a:buNone/>
-              <a:defRPr sz="1875" b="1">
-                <a:solidFill>
-                  <a:srgbClr val="073763"/>
-                </a:solidFill>
-                <a:latin typeface="Arial"/>
-                <a:ea typeface="Arial"/>
-                <a:cs typeface="Arial"/>
-              </a:defRPr>
-            </a:pPr>
-            <a:r>
-              <a:rPr sz="1875" b="1">
-                <a:solidFill>
-                  <a:srgbClr val="073763"/>
-                </a:solidFill>
-                <a:latin typeface="Arial"/>
-                <a:ea typeface="Arial"/>
-                <a:cs typeface="Arial"/>
-              </a:rPr>
-              <a:t>-150.10</a:t>
-            </a:r>
-          </a:p>
-        </p:txBody>
+          <a:ln xmlns:a="http://schemas.openxmlformats.org/drawingml/2006/main" w="0">
+            <a:noFill/>
+            <a:prstDash val="solid"/>
+          </a:ln>
+        </p:spPr>
       </p:sp>
       <p:sp>
         <p:nvSpPr>
           <p:cNvPr id="15" name="">
             <a:extLst xmlns:a="http://schemas.openxmlformats.org/drawingml/2006/main">
               <a:ext uri="{FF2B5EF4-FFF2-40B4-BE49-F238E27FC236}">
-                <a16:creationId xmlns:a16="http://schemas.microsoft.com/office/drawing/2014/main" id="{F9CBC13F-07B8-4CE2-85E1-720F2BB22A8C}"/>
-              </a:ext>
-            </a:extLst>
-          </p:cNvPr>
-          <p:cNvSpPr>
-            <a:spLocks xmlns:a="http://schemas.openxmlformats.org/drawingml/2006/main" noGrp="1"/>
-          </p:cNvSpPr>
-          <p:nvPr/>
-        </p:nvSpPr>
-        <p:spPr>
-          <a:xfrm xmlns:a="http://schemas.openxmlformats.org/drawingml/2006/main">
-            <a:off x="8343900" y="4438650"/>
-            <a:ext cx="1885950" cy="209550"/>
-          </a:xfrm>
-          <a:prstGeom xmlns:a="http://schemas.openxmlformats.org/drawingml/2006/main" prst="rect">
-            <a:avLst/>
-          </a:prstGeom>
-          <a:noFill xmlns:a="http://schemas.openxmlformats.org/drawingml/2006/main"/>
-          <a:ln xmlns:a="http://schemas.openxmlformats.org/drawingml/2006/main" w="0">
-            <a:noFill/>
-            <a:prstDash val="solid"/>
-          </a:ln>
-        </p:spPr>
-        <p:txBody>
-          <a:bodyPr xmlns:a="http://schemas.openxmlformats.org/drawingml/2006/main"/>
-          <a:lstStyle xmlns:a="http://schemas.openxmlformats.org/drawingml/2006/main"/>
-          <a:p xmlns:a="http://schemas.openxmlformats.org/drawingml/2006/main">
-            <a:pPr algn="ctr">
-              <a:lnSpc>
-                <a:spcPct val="110000"/>
-              </a:lnSpc>
-              <a:buNone/>
-              <a:defRPr sz="900" b="1">
-                <a:solidFill>
-                  <a:srgbClr val="5F6B7A"/>
-                </a:solidFill>
-                <a:latin typeface="Arial"/>
-                <a:ea typeface="Arial"/>
-                <a:cs typeface="Arial"/>
-              </a:defRPr>
-            </a:pPr>
-            <a:r>
-              <a:rPr sz="900" b="1">
-                <a:solidFill>
-                  <a:srgbClr val="5F6B7A"/>
-                </a:solidFill>
-                <a:latin typeface="Arial"/>
-                <a:ea typeface="Arial"/>
-                <a:cs typeface="Arial"/>
-              </a:rPr>
-              <a:t>avg reward</a:t>
+                <a16:creationId xmlns:a16="http://schemas.microsoft.com/office/drawing/2014/main" id="{7EDB8465-9A8D-4CF8-9AC6-78232E6B50D1}"/>
+              </a:ext>
+            </a:extLst>
+          </p:cNvPr>
+          <p:cNvSpPr>
+            <a:spLocks xmlns:a="http://schemas.openxmlformats.org/drawingml/2006/main" noGrp="1"/>
+          </p:cNvSpPr>
+          <p:nvPr/>
+        </p:nvSpPr>
+        <p:spPr>
+          <a:xfrm xmlns:a="http://schemas.openxmlformats.org/drawingml/2006/main">
+            <a:off x="1752600" y="5619750"/>
+            <a:ext cx="7867650" cy="361950"/>
+          </a:xfrm>
+          <a:prstGeom xmlns:a="http://schemas.openxmlformats.org/drawingml/2006/main" prst="rect">
+            <a:avLst/>
+          </a:prstGeom>
+          <a:noFill xmlns:a="http://schemas.openxmlformats.org/drawingml/2006/main"/>
+          <a:ln xmlns:a="http://schemas.openxmlformats.org/drawingml/2006/main" w="0">
+            <a:noFill/>
+            <a:prstDash val="solid"/>
+          </a:ln>
+        </p:spPr>
+        <p:txBody>
+          <a:bodyPr xmlns:a="http://schemas.openxmlformats.org/drawingml/2006/main"/>
+          <a:lstStyle xmlns:a="http://schemas.openxmlformats.org/drawingml/2006/main"/>
+          <a:p xmlns:a="http://schemas.openxmlformats.org/drawingml/2006/main">
+            <a:pPr algn="l">
+              <a:lnSpc>
+                <a:spcPct val="108000"/>
+              </a:lnSpc>
+              <a:buNone/>
+              <a:defRPr sz="1200" b="0">
+                <a:solidFill>
+                  <a:srgbClr val="101820"/>
+                </a:solidFill>
+                <a:latin typeface="Arial"/>
+                <a:ea typeface="Arial"/>
+                <a:cs typeface="Arial"/>
+              </a:defRPr>
+            </a:pPr>
+            <a:r>
+              <a:rPr sz="1200" b="0">
+                <a:solidFill>
+                  <a:srgbClr val="101820"/>
+                </a:solidFill>
+                <a:latin typeface="Arial"/>
+                <a:ea typeface="Arial"/>
+                <a:cs typeface="Arial"/>
+              </a:rPr>
+              <a:t>Generation 55: 100% success, avg fitness 560.20</a:t>
             </a:r>
           </a:p>
         </p:txBody>
@@ -3034,30 +3032,28 @@
           <p:cNvPr id="16" name="">
             <a:extLst xmlns:a="http://schemas.openxmlformats.org/drawingml/2006/main">
               <a:ext uri="{FF2B5EF4-FFF2-40B4-BE49-F238E27FC236}">
-                <a16:creationId xmlns:a16="http://schemas.microsoft.com/office/drawing/2014/main" id="{B0A69A06-7C2F-492C-843F-A84EA3E4BFCE}"/>
-              </a:ext>
-            </a:extLst>
-          </p:cNvPr>
-          <p:cNvSpPr>
-            <a:spLocks xmlns:a="http://schemas.openxmlformats.org/drawingml/2006/main" noGrp="1"/>
-          </p:cNvSpPr>
-          <p:nvPr/>
-        </p:nvSpPr>
-        <p:spPr>
-          <a:xfrm xmlns:a="http://schemas.openxmlformats.org/drawingml/2006/main">
-            <a:off x="8191500" y="5010150"/>
-            <a:ext cx="2190750" cy="819150"/>
+                <a16:creationId xmlns:a16="http://schemas.microsoft.com/office/drawing/2014/main" id="{22370712-3CEE-44D0-9E7E-2E2242CC0091}"/>
+              </a:ext>
+            </a:extLst>
+          </p:cNvPr>
+          <p:cNvSpPr>
+            <a:spLocks xmlns:a="http://schemas.openxmlformats.org/drawingml/2006/main" noGrp="1"/>
+          </p:cNvSpPr>
+          <p:nvPr/>
+        </p:nvSpPr>
+        <p:spPr>
+          <a:xfrm xmlns:a="http://schemas.openxmlformats.org/drawingml/2006/main">
+            <a:off x="1524000" y="5981700"/>
+            <a:ext cx="85725" cy="85725"/>
           </a:xfrm>
           <a:prstGeom xmlns:a="http://schemas.openxmlformats.org/drawingml/2006/main" prst="rect">
             <a:avLst/>
           </a:prstGeom>
           <a:solidFill xmlns:a="http://schemas.openxmlformats.org/drawingml/2006/main">
-            <a:srgbClr val="F4F7FA"/>
+            <a:srgbClr val="005AA9"/>
           </a:solidFill>
-          <a:ln xmlns:a="http://schemas.openxmlformats.org/drawingml/2006/main" w="9525">
-            <a:solidFill>
-              <a:srgbClr val="D7DEE8"/>
-            </a:solidFill>
+          <a:ln xmlns:a="http://schemas.openxmlformats.org/drawingml/2006/main" w="0">
+            <a:noFill/>
             <a:prstDash val="solid"/>
           </a:ln>
         </p:spPr>
@@ -3067,177 +3063,57 @@
           <p:cNvPr id="17" name="">
             <a:extLst xmlns:a="http://schemas.openxmlformats.org/drawingml/2006/main">
               <a:ext uri="{FF2B5EF4-FFF2-40B4-BE49-F238E27FC236}">
-                <a16:creationId xmlns:a16="http://schemas.microsoft.com/office/drawing/2014/main" id="{BE158432-6568-44D3-A109-56A2293EFA1A}"/>
-              </a:ext>
-            </a:extLst>
-          </p:cNvPr>
-          <p:cNvSpPr>
-            <a:spLocks xmlns:a="http://schemas.openxmlformats.org/drawingml/2006/main" noGrp="1"/>
-          </p:cNvSpPr>
-          <p:nvPr/>
-        </p:nvSpPr>
-        <p:spPr>
-          <a:xfrm xmlns:a="http://schemas.openxmlformats.org/drawingml/2006/main">
-            <a:off x="8362950" y="5143500"/>
-            <a:ext cx="1847850" cy="304800"/>
-          </a:xfrm>
-          <a:prstGeom xmlns:a="http://schemas.openxmlformats.org/drawingml/2006/main" prst="rect">
-            <a:avLst/>
-          </a:prstGeom>
-          <a:noFill xmlns:a="http://schemas.openxmlformats.org/drawingml/2006/main"/>
-          <a:ln xmlns:a="http://schemas.openxmlformats.org/drawingml/2006/main" w="0">
-            <a:noFill/>
-            <a:prstDash val="solid"/>
-          </a:ln>
-        </p:spPr>
-        <p:txBody>
-          <a:bodyPr xmlns:a="http://schemas.openxmlformats.org/drawingml/2006/main"/>
-          <a:lstStyle xmlns:a="http://schemas.openxmlformats.org/drawingml/2006/main"/>
-          <a:p xmlns:a="http://schemas.openxmlformats.org/drawingml/2006/main">
-            <a:pPr algn="ctr">
-              <a:lnSpc>
-                <a:spcPct val="110000"/>
-              </a:lnSpc>
-              <a:buNone/>
-              <a:defRPr sz="1875" b="1">
-                <a:solidFill>
-                  <a:srgbClr val="073763"/>
-                </a:solidFill>
-                <a:latin typeface="Arial"/>
-                <a:ea typeface="Arial"/>
-                <a:cs typeface="Arial"/>
-              </a:defRPr>
-            </a:pPr>
-            <a:r>
-              <a:rPr sz="1875" b="1">
-                <a:solidFill>
-                  <a:srgbClr val="073763"/>
-                </a:solidFill>
-                <a:latin typeface="Arial"/>
-                <a:ea typeface="Arial"/>
-                <a:cs typeface="Arial"/>
-              </a:rPr>
-              <a:t>549.90</a:t>
-            </a:r>
-          </a:p>
-        </p:txBody>
-      </p:sp>
-      <p:sp>
-        <p:nvSpPr>
-          <p:cNvPr id="18" name="">
-            <a:extLst xmlns:a="http://schemas.openxmlformats.org/drawingml/2006/main">
-              <a:ext uri="{FF2B5EF4-FFF2-40B4-BE49-F238E27FC236}">
-                <a16:creationId xmlns:a16="http://schemas.microsoft.com/office/drawing/2014/main" id="{F9C2B68F-5857-428B-A18F-D848CADC59B7}"/>
-              </a:ext>
-            </a:extLst>
-          </p:cNvPr>
-          <p:cNvSpPr>
-            <a:spLocks xmlns:a="http://schemas.openxmlformats.org/drawingml/2006/main" noGrp="1"/>
-          </p:cNvSpPr>
-          <p:nvPr/>
-        </p:nvSpPr>
-        <p:spPr>
-          <a:xfrm xmlns:a="http://schemas.openxmlformats.org/drawingml/2006/main">
-            <a:off x="8343900" y="5486400"/>
-            <a:ext cx="1885950" cy="209550"/>
-          </a:xfrm>
-          <a:prstGeom xmlns:a="http://schemas.openxmlformats.org/drawingml/2006/main" prst="rect">
-            <a:avLst/>
-          </a:prstGeom>
-          <a:noFill xmlns:a="http://schemas.openxmlformats.org/drawingml/2006/main"/>
-          <a:ln xmlns:a="http://schemas.openxmlformats.org/drawingml/2006/main" w="0">
-            <a:noFill/>
-            <a:prstDash val="solid"/>
-          </a:ln>
-        </p:spPr>
-        <p:txBody>
-          <a:bodyPr xmlns:a="http://schemas.openxmlformats.org/drawingml/2006/main"/>
-          <a:lstStyle xmlns:a="http://schemas.openxmlformats.org/drawingml/2006/main"/>
-          <a:p xmlns:a="http://schemas.openxmlformats.org/drawingml/2006/main">
-            <a:pPr algn="ctr">
-              <a:lnSpc>
-                <a:spcPct val="110000"/>
-              </a:lnSpc>
-              <a:buNone/>
-              <a:defRPr sz="900" b="1">
-                <a:solidFill>
-                  <a:srgbClr val="5F6B7A"/>
-                </a:solidFill>
-                <a:latin typeface="Arial"/>
-                <a:ea typeface="Arial"/>
-                <a:cs typeface="Arial"/>
-              </a:defRPr>
-            </a:pPr>
-            <a:r>
-              <a:rPr sz="900" b="1">
-                <a:solidFill>
-                  <a:srgbClr val="5F6B7A"/>
-                </a:solidFill>
-                <a:latin typeface="Arial"/>
-                <a:ea typeface="Arial"/>
-                <a:cs typeface="Arial"/>
-              </a:rPr>
-              <a:t>avg fitness</a:t>
-            </a:r>
-          </a:p>
-        </p:txBody>
-      </p:sp>
-      <p:sp>
-        <p:nvSpPr>
-          <p:cNvPr id="19" name="">
-            <a:extLst xmlns:a="http://schemas.openxmlformats.org/drawingml/2006/main">
-              <a:ext uri="{FF2B5EF4-FFF2-40B4-BE49-F238E27FC236}">
-                <a16:creationId xmlns:a16="http://schemas.microsoft.com/office/drawing/2014/main" id="{AD52E23E-E7A3-4F30-9020-315365ED78AC}"/>
-              </a:ext>
-            </a:extLst>
-          </p:cNvPr>
-          <p:cNvSpPr>
-            <a:spLocks xmlns:a="http://schemas.openxmlformats.org/drawingml/2006/main" noGrp="1"/>
-          </p:cNvSpPr>
-          <p:nvPr/>
-        </p:nvSpPr>
-        <p:spPr>
-          <a:xfrm xmlns:a="http://schemas.openxmlformats.org/drawingml/2006/main">
-            <a:off x="7905750" y="5905500"/>
-            <a:ext cx="2762250" cy="323850"/>
-          </a:xfrm>
-          <a:prstGeom xmlns:a="http://schemas.openxmlformats.org/drawingml/2006/main" prst="rect">
-            <a:avLst/>
-          </a:prstGeom>
-          <a:noFill xmlns:a="http://schemas.openxmlformats.org/drawingml/2006/main"/>
-          <a:ln xmlns:a="http://schemas.openxmlformats.org/drawingml/2006/main" w="0">
-            <a:noFill/>
-            <a:prstDash val="solid"/>
-          </a:ln>
-        </p:spPr>
-        <p:txBody>
-          <a:bodyPr xmlns:a="http://schemas.openxmlformats.org/drawingml/2006/main"/>
-          <a:lstStyle xmlns:a="http://schemas.openxmlformats.org/drawingml/2006/main"/>
-          <a:p xmlns:a="http://schemas.openxmlformats.org/drawingml/2006/main">
-            <a:pPr algn="ctr">
-              <a:lnSpc>
-                <a:spcPct val="110000"/>
-              </a:lnSpc>
-              <a:buNone/>
-              <a:defRPr sz="975" b="1">
-                <a:solidFill>
-                  <a:srgbClr val="5F6B7A"/>
-                </a:solidFill>
-                <a:latin typeface="Arial"/>
-                <a:ea typeface="Arial"/>
-                <a:cs typeface="Arial"/>
-              </a:defRPr>
-            </a:pPr>
-            <a:r>
-              <a:rPr sz="975" b="1">
-                <a:solidFill>
-                  <a:srgbClr val="5F6B7A"/>
-                </a:solidFill>
-                <a:latin typeface="Arial"/>
-                <a:ea typeface="Arial"/>
-                <a:cs typeface="Arial"/>
-              </a:rPr>
-              <a:t>Step count changes by seed, but the policy reaches the goal every time.</a:t>
+                <a16:creationId xmlns:a16="http://schemas.microsoft.com/office/drawing/2014/main" id="{7AD1E51B-4E42-4243-8875-8325F89F273F}"/>
+              </a:ext>
+            </a:extLst>
+          </p:cNvPr>
+          <p:cNvSpPr>
+            <a:spLocks xmlns:a="http://schemas.openxmlformats.org/drawingml/2006/main" noGrp="1"/>
+          </p:cNvSpPr>
+          <p:nvPr/>
+        </p:nvSpPr>
+        <p:spPr>
+          <a:xfrm xmlns:a="http://schemas.openxmlformats.org/drawingml/2006/main">
+            <a:off x="1752600" y="5905500"/>
+            <a:ext cx="7867650" cy="361950"/>
+          </a:xfrm>
+          <a:prstGeom xmlns:a="http://schemas.openxmlformats.org/drawingml/2006/main" prst="rect">
+            <a:avLst/>
+          </a:prstGeom>
+          <a:noFill xmlns:a="http://schemas.openxmlformats.org/drawingml/2006/main"/>
+          <a:ln xmlns:a="http://schemas.openxmlformats.org/drawingml/2006/main" w="0">
+            <a:noFill/>
+            <a:prstDash val="solid"/>
+          </a:ln>
+        </p:spPr>
+        <p:txBody>
+          <a:bodyPr xmlns:a="http://schemas.openxmlformats.org/drawingml/2006/main"/>
+          <a:lstStyle xmlns:a="http://schemas.openxmlformats.org/drawingml/2006/main"/>
+          <a:p xmlns:a="http://schemas.openxmlformats.org/drawingml/2006/main">
+            <a:pPr algn="l">
+              <a:lnSpc>
+                <a:spcPct val="108000"/>
+              </a:lnSpc>
+              <a:buNone/>
+              <a:defRPr sz="1200" b="0">
+                <a:solidFill>
+                  <a:srgbClr val="101820"/>
+                </a:solidFill>
+                <a:latin typeface="Arial"/>
+                <a:ea typeface="Arial"/>
+                <a:cs typeface="Arial"/>
+              </a:defRPr>
+            </a:pPr>
+            <a:r>
+              <a:rPr sz="1200" b="0">
+                <a:solidFill>
+                  <a:srgbClr val="101820"/>
+                </a:solidFill>
+                <a:latin typeface="Arial"/>
+                <a:ea typeface="Arial"/>
+                <a:cs typeface="Arial"/>
+              </a:rPr>
+              <a:t>Generation 60: 100% success, avg fitness 558.80</a:t>
             </a:r>
           </a:p>
         </p:txBody>
@@ -3245,7 +3121,7 @@
     </p:spTree>
     <p:extLst>
       <p:ext uri="{BB962C8B-B14F-4D97-AF65-F5344CB8AC3E}">
-        <p14:creationId xmlns:p14="http://schemas.microsoft.com/office/powerpoint/2010/main" val="1064487532"/>
+        <p14:creationId xmlns:p14="http://schemas.microsoft.com/office/powerpoint/2010/main" val="665453961"/>
       </p:ext>
     </p:extLst>
   </p:cSld>
@@ -3276,7 +3152,7 @@
           <p:cNvPr id="1" name="">
             <a:extLst xmlns:a="http://schemas.openxmlformats.org/drawingml/2006/main">
               <a:ext uri="{FF2B5EF4-FFF2-40B4-BE49-F238E27FC236}">
-                <a16:creationId xmlns:a16="http://schemas.microsoft.com/office/drawing/2014/main" id="{264B7515-9D62-4FE8-BD53-92DB1D13F56E}"/>
+                <a16:creationId xmlns:a16="http://schemas.microsoft.com/office/drawing/2014/main" id="{281B1B7B-264B-4CB3-860E-D0D6737710DF}"/>
               </a:ext>
             </a:extLst>
           </p:cNvPr>
@@ -3307,7 +3183,7 @@
           <p:cNvPr id="2" name="">
             <a:extLst xmlns:a="http://schemas.openxmlformats.org/drawingml/2006/main">
               <a:ext uri="{FF2B5EF4-FFF2-40B4-BE49-F238E27FC236}">
-                <a16:creationId xmlns:a16="http://schemas.microsoft.com/office/drawing/2014/main" id="{EFF87F09-9705-4AC1-9920-ACF33E6E3226}"/>
+                <a16:creationId xmlns:a16="http://schemas.microsoft.com/office/drawing/2014/main" id="{46647C81-9DC4-481F-9CD0-5D192D233ED1}"/>
               </a:ext>
             </a:extLst>
           </p:cNvPr>
@@ -3367,7 +3243,7 @@
           <p:cNvPr id="3" name="">
             <a:extLst xmlns:a="http://schemas.openxmlformats.org/drawingml/2006/main">
               <a:ext uri="{FF2B5EF4-FFF2-40B4-BE49-F238E27FC236}">
-                <a16:creationId xmlns:a16="http://schemas.microsoft.com/office/drawing/2014/main" id="{9DDC01CA-083D-4D2D-89AC-1A55B2F41E0F}"/>
+                <a16:creationId xmlns:a16="http://schemas.microsoft.com/office/drawing/2014/main" id="{3DD52DF3-19E3-4826-83B9-7739C5FA416B}"/>
               </a:ext>
             </a:extLst>
           </p:cNvPr>
@@ -3427,7 +3303,7 @@
           <p:cNvPr id="4" name="">
             <a:extLst xmlns:a="http://schemas.openxmlformats.org/drawingml/2006/main">
               <a:ext uri="{FF2B5EF4-FFF2-40B4-BE49-F238E27FC236}">
-                <a16:creationId xmlns:a16="http://schemas.microsoft.com/office/drawing/2014/main" id="{A69AF3DB-4B35-4204-9E43-3DAF8106C41A}"/>
+                <a16:creationId xmlns:a16="http://schemas.microsoft.com/office/drawing/2014/main" id="{BC7FF1E7-78A2-4E60-A3F5-BF6E4B523681}"/>
               </a:ext>
             </a:extLst>
           </p:cNvPr>
@@ -3477,7 +3353,7 @@
                 <a:ea typeface="Arial"/>
                 <a:cs typeface="Arial"/>
               </a:rPr>
-              <a:t>DEMO</a:t>
+              <a:t>ROBUSTNESS</a:t>
             </a:r>
           </a:p>
         </p:txBody>
@@ -3487,7 +3363,7 @@
           <p:cNvPr id="5" name="">
             <a:extLst xmlns:a="http://schemas.openxmlformats.org/drawingml/2006/main">
               <a:ext uri="{FF2B5EF4-FFF2-40B4-BE49-F238E27FC236}">
-                <a16:creationId xmlns:a16="http://schemas.microsoft.com/office/drawing/2014/main" id="{ADBADF68-7BF4-46C0-8133-E88D378E9013}"/>
+                <a16:creationId xmlns:a16="http://schemas.microsoft.com/office/drawing/2014/main" id="{46B2198F-06D4-44D2-85B9-54EC78614144}"/>
               </a:ext>
             </a:extLst>
           </p:cNvPr>
@@ -3518,7 +3394,7 @@
           <p:cNvPr id="6" name="">
             <a:extLst xmlns:a="http://schemas.openxmlformats.org/drawingml/2006/main">
               <a:ext uri="{FF2B5EF4-FFF2-40B4-BE49-F238E27FC236}">
-                <a16:creationId xmlns:a16="http://schemas.microsoft.com/office/drawing/2014/main" id="{DD347277-5778-4E62-BC9C-3BB06A559DFC}"/>
+                <a16:creationId xmlns:a16="http://schemas.microsoft.com/office/drawing/2014/main" id="{663F210B-CBA7-49B2-9A41-A246D17E6D27}"/>
               </a:ext>
             </a:extLst>
           </p:cNvPr>
@@ -3568,7 +3444,7 @@
                 <a:ea typeface="Arial"/>
                 <a:cs typeface="Arial"/>
               </a:rPr>
-              <a:t>Graphical Demonstration</a:t>
+              <a:t>Experiment 3: Randomization Effects</a:t>
             </a:r>
           </a:p>
         </p:txBody>
@@ -3578,7 +3454,7 @@
           <p:cNvPr id="7" name="">
             <a:extLst xmlns:a="http://schemas.openxmlformats.org/drawingml/2006/main">
               <a:ext uri="{FF2B5EF4-FFF2-40B4-BE49-F238E27FC236}">
-                <a16:creationId xmlns:a16="http://schemas.microsoft.com/office/drawing/2014/main" id="{E6F78986-34B7-475C-B228-E494A6AEE62A}"/>
+                <a16:creationId xmlns:a16="http://schemas.microsoft.com/office/drawing/2014/main" id="{C7FDE9AE-5D48-45D5-AA73-6175E4D5D96B}"/>
               </a:ext>
             </a:extLst>
           </p:cNvPr>
@@ -3628,7 +3504,7 @@
                 <a:ea typeface="Arial"/>
                 <a:cs typeface="Arial"/>
               </a:rPr>
-              <a:t>The saved best policy can be shown without retraining.</a:t>
+              <a:t>The final policy was tested under 20 different reset seeds.</a:t>
             </a:r>
           </a:p>
         </p:txBody>
@@ -3638,19 +3514,19 @@
           <p:cNvPr id="8" name="">
             <a:extLst xmlns:a="http://schemas.openxmlformats.org/drawingml/2006/main">
               <a:ext uri="{FF2B5EF4-FFF2-40B4-BE49-F238E27FC236}">
-                <a16:creationId xmlns:a16="http://schemas.microsoft.com/office/drawing/2014/main" id="{C2C26075-8F8A-4E52-9DDA-E7FAAC606BCB}"/>
-              </a:ext>
-            </a:extLst>
-          </p:cNvPr>
-          <p:cNvSpPr>
-            <a:spLocks xmlns:a="http://schemas.openxmlformats.org/drawingml/2006/main" noGrp="1"/>
-          </p:cNvSpPr>
-          <p:nvPr/>
-        </p:nvSpPr>
-        <p:spPr>
-          <a:xfrm xmlns:a="http://schemas.openxmlformats.org/drawingml/2006/main">
-            <a:off x="742950" y="2705100"/>
-            <a:ext cx="5905500" cy="3429000"/>
+                <a16:creationId xmlns:a16="http://schemas.microsoft.com/office/drawing/2014/main" id="{A2C16CDA-F88E-462C-A1DD-C9BD6383C3A5}"/>
+              </a:ext>
+            </a:extLst>
+          </p:cNvPr>
+          <p:cNvSpPr>
+            <a:spLocks xmlns:a="http://schemas.openxmlformats.org/drawingml/2006/main" noGrp="1"/>
+          </p:cNvSpPr>
+          <p:nvPr/>
+        </p:nvSpPr>
+        <p:spPr>
+          <a:xfrm xmlns:a="http://schemas.openxmlformats.org/drawingml/2006/main">
+            <a:off x="647700" y="2628900"/>
+            <a:ext cx="7048500" cy="3638550"/>
           </a:xfrm>
           <a:prstGeom xmlns:a="http://schemas.openxmlformats.org/drawingml/2006/main" prst="rect">
             <a:avLst/>
@@ -3668,20 +3544,20 @@
       </p:sp>
       <p:pic>
         <p:nvPicPr>
-          <p:cNvPr id="33" name=""/>
+          <p:cNvPr id="29" name=""/>
           <p:cNvPicPr>
             <a:picLocks xmlns:a="http://schemas.openxmlformats.org/drawingml/2006/main" noChangeAspect="1"/>
           </p:cNvPicPr>
           <p:nvPr/>
         </p:nvPicPr>
         <p:blipFill>
-          <a:blip xmlns:r="http://schemas.openxmlformats.org/officeDocument/2006/relationships" xmlns:a="http://schemas.openxmlformats.org/drawingml/2006/main" r:embed="R75a25f14c902449b"/>
+          <a:blip xmlns:r="http://schemas.openxmlformats.org/officeDocument/2006/relationships" xmlns:a="http://schemas.openxmlformats.org/drawingml/2006/main" r:embed="Rdba4b1ef79cf435f"/>
           <a:stretch xmlns:a="http://schemas.openxmlformats.org/drawingml/2006/main"/>
         </p:blipFill>
         <p:spPr>
           <a:xfrm xmlns:a="http://schemas.openxmlformats.org/drawingml/2006/main">
-            <a:off x="1423988" y="2895600"/>
-            <a:ext cx="4543425" cy="3028950"/>
+            <a:off x="1671638" y="2781300"/>
+            <a:ext cx="5000625" cy="3333750"/>
           </a:xfrm>
           <a:prstGeom xmlns:a="http://schemas.openxmlformats.org/drawingml/2006/main" prst="rect">
             <a:avLst/>
@@ -3693,79 +3569,19 @@
           <p:cNvPr id="10" name="">
             <a:extLst xmlns:a="http://schemas.openxmlformats.org/drawingml/2006/main">
               <a:ext uri="{FF2B5EF4-FFF2-40B4-BE49-F238E27FC236}">
-                <a16:creationId xmlns:a16="http://schemas.microsoft.com/office/drawing/2014/main" id="{45AB8670-03BB-4BF1-841A-68B1BAD8DC95}"/>
-              </a:ext>
-            </a:extLst>
-          </p:cNvPr>
-          <p:cNvSpPr>
-            <a:spLocks xmlns:a="http://schemas.openxmlformats.org/drawingml/2006/main" noGrp="1"/>
-          </p:cNvSpPr>
-          <p:nvPr/>
-        </p:nvSpPr>
-        <p:spPr>
-          <a:xfrm xmlns:a="http://schemas.openxmlformats.org/drawingml/2006/main">
-            <a:off x="7239000" y="2838450"/>
-            <a:ext cx="3048000" cy="285750"/>
-          </a:xfrm>
-          <a:prstGeom xmlns:a="http://schemas.openxmlformats.org/drawingml/2006/main" prst="rect">
-            <a:avLst/>
-          </a:prstGeom>
-          <a:noFill xmlns:a="http://schemas.openxmlformats.org/drawingml/2006/main"/>
-          <a:ln xmlns:a="http://schemas.openxmlformats.org/drawingml/2006/main" w="0">
-            <a:noFill/>
-            <a:prstDash val="solid"/>
-          </a:ln>
-        </p:spPr>
-        <p:txBody>
-          <a:bodyPr xmlns:a="http://schemas.openxmlformats.org/drawingml/2006/main"/>
-          <a:lstStyle xmlns:a="http://schemas.openxmlformats.org/drawingml/2006/main"/>
-          <a:p xmlns:a="http://schemas.openxmlformats.org/drawingml/2006/main">
-            <a:pPr algn="l">
-              <a:lnSpc>
-                <a:spcPct val="110000"/>
-              </a:lnSpc>
-              <a:buNone/>
-              <a:defRPr sz="1575" b="1">
-                <a:solidFill>
-                  <a:srgbClr val="101820"/>
-                </a:solidFill>
-                <a:latin typeface="Arial"/>
-                <a:ea typeface="Arial"/>
-                <a:cs typeface="Arial"/>
-              </a:defRPr>
-            </a:pPr>
-            <a:r>
-              <a:rPr sz="1575" b="1">
-                <a:solidFill>
-                  <a:srgbClr val="101820"/>
-                </a:solidFill>
-                <a:latin typeface="Arial"/>
-                <a:ea typeface="Arial"/>
-                <a:cs typeface="Arial"/>
-              </a:rPr>
-              <a:t>Demo command</a:t>
-            </a:r>
-          </a:p>
-        </p:txBody>
-      </p:sp>
-      <p:sp>
-        <p:nvSpPr>
-          <p:cNvPr id="11" name="">
-            <a:extLst xmlns:a="http://schemas.openxmlformats.org/drawingml/2006/main">
-              <a:ext uri="{FF2B5EF4-FFF2-40B4-BE49-F238E27FC236}">
-                <a16:creationId xmlns:a16="http://schemas.microsoft.com/office/drawing/2014/main" id="{74B0F7B7-7B9D-481C-B844-3AC783306EF7}"/>
-              </a:ext>
-            </a:extLst>
-          </p:cNvPr>
-          <p:cNvSpPr>
-            <a:spLocks xmlns:a="http://schemas.openxmlformats.org/drawingml/2006/main" noGrp="1"/>
-          </p:cNvSpPr>
-          <p:nvPr/>
-        </p:nvSpPr>
-        <p:spPr>
-          <a:xfrm xmlns:a="http://schemas.openxmlformats.org/drawingml/2006/main">
-            <a:off x="7239000" y="3276600"/>
-            <a:ext cx="3429000" cy="514350"/>
+                <a16:creationId xmlns:a16="http://schemas.microsoft.com/office/drawing/2014/main" id="{15006FA4-E8F5-4310-B0B7-44428090D829}"/>
+              </a:ext>
+            </a:extLst>
+          </p:cNvPr>
+          <p:cNvSpPr>
+            <a:spLocks xmlns:a="http://schemas.openxmlformats.org/drawingml/2006/main" noGrp="1"/>
+          </p:cNvSpPr>
+          <p:nvPr/>
+        </p:nvSpPr>
+        <p:spPr>
+          <a:xfrm xmlns:a="http://schemas.openxmlformats.org/drawingml/2006/main">
+            <a:off x="8191500" y="2914650"/>
+            <a:ext cx="2190750" cy="819150"/>
           </a:xfrm>
           <a:prstGeom xmlns:a="http://schemas.openxmlformats.org/drawingml/2006/main" prst="rect">
             <a:avLst/>
@@ -3783,22 +3599,82 @@
       </p:sp>
       <p:sp>
         <p:nvSpPr>
+          <p:cNvPr id="11" name="">
+            <a:extLst xmlns:a="http://schemas.openxmlformats.org/drawingml/2006/main">
+              <a:ext uri="{FF2B5EF4-FFF2-40B4-BE49-F238E27FC236}">
+                <a16:creationId xmlns:a16="http://schemas.microsoft.com/office/drawing/2014/main" id="{EEAB93A4-AA00-45AE-B8C2-F76B486806A3}"/>
+              </a:ext>
+            </a:extLst>
+          </p:cNvPr>
+          <p:cNvSpPr>
+            <a:spLocks xmlns:a="http://schemas.openxmlformats.org/drawingml/2006/main" noGrp="1"/>
+          </p:cNvSpPr>
+          <p:nvPr/>
+        </p:nvSpPr>
+        <p:spPr>
+          <a:xfrm xmlns:a="http://schemas.openxmlformats.org/drawingml/2006/main">
+            <a:off x="8362950" y="3048000"/>
+            <a:ext cx="1847850" cy="304800"/>
+          </a:xfrm>
+          <a:prstGeom xmlns:a="http://schemas.openxmlformats.org/drawingml/2006/main" prst="rect">
+            <a:avLst/>
+          </a:prstGeom>
+          <a:noFill xmlns:a="http://schemas.openxmlformats.org/drawingml/2006/main"/>
+          <a:ln xmlns:a="http://schemas.openxmlformats.org/drawingml/2006/main" w="0">
+            <a:noFill/>
+            <a:prstDash val="solid"/>
+          </a:ln>
+        </p:spPr>
+        <p:txBody>
+          <a:bodyPr xmlns:a="http://schemas.openxmlformats.org/drawingml/2006/main"/>
+          <a:lstStyle xmlns:a="http://schemas.openxmlformats.org/drawingml/2006/main"/>
+          <a:p xmlns:a="http://schemas.openxmlformats.org/drawingml/2006/main">
+            <a:pPr algn="ctr">
+              <a:lnSpc>
+                <a:spcPct val="110000"/>
+              </a:lnSpc>
+              <a:buNone/>
+              <a:defRPr sz="1875" b="1">
+                <a:solidFill>
+                  <a:srgbClr val="073763"/>
+                </a:solidFill>
+                <a:latin typeface="Arial"/>
+                <a:ea typeface="Arial"/>
+                <a:cs typeface="Arial"/>
+              </a:defRPr>
+            </a:pPr>
+            <a:r>
+              <a:rPr sz="1875" b="1">
+                <a:solidFill>
+                  <a:srgbClr val="073763"/>
+                </a:solidFill>
+                <a:latin typeface="Arial"/>
+                <a:ea typeface="Arial"/>
+                <a:cs typeface="Arial"/>
+              </a:rPr>
+              <a:t>20/20</a:t>
+            </a:r>
+          </a:p>
+        </p:txBody>
+      </p:sp>
+      <p:sp>
+        <p:nvSpPr>
           <p:cNvPr id="12" name="">
             <a:extLst xmlns:a="http://schemas.openxmlformats.org/drawingml/2006/main">
               <a:ext uri="{FF2B5EF4-FFF2-40B4-BE49-F238E27FC236}">
-                <a16:creationId xmlns:a16="http://schemas.microsoft.com/office/drawing/2014/main" id="{8B823BE6-8947-433A-8AFE-114BFBD818B2}"/>
-              </a:ext>
-            </a:extLst>
-          </p:cNvPr>
-          <p:cNvSpPr>
-            <a:spLocks xmlns:a="http://schemas.openxmlformats.org/drawingml/2006/main" noGrp="1"/>
-          </p:cNvSpPr>
-          <p:nvPr/>
-        </p:nvSpPr>
-        <p:spPr>
-          <a:xfrm xmlns:a="http://schemas.openxmlformats.org/drawingml/2006/main">
-            <a:off x="7410450" y="3429000"/>
-            <a:ext cx="3124200" cy="228600"/>
+                <a16:creationId xmlns:a16="http://schemas.microsoft.com/office/drawing/2014/main" id="{D636D766-BA01-46F5-A9F0-38C0C0DB6E65}"/>
+              </a:ext>
+            </a:extLst>
+          </p:cNvPr>
+          <p:cNvSpPr>
+            <a:spLocks xmlns:a="http://schemas.openxmlformats.org/drawingml/2006/main" noGrp="1"/>
+          </p:cNvSpPr>
+          <p:nvPr/>
+        </p:nvSpPr>
+        <p:spPr>
+          <a:xfrm xmlns:a="http://schemas.openxmlformats.org/drawingml/2006/main">
+            <a:off x="8343900" y="3390900"/>
+            <a:ext cx="1885950" cy="209550"/>
           </a:xfrm>
           <a:prstGeom xmlns:a="http://schemas.openxmlformats.org/drawingml/2006/main" prst="rect">
             <a:avLst/>
@@ -3818,7 +3694,100 @@
                 <a:spcPct val="110000"/>
               </a:lnSpc>
               <a:buNone/>
-              <a:defRPr sz="1125" b="1">
+              <a:defRPr sz="900" b="1">
+                <a:solidFill>
+                  <a:srgbClr val="5F6B7A"/>
+                </a:solidFill>
+                <a:latin typeface="Arial"/>
+                <a:ea typeface="Arial"/>
+                <a:cs typeface="Arial"/>
+              </a:defRPr>
+            </a:pPr>
+            <a:r>
+              <a:rPr sz="900" b="1">
+                <a:solidFill>
+                  <a:srgbClr val="5F6B7A"/>
+                </a:solidFill>
+                <a:latin typeface="Arial"/>
+                <a:ea typeface="Arial"/>
+                <a:cs typeface="Arial"/>
+              </a:rPr>
+              <a:t>trials succeeded</a:t>
+            </a:r>
+          </a:p>
+        </p:txBody>
+      </p:sp>
+      <p:sp>
+        <p:nvSpPr>
+          <p:cNvPr id="13" name="">
+            <a:extLst xmlns:a="http://schemas.openxmlformats.org/drawingml/2006/main">
+              <a:ext uri="{FF2B5EF4-FFF2-40B4-BE49-F238E27FC236}">
+                <a16:creationId xmlns:a16="http://schemas.microsoft.com/office/drawing/2014/main" id="{15A2379E-2BC6-4B6D-A0FD-48EBFD6C0F64}"/>
+              </a:ext>
+            </a:extLst>
+          </p:cNvPr>
+          <p:cNvSpPr>
+            <a:spLocks xmlns:a="http://schemas.openxmlformats.org/drawingml/2006/main" noGrp="1"/>
+          </p:cNvSpPr>
+          <p:nvPr/>
+        </p:nvSpPr>
+        <p:spPr>
+          <a:xfrm xmlns:a="http://schemas.openxmlformats.org/drawingml/2006/main">
+            <a:off x="8191500" y="3962400"/>
+            <a:ext cx="2190750" cy="819150"/>
+          </a:xfrm>
+          <a:prstGeom xmlns:a="http://schemas.openxmlformats.org/drawingml/2006/main" prst="rect">
+            <a:avLst/>
+          </a:prstGeom>
+          <a:solidFill xmlns:a="http://schemas.openxmlformats.org/drawingml/2006/main">
+            <a:srgbClr val="F4F7FA"/>
+          </a:solidFill>
+          <a:ln xmlns:a="http://schemas.openxmlformats.org/drawingml/2006/main" w="9525">
+            <a:solidFill>
+              <a:srgbClr val="D7DEE8"/>
+            </a:solidFill>
+            <a:prstDash val="solid"/>
+          </a:ln>
+        </p:spPr>
+      </p:sp>
+      <p:sp>
+        <p:nvSpPr>
+          <p:cNvPr id="14" name="">
+            <a:extLst xmlns:a="http://schemas.openxmlformats.org/drawingml/2006/main">
+              <a:ext uri="{FF2B5EF4-FFF2-40B4-BE49-F238E27FC236}">
+                <a16:creationId xmlns:a16="http://schemas.microsoft.com/office/drawing/2014/main" id="{A17D7349-88B4-4C6A-AC63-29BA57669833}"/>
+              </a:ext>
+            </a:extLst>
+          </p:cNvPr>
+          <p:cNvSpPr>
+            <a:spLocks xmlns:a="http://schemas.openxmlformats.org/drawingml/2006/main" noGrp="1"/>
+          </p:cNvSpPr>
+          <p:nvPr/>
+        </p:nvSpPr>
+        <p:spPr>
+          <a:xfrm xmlns:a="http://schemas.openxmlformats.org/drawingml/2006/main">
+            <a:off x="8362950" y="4095750"/>
+            <a:ext cx="1847850" cy="304800"/>
+          </a:xfrm>
+          <a:prstGeom xmlns:a="http://schemas.openxmlformats.org/drawingml/2006/main" prst="rect">
+            <a:avLst/>
+          </a:prstGeom>
+          <a:noFill xmlns:a="http://schemas.openxmlformats.org/drawingml/2006/main"/>
+          <a:ln xmlns:a="http://schemas.openxmlformats.org/drawingml/2006/main" w="0">
+            <a:noFill/>
+            <a:prstDash val="solid"/>
+          </a:ln>
+        </p:spPr>
+        <p:txBody>
+          <a:bodyPr xmlns:a="http://schemas.openxmlformats.org/drawingml/2006/main"/>
+          <a:lstStyle xmlns:a="http://schemas.openxmlformats.org/drawingml/2006/main"/>
+          <a:p xmlns:a="http://schemas.openxmlformats.org/drawingml/2006/main">
+            <a:pPr algn="ctr">
+              <a:lnSpc>
+                <a:spcPct val="110000"/>
+              </a:lnSpc>
+              <a:buNone/>
+              <a:defRPr sz="1875" b="1">
                 <a:solidFill>
                   <a:srgbClr val="073763"/>
                 </a:solidFill>
@@ -3828,7 +3797,7 @@
               </a:defRPr>
             </a:pPr>
             <a:r>
-              <a:rPr sz="1125" b="1">
+              <a:rPr sz="1875" b="1">
                 <a:solidFill>
                   <a:srgbClr val="073763"/>
                 </a:solidFill>
@@ -3836,189 +3805,100 @@
                 <a:ea typeface="Arial"/>
                 <a:cs typeface="Arial"/>
               </a:rPr>
-              <a:t>python IMPL/visualize_best_solution.py</a:t>
-            </a:r>
-          </a:p>
-        </p:txBody>
-      </p:sp>
-      <p:sp>
-        <p:nvSpPr>
-          <p:cNvPr id="13" name="">
-            <a:extLst xmlns:a="http://schemas.openxmlformats.org/drawingml/2006/main">
-              <a:ext uri="{FF2B5EF4-FFF2-40B4-BE49-F238E27FC236}">
-                <a16:creationId xmlns:a16="http://schemas.microsoft.com/office/drawing/2014/main" id="{8E1C4389-3A5E-4953-9E88-A18E11B79CAB}"/>
-              </a:ext>
-            </a:extLst>
-          </p:cNvPr>
-          <p:cNvSpPr>
-            <a:spLocks xmlns:a="http://schemas.openxmlformats.org/drawingml/2006/main" noGrp="1"/>
-          </p:cNvSpPr>
-          <p:nvPr/>
-        </p:nvSpPr>
-        <p:spPr>
-          <a:xfrm xmlns:a="http://schemas.openxmlformats.org/drawingml/2006/main">
-            <a:off x="7239000" y="4286250"/>
-            <a:ext cx="3048000" cy="266700"/>
-          </a:xfrm>
-          <a:prstGeom xmlns:a="http://schemas.openxmlformats.org/drawingml/2006/main" prst="rect">
-            <a:avLst/>
-          </a:prstGeom>
-          <a:noFill xmlns:a="http://schemas.openxmlformats.org/drawingml/2006/main"/>
-          <a:ln xmlns:a="http://schemas.openxmlformats.org/drawingml/2006/main" w="0">
-            <a:noFill/>
-            <a:prstDash val="solid"/>
-          </a:ln>
-        </p:spPr>
-        <p:txBody>
-          <a:bodyPr xmlns:a="http://schemas.openxmlformats.org/drawingml/2006/main"/>
-          <a:lstStyle xmlns:a="http://schemas.openxmlformats.org/drawingml/2006/main"/>
-          <a:p xmlns:a="http://schemas.openxmlformats.org/drawingml/2006/main">
-            <a:pPr algn="l">
+              <a:t>-150.10</a:t>
+            </a:r>
+          </a:p>
+        </p:txBody>
+      </p:sp>
+      <p:sp>
+        <p:nvSpPr>
+          <p:cNvPr id="15" name="">
+            <a:extLst xmlns:a="http://schemas.openxmlformats.org/drawingml/2006/main">
+              <a:ext uri="{FF2B5EF4-FFF2-40B4-BE49-F238E27FC236}">
+                <a16:creationId xmlns:a16="http://schemas.microsoft.com/office/drawing/2014/main" id="{F9CBC13F-07B8-4CE2-85E1-720F2BB22A8C}"/>
+              </a:ext>
+            </a:extLst>
+          </p:cNvPr>
+          <p:cNvSpPr>
+            <a:spLocks xmlns:a="http://schemas.openxmlformats.org/drawingml/2006/main" noGrp="1"/>
+          </p:cNvSpPr>
+          <p:nvPr/>
+        </p:nvSpPr>
+        <p:spPr>
+          <a:xfrm xmlns:a="http://schemas.openxmlformats.org/drawingml/2006/main">
+            <a:off x="8343900" y="4438650"/>
+            <a:ext cx="1885950" cy="209550"/>
+          </a:xfrm>
+          <a:prstGeom xmlns:a="http://schemas.openxmlformats.org/drawingml/2006/main" prst="rect">
+            <a:avLst/>
+          </a:prstGeom>
+          <a:noFill xmlns:a="http://schemas.openxmlformats.org/drawingml/2006/main"/>
+          <a:ln xmlns:a="http://schemas.openxmlformats.org/drawingml/2006/main" w="0">
+            <a:noFill/>
+            <a:prstDash val="solid"/>
+          </a:ln>
+        </p:spPr>
+        <p:txBody>
+          <a:bodyPr xmlns:a="http://schemas.openxmlformats.org/drawingml/2006/main"/>
+          <a:lstStyle xmlns:a="http://schemas.openxmlformats.org/drawingml/2006/main"/>
+          <a:p xmlns:a="http://schemas.openxmlformats.org/drawingml/2006/main">
+            <a:pPr algn="ctr">
               <a:lnSpc>
                 <a:spcPct val="110000"/>
               </a:lnSpc>
               <a:buNone/>
-              <a:defRPr sz="1350" b="1">
-                <a:solidFill>
-                  <a:srgbClr val="101820"/>
-                </a:solidFill>
-                <a:latin typeface="Arial"/>
-                <a:ea typeface="Arial"/>
-                <a:cs typeface="Arial"/>
-              </a:defRPr>
-            </a:pPr>
-            <a:r>
-              <a:rPr sz="1350" b="1">
-                <a:solidFill>
-                  <a:srgbClr val="101820"/>
-                </a:solidFill>
-                <a:latin typeface="Arial"/>
-                <a:ea typeface="Arial"/>
-                <a:cs typeface="Arial"/>
-              </a:rPr>
-              <a:t>Seed 2042 screenshot run</a:t>
-            </a:r>
-          </a:p>
-        </p:txBody>
-      </p:sp>
-      <p:sp>
-        <p:nvSpPr>
-          <p:cNvPr id="14" name="">
-            <a:extLst xmlns:a="http://schemas.openxmlformats.org/drawingml/2006/main">
-              <a:ext uri="{FF2B5EF4-FFF2-40B4-BE49-F238E27FC236}">
-                <a16:creationId xmlns:a16="http://schemas.microsoft.com/office/drawing/2014/main" id="{B6C6771E-47B1-4E87-A0DE-593FEC4930B6}"/>
-              </a:ext>
-            </a:extLst>
-          </p:cNvPr>
-          <p:cNvSpPr>
-            <a:spLocks xmlns:a="http://schemas.openxmlformats.org/drawingml/2006/main" noGrp="1"/>
-          </p:cNvSpPr>
-          <p:nvPr/>
-        </p:nvSpPr>
-        <p:spPr>
-          <a:xfrm xmlns:a="http://schemas.openxmlformats.org/drawingml/2006/main">
-            <a:off x="7277100" y="4838700"/>
-            <a:ext cx="85725" cy="85725"/>
+              <a:defRPr sz="900" b="1">
+                <a:solidFill>
+                  <a:srgbClr val="5F6B7A"/>
+                </a:solidFill>
+                <a:latin typeface="Arial"/>
+                <a:ea typeface="Arial"/>
+                <a:cs typeface="Arial"/>
+              </a:defRPr>
+            </a:pPr>
+            <a:r>
+              <a:rPr sz="900" b="1">
+                <a:solidFill>
+                  <a:srgbClr val="5F6B7A"/>
+                </a:solidFill>
+                <a:latin typeface="Arial"/>
+                <a:ea typeface="Arial"/>
+                <a:cs typeface="Arial"/>
+              </a:rPr>
+              <a:t>avg reward</a:t>
+            </a:r>
+          </a:p>
+        </p:txBody>
+      </p:sp>
+      <p:sp>
+        <p:nvSpPr>
+          <p:cNvPr id="16" name="">
+            <a:extLst xmlns:a="http://schemas.openxmlformats.org/drawingml/2006/main">
+              <a:ext uri="{FF2B5EF4-FFF2-40B4-BE49-F238E27FC236}">
+                <a16:creationId xmlns:a16="http://schemas.microsoft.com/office/drawing/2014/main" id="{B0A69A06-7C2F-492C-843F-A84EA3E4BFCE}"/>
+              </a:ext>
+            </a:extLst>
+          </p:cNvPr>
+          <p:cNvSpPr>
+            <a:spLocks xmlns:a="http://schemas.openxmlformats.org/drawingml/2006/main" noGrp="1"/>
+          </p:cNvSpPr>
+          <p:nvPr/>
+        </p:nvSpPr>
+        <p:spPr>
+          <a:xfrm xmlns:a="http://schemas.openxmlformats.org/drawingml/2006/main">
+            <a:off x="8191500" y="5010150"/>
+            <a:ext cx="2190750" cy="819150"/>
           </a:xfrm>
           <a:prstGeom xmlns:a="http://schemas.openxmlformats.org/drawingml/2006/main" prst="rect">
             <a:avLst/>
           </a:prstGeom>
           <a:solidFill xmlns:a="http://schemas.openxmlformats.org/drawingml/2006/main">
-            <a:srgbClr val="005AA9"/>
+            <a:srgbClr val="F4F7FA"/>
           </a:solidFill>
-          <a:ln xmlns:a="http://schemas.openxmlformats.org/drawingml/2006/main" w="0">
-            <a:noFill/>
-            <a:prstDash val="solid"/>
-          </a:ln>
-        </p:spPr>
-      </p:sp>
-      <p:sp>
-        <p:nvSpPr>
-          <p:cNvPr id="15" name="">
-            <a:extLst xmlns:a="http://schemas.openxmlformats.org/drawingml/2006/main">
-              <a:ext uri="{FF2B5EF4-FFF2-40B4-BE49-F238E27FC236}">
-                <a16:creationId xmlns:a16="http://schemas.microsoft.com/office/drawing/2014/main" id="{626FBE8A-43F8-48A5-8545-62E1F418DCE1}"/>
-              </a:ext>
-            </a:extLst>
-          </p:cNvPr>
-          <p:cNvSpPr>
-            <a:spLocks xmlns:a="http://schemas.openxmlformats.org/drawingml/2006/main" noGrp="1"/>
-          </p:cNvSpPr>
-          <p:nvPr/>
-        </p:nvSpPr>
-        <p:spPr>
-          <a:xfrm xmlns:a="http://schemas.openxmlformats.org/drawingml/2006/main">
-            <a:off x="7505700" y="4762500"/>
-            <a:ext cx="2819400" cy="342900"/>
-          </a:xfrm>
-          <a:prstGeom xmlns:a="http://schemas.openxmlformats.org/drawingml/2006/main" prst="rect">
-            <a:avLst/>
-          </a:prstGeom>
-          <a:noFill xmlns:a="http://schemas.openxmlformats.org/drawingml/2006/main"/>
-          <a:ln xmlns:a="http://schemas.openxmlformats.org/drawingml/2006/main" w="0">
-            <a:noFill/>
-            <a:prstDash val="solid"/>
-          </a:ln>
-        </p:spPr>
-        <p:txBody>
-          <a:bodyPr xmlns:a="http://schemas.openxmlformats.org/drawingml/2006/main"/>
-          <a:lstStyle xmlns:a="http://schemas.openxmlformats.org/drawingml/2006/main"/>
-          <a:p xmlns:a="http://schemas.openxmlformats.org/drawingml/2006/main">
-            <a:pPr algn="l">
-              <a:lnSpc>
-                <a:spcPct val="108000"/>
-              </a:lnSpc>
-              <a:buNone/>
-              <a:defRPr sz="1125" b="0">
-                <a:solidFill>
-                  <a:srgbClr val="101820"/>
-                </a:solidFill>
-                <a:latin typeface="Arial"/>
-                <a:ea typeface="Arial"/>
-                <a:cs typeface="Arial"/>
-              </a:defRPr>
-            </a:pPr>
-            <a:r>
-              <a:rPr sz="1125" b="0">
-                <a:solidFill>
-                  <a:srgbClr val="101820"/>
-                </a:solidFill>
-                <a:latin typeface="Arial"/>
-                <a:ea typeface="Arial"/>
-                <a:cs typeface="Arial"/>
-              </a:rPr>
-              <a:t>Steps to goal: 156</a:t>
-            </a:r>
-          </a:p>
-        </p:txBody>
-      </p:sp>
-      <p:sp>
-        <p:nvSpPr>
-          <p:cNvPr id="16" name="">
-            <a:extLst xmlns:a="http://schemas.openxmlformats.org/drawingml/2006/main">
-              <a:ext uri="{FF2B5EF4-FFF2-40B4-BE49-F238E27FC236}">
-                <a16:creationId xmlns:a16="http://schemas.microsoft.com/office/drawing/2014/main" id="{61013FD8-11F5-44B0-B7D2-32C71A5BE740}"/>
-              </a:ext>
-            </a:extLst>
-          </p:cNvPr>
-          <p:cNvSpPr>
-            <a:spLocks xmlns:a="http://schemas.openxmlformats.org/drawingml/2006/main" noGrp="1"/>
-          </p:cNvSpPr>
-          <p:nvPr/>
-        </p:nvSpPr>
-        <p:spPr>
-          <a:xfrm xmlns:a="http://schemas.openxmlformats.org/drawingml/2006/main">
-            <a:off x="7277100" y="5105400"/>
-            <a:ext cx="85725" cy="85725"/>
-          </a:xfrm>
-          <a:prstGeom xmlns:a="http://schemas.openxmlformats.org/drawingml/2006/main" prst="rect">
-            <a:avLst/>
-          </a:prstGeom>
-          <a:solidFill xmlns:a="http://schemas.openxmlformats.org/drawingml/2006/main">
-            <a:srgbClr val="005AA9"/>
-          </a:solidFill>
-          <a:ln xmlns:a="http://schemas.openxmlformats.org/drawingml/2006/main" w="0">
-            <a:noFill/>
+          <a:ln xmlns:a="http://schemas.openxmlformats.org/drawingml/2006/main" w="9525">
+            <a:solidFill>
+              <a:srgbClr val="D7DEE8"/>
+            </a:solidFill>
             <a:prstDash val="solid"/>
           </a:ln>
         </p:spPr>
@@ -4028,57 +3908,57 @@
           <p:cNvPr id="17" name="">
             <a:extLst xmlns:a="http://schemas.openxmlformats.org/drawingml/2006/main">
               <a:ext uri="{FF2B5EF4-FFF2-40B4-BE49-F238E27FC236}">
-                <a16:creationId xmlns:a16="http://schemas.microsoft.com/office/drawing/2014/main" id="{D7C9AE09-89B4-4004-AB65-94F13E5AB5F6}"/>
-              </a:ext>
-            </a:extLst>
-          </p:cNvPr>
-          <p:cNvSpPr>
-            <a:spLocks xmlns:a="http://schemas.openxmlformats.org/drawingml/2006/main" noGrp="1"/>
-          </p:cNvSpPr>
-          <p:nvPr/>
-        </p:nvSpPr>
-        <p:spPr>
-          <a:xfrm xmlns:a="http://schemas.openxmlformats.org/drawingml/2006/main">
-            <a:off x="7505700" y="5029200"/>
-            <a:ext cx="2819400" cy="342900"/>
-          </a:xfrm>
-          <a:prstGeom xmlns:a="http://schemas.openxmlformats.org/drawingml/2006/main" prst="rect">
-            <a:avLst/>
-          </a:prstGeom>
-          <a:noFill xmlns:a="http://schemas.openxmlformats.org/drawingml/2006/main"/>
-          <a:ln xmlns:a="http://schemas.openxmlformats.org/drawingml/2006/main" w="0">
-            <a:noFill/>
-            <a:prstDash val="solid"/>
-          </a:ln>
-        </p:spPr>
-        <p:txBody>
-          <a:bodyPr xmlns:a="http://schemas.openxmlformats.org/drawingml/2006/main"/>
-          <a:lstStyle xmlns:a="http://schemas.openxmlformats.org/drawingml/2006/main"/>
-          <a:p xmlns:a="http://schemas.openxmlformats.org/drawingml/2006/main">
-            <a:pPr algn="l">
-              <a:lnSpc>
-                <a:spcPct val="108000"/>
-              </a:lnSpc>
-              <a:buNone/>
-              <a:defRPr sz="1125" b="0">
-                <a:solidFill>
-                  <a:srgbClr val="101820"/>
-                </a:solidFill>
-                <a:latin typeface="Arial"/>
-                <a:ea typeface="Arial"/>
-                <a:cs typeface="Arial"/>
-              </a:defRPr>
-            </a:pPr>
-            <a:r>
-              <a:rPr sz="1125" b="0">
-                <a:solidFill>
-                  <a:srgbClr val="101820"/>
-                </a:solidFill>
-                <a:latin typeface="Arial"/>
-                <a:ea typeface="Arial"/>
-                <a:cs typeface="Arial"/>
-              </a:rPr>
-              <a:t>Total reward: -156</a:t>
+                <a16:creationId xmlns:a16="http://schemas.microsoft.com/office/drawing/2014/main" id="{BE158432-6568-44D3-A109-56A2293EFA1A}"/>
+              </a:ext>
+            </a:extLst>
+          </p:cNvPr>
+          <p:cNvSpPr>
+            <a:spLocks xmlns:a="http://schemas.openxmlformats.org/drawingml/2006/main" noGrp="1"/>
+          </p:cNvSpPr>
+          <p:nvPr/>
+        </p:nvSpPr>
+        <p:spPr>
+          <a:xfrm xmlns:a="http://schemas.openxmlformats.org/drawingml/2006/main">
+            <a:off x="8362950" y="5143500"/>
+            <a:ext cx="1847850" cy="304800"/>
+          </a:xfrm>
+          <a:prstGeom xmlns:a="http://schemas.openxmlformats.org/drawingml/2006/main" prst="rect">
+            <a:avLst/>
+          </a:prstGeom>
+          <a:noFill xmlns:a="http://schemas.openxmlformats.org/drawingml/2006/main"/>
+          <a:ln xmlns:a="http://schemas.openxmlformats.org/drawingml/2006/main" w="0">
+            <a:noFill/>
+            <a:prstDash val="solid"/>
+          </a:ln>
+        </p:spPr>
+        <p:txBody>
+          <a:bodyPr xmlns:a="http://schemas.openxmlformats.org/drawingml/2006/main"/>
+          <a:lstStyle xmlns:a="http://schemas.openxmlformats.org/drawingml/2006/main"/>
+          <a:p xmlns:a="http://schemas.openxmlformats.org/drawingml/2006/main">
+            <a:pPr algn="ctr">
+              <a:lnSpc>
+                <a:spcPct val="110000"/>
+              </a:lnSpc>
+              <a:buNone/>
+              <a:defRPr sz="1875" b="1">
+                <a:solidFill>
+                  <a:srgbClr val="073763"/>
+                </a:solidFill>
+                <a:latin typeface="Arial"/>
+                <a:ea typeface="Arial"/>
+                <a:cs typeface="Arial"/>
+              </a:defRPr>
+            </a:pPr>
+            <a:r>
+              <a:rPr sz="1875" b="1">
+                <a:solidFill>
+                  <a:srgbClr val="073763"/>
+                </a:solidFill>
+                <a:latin typeface="Arial"/>
+                <a:ea typeface="Arial"/>
+                <a:cs typeface="Arial"/>
+              </a:rPr>
+              <a:t>549.90</a:t>
             </a:r>
           </a:p>
         </p:txBody>
@@ -4088,270 +3968,117 @@
           <p:cNvPr id="18" name="">
             <a:extLst xmlns:a="http://schemas.openxmlformats.org/drawingml/2006/main">
               <a:ext uri="{FF2B5EF4-FFF2-40B4-BE49-F238E27FC236}">
-                <a16:creationId xmlns:a16="http://schemas.microsoft.com/office/drawing/2014/main" id="{9197AD53-8797-4455-9366-47C49A5D38B6}"/>
-              </a:ext>
-            </a:extLst>
-          </p:cNvPr>
-          <p:cNvSpPr>
-            <a:spLocks xmlns:a="http://schemas.openxmlformats.org/drawingml/2006/main" noGrp="1"/>
-          </p:cNvSpPr>
-          <p:nvPr/>
-        </p:nvSpPr>
-        <p:spPr>
-          <a:xfrm xmlns:a="http://schemas.openxmlformats.org/drawingml/2006/main">
-            <a:off x="7277100" y="5372100"/>
-            <a:ext cx="85725" cy="85725"/>
-          </a:xfrm>
-          <a:prstGeom xmlns:a="http://schemas.openxmlformats.org/drawingml/2006/main" prst="rect">
-            <a:avLst/>
-          </a:prstGeom>
-          <a:solidFill xmlns:a="http://schemas.openxmlformats.org/drawingml/2006/main">
-            <a:srgbClr val="005AA9"/>
-          </a:solidFill>
-          <a:ln xmlns:a="http://schemas.openxmlformats.org/drawingml/2006/main" w="0">
-            <a:noFill/>
-            <a:prstDash val="solid"/>
-          </a:ln>
-        </p:spPr>
+                <a16:creationId xmlns:a16="http://schemas.microsoft.com/office/drawing/2014/main" id="{F9C2B68F-5857-428B-A18F-D848CADC59B7}"/>
+              </a:ext>
+            </a:extLst>
+          </p:cNvPr>
+          <p:cNvSpPr>
+            <a:spLocks xmlns:a="http://schemas.openxmlformats.org/drawingml/2006/main" noGrp="1"/>
+          </p:cNvSpPr>
+          <p:nvPr/>
+        </p:nvSpPr>
+        <p:spPr>
+          <a:xfrm xmlns:a="http://schemas.openxmlformats.org/drawingml/2006/main">
+            <a:off x="8343900" y="5486400"/>
+            <a:ext cx="1885950" cy="209550"/>
+          </a:xfrm>
+          <a:prstGeom xmlns:a="http://schemas.openxmlformats.org/drawingml/2006/main" prst="rect">
+            <a:avLst/>
+          </a:prstGeom>
+          <a:noFill xmlns:a="http://schemas.openxmlformats.org/drawingml/2006/main"/>
+          <a:ln xmlns:a="http://schemas.openxmlformats.org/drawingml/2006/main" w="0">
+            <a:noFill/>
+            <a:prstDash val="solid"/>
+          </a:ln>
+        </p:spPr>
+        <p:txBody>
+          <a:bodyPr xmlns:a="http://schemas.openxmlformats.org/drawingml/2006/main"/>
+          <a:lstStyle xmlns:a="http://schemas.openxmlformats.org/drawingml/2006/main"/>
+          <a:p xmlns:a="http://schemas.openxmlformats.org/drawingml/2006/main">
+            <a:pPr algn="ctr">
+              <a:lnSpc>
+                <a:spcPct val="110000"/>
+              </a:lnSpc>
+              <a:buNone/>
+              <a:defRPr sz="900" b="1">
+                <a:solidFill>
+                  <a:srgbClr val="5F6B7A"/>
+                </a:solidFill>
+                <a:latin typeface="Arial"/>
+                <a:ea typeface="Arial"/>
+                <a:cs typeface="Arial"/>
+              </a:defRPr>
+            </a:pPr>
+            <a:r>
+              <a:rPr sz="900" b="1">
+                <a:solidFill>
+                  <a:srgbClr val="5F6B7A"/>
+                </a:solidFill>
+                <a:latin typeface="Arial"/>
+                <a:ea typeface="Arial"/>
+                <a:cs typeface="Arial"/>
+              </a:rPr>
+              <a:t>avg fitness</a:t>
+            </a:r>
+          </a:p>
+        </p:txBody>
       </p:sp>
       <p:sp>
         <p:nvSpPr>
           <p:cNvPr id="19" name="">
             <a:extLst xmlns:a="http://schemas.openxmlformats.org/drawingml/2006/main">
               <a:ext uri="{FF2B5EF4-FFF2-40B4-BE49-F238E27FC236}">
-                <a16:creationId xmlns:a16="http://schemas.microsoft.com/office/drawing/2014/main" id="{5359C0A0-F5CB-4C79-B9D7-42ABEDC5F4A1}"/>
-              </a:ext>
-            </a:extLst>
-          </p:cNvPr>
-          <p:cNvSpPr>
-            <a:spLocks xmlns:a="http://schemas.openxmlformats.org/drawingml/2006/main" noGrp="1"/>
-          </p:cNvSpPr>
-          <p:nvPr/>
-        </p:nvSpPr>
-        <p:spPr>
-          <a:xfrm xmlns:a="http://schemas.openxmlformats.org/drawingml/2006/main">
-            <a:off x="7505700" y="5295900"/>
-            <a:ext cx="2819400" cy="342900"/>
-          </a:xfrm>
-          <a:prstGeom xmlns:a="http://schemas.openxmlformats.org/drawingml/2006/main" prst="rect">
-            <a:avLst/>
-          </a:prstGeom>
-          <a:noFill xmlns:a="http://schemas.openxmlformats.org/drawingml/2006/main"/>
-          <a:ln xmlns:a="http://schemas.openxmlformats.org/drawingml/2006/main" w="0">
-            <a:noFill/>
-            <a:prstDash val="solid"/>
-          </a:ln>
-        </p:spPr>
-        <p:txBody>
-          <a:bodyPr xmlns:a="http://schemas.openxmlformats.org/drawingml/2006/main"/>
-          <a:lstStyle xmlns:a="http://schemas.openxmlformats.org/drawingml/2006/main"/>
-          <a:p xmlns:a="http://schemas.openxmlformats.org/drawingml/2006/main">
-            <a:pPr algn="l">
-              <a:lnSpc>
-                <a:spcPct val="108000"/>
-              </a:lnSpc>
-              <a:buNone/>
-              <a:defRPr sz="1125" b="0">
-                <a:solidFill>
-                  <a:srgbClr val="101820"/>
-                </a:solidFill>
-                <a:latin typeface="Arial"/>
-                <a:ea typeface="Arial"/>
-                <a:cs typeface="Arial"/>
-              </a:defRPr>
-            </a:pPr>
-            <a:r>
-              <a:rPr sz="1125" b="0">
-                <a:solidFill>
-                  <a:srgbClr val="101820"/>
-                </a:solidFill>
-                <a:latin typeface="Arial"/>
-                <a:ea typeface="Arial"/>
-                <a:cs typeface="Arial"/>
-              </a:rPr>
-              <a:t>Progress bonus: 500</a:t>
-            </a:r>
-          </a:p>
-        </p:txBody>
-      </p:sp>
-      <p:sp>
-        <p:nvSpPr>
-          <p:cNvPr id="20" name="">
-            <a:extLst xmlns:a="http://schemas.openxmlformats.org/drawingml/2006/main">
-              <a:ext uri="{FF2B5EF4-FFF2-40B4-BE49-F238E27FC236}">
-                <a16:creationId xmlns:a16="http://schemas.microsoft.com/office/drawing/2014/main" id="{12B39503-3877-492E-90AB-7697C62DBDDE}"/>
-              </a:ext>
-            </a:extLst>
-          </p:cNvPr>
-          <p:cNvSpPr>
-            <a:spLocks xmlns:a="http://schemas.openxmlformats.org/drawingml/2006/main" noGrp="1"/>
-          </p:cNvSpPr>
-          <p:nvPr/>
-        </p:nvSpPr>
-        <p:spPr>
-          <a:xfrm xmlns:a="http://schemas.openxmlformats.org/drawingml/2006/main">
-            <a:off x="7277100" y="5638800"/>
-            <a:ext cx="85725" cy="85725"/>
-          </a:xfrm>
-          <a:prstGeom xmlns:a="http://schemas.openxmlformats.org/drawingml/2006/main" prst="rect">
-            <a:avLst/>
-          </a:prstGeom>
-          <a:solidFill xmlns:a="http://schemas.openxmlformats.org/drawingml/2006/main">
-            <a:srgbClr val="005AA9"/>
-          </a:solidFill>
-          <a:ln xmlns:a="http://schemas.openxmlformats.org/drawingml/2006/main" w="0">
-            <a:noFill/>
-            <a:prstDash val="solid"/>
-          </a:ln>
-        </p:spPr>
-      </p:sp>
-      <p:sp>
-        <p:nvSpPr>
-          <p:cNvPr id="21" name="">
-            <a:extLst xmlns:a="http://schemas.openxmlformats.org/drawingml/2006/main">
-              <a:ext uri="{FF2B5EF4-FFF2-40B4-BE49-F238E27FC236}">
-                <a16:creationId xmlns:a16="http://schemas.microsoft.com/office/drawing/2014/main" id="{928610D9-4EC5-47F5-8944-434E9BBD2202}"/>
-              </a:ext>
-            </a:extLst>
-          </p:cNvPr>
-          <p:cNvSpPr>
-            <a:spLocks xmlns:a="http://schemas.openxmlformats.org/drawingml/2006/main" noGrp="1"/>
-          </p:cNvSpPr>
-          <p:nvPr/>
-        </p:nvSpPr>
-        <p:spPr>
-          <a:xfrm xmlns:a="http://schemas.openxmlformats.org/drawingml/2006/main">
-            <a:off x="7505700" y="5562600"/>
-            <a:ext cx="2819400" cy="342900"/>
-          </a:xfrm>
-          <a:prstGeom xmlns:a="http://schemas.openxmlformats.org/drawingml/2006/main" prst="rect">
-            <a:avLst/>
-          </a:prstGeom>
-          <a:noFill xmlns:a="http://schemas.openxmlformats.org/drawingml/2006/main"/>
-          <a:ln xmlns:a="http://schemas.openxmlformats.org/drawingml/2006/main" w="0">
-            <a:noFill/>
-            <a:prstDash val="solid"/>
-          </a:ln>
-        </p:spPr>
-        <p:txBody>
-          <a:bodyPr xmlns:a="http://schemas.openxmlformats.org/drawingml/2006/main"/>
-          <a:lstStyle xmlns:a="http://schemas.openxmlformats.org/drawingml/2006/main"/>
-          <a:p xmlns:a="http://schemas.openxmlformats.org/drawingml/2006/main">
-            <a:pPr algn="l">
-              <a:lnSpc>
-                <a:spcPct val="108000"/>
-              </a:lnSpc>
-              <a:buNone/>
-              <a:defRPr sz="1125" b="0">
-                <a:solidFill>
-                  <a:srgbClr val="101820"/>
-                </a:solidFill>
-                <a:latin typeface="Arial"/>
-                <a:ea typeface="Arial"/>
-                <a:cs typeface="Arial"/>
-              </a:defRPr>
-            </a:pPr>
-            <a:r>
-              <a:rPr sz="1125" b="0">
-                <a:solidFill>
-                  <a:srgbClr val="101820"/>
-                </a:solidFill>
-                <a:latin typeface="Arial"/>
-                <a:ea typeface="Arial"/>
-                <a:cs typeface="Arial"/>
-              </a:rPr>
-              <a:t>Goal bonus: 200</a:t>
-            </a:r>
-          </a:p>
-        </p:txBody>
-      </p:sp>
-      <p:sp>
-        <p:nvSpPr>
-          <p:cNvPr id="22" name="">
-            <a:extLst xmlns:a="http://schemas.openxmlformats.org/drawingml/2006/main">
-              <a:ext uri="{FF2B5EF4-FFF2-40B4-BE49-F238E27FC236}">
-                <a16:creationId xmlns:a16="http://schemas.microsoft.com/office/drawing/2014/main" id="{BEB0C0A8-BA29-4BA7-BDC4-ADAA707FEF1D}"/>
-              </a:ext>
-            </a:extLst>
-          </p:cNvPr>
-          <p:cNvSpPr>
-            <a:spLocks xmlns:a="http://schemas.openxmlformats.org/drawingml/2006/main" noGrp="1"/>
-          </p:cNvSpPr>
-          <p:nvPr/>
-        </p:nvSpPr>
-        <p:spPr>
-          <a:xfrm xmlns:a="http://schemas.openxmlformats.org/drawingml/2006/main">
-            <a:off x="7277100" y="5905500"/>
-            <a:ext cx="85725" cy="85725"/>
-          </a:xfrm>
-          <a:prstGeom xmlns:a="http://schemas.openxmlformats.org/drawingml/2006/main" prst="rect">
-            <a:avLst/>
-          </a:prstGeom>
-          <a:solidFill xmlns:a="http://schemas.openxmlformats.org/drawingml/2006/main">
-            <a:srgbClr val="005AA9"/>
-          </a:solidFill>
-          <a:ln xmlns:a="http://schemas.openxmlformats.org/drawingml/2006/main" w="0">
-            <a:noFill/>
-            <a:prstDash val="solid"/>
-          </a:ln>
-        </p:spPr>
-      </p:sp>
-      <p:sp>
-        <p:nvSpPr>
-          <p:cNvPr id="23" name="">
-            <a:extLst xmlns:a="http://schemas.openxmlformats.org/drawingml/2006/main">
-              <a:ext uri="{FF2B5EF4-FFF2-40B4-BE49-F238E27FC236}">
-                <a16:creationId xmlns:a16="http://schemas.microsoft.com/office/drawing/2014/main" id="{9061E55D-00EC-4103-9FE7-A7A777E5FC49}"/>
-              </a:ext>
-            </a:extLst>
-          </p:cNvPr>
-          <p:cNvSpPr>
-            <a:spLocks xmlns:a="http://schemas.openxmlformats.org/drawingml/2006/main" noGrp="1"/>
-          </p:cNvSpPr>
-          <p:nvPr/>
-        </p:nvSpPr>
-        <p:spPr>
-          <a:xfrm xmlns:a="http://schemas.openxmlformats.org/drawingml/2006/main">
-            <a:off x="7505700" y="5829300"/>
-            <a:ext cx="2819400" cy="342900"/>
-          </a:xfrm>
-          <a:prstGeom xmlns:a="http://schemas.openxmlformats.org/drawingml/2006/main" prst="rect">
-            <a:avLst/>
-          </a:prstGeom>
-          <a:noFill xmlns:a="http://schemas.openxmlformats.org/drawingml/2006/main"/>
-          <a:ln xmlns:a="http://schemas.openxmlformats.org/drawingml/2006/main" w="0">
-            <a:noFill/>
-            <a:prstDash val="solid"/>
-          </a:ln>
-        </p:spPr>
-        <p:txBody>
-          <a:bodyPr xmlns:a="http://schemas.openxmlformats.org/drawingml/2006/main"/>
-          <a:lstStyle xmlns:a="http://schemas.openxmlformats.org/drawingml/2006/main"/>
-          <a:p xmlns:a="http://schemas.openxmlformats.org/drawingml/2006/main">
-            <a:pPr algn="l">
-              <a:lnSpc>
-                <a:spcPct val="108000"/>
-              </a:lnSpc>
-              <a:buNone/>
-              <a:defRPr sz="1125" b="0">
-                <a:solidFill>
-                  <a:srgbClr val="101820"/>
-                </a:solidFill>
-                <a:latin typeface="Arial"/>
-                <a:ea typeface="Arial"/>
-                <a:cs typeface="Arial"/>
-              </a:defRPr>
-            </a:pPr>
-            <a:r>
-              <a:rPr sz="1125" b="0">
-                <a:solidFill>
-                  <a:srgbClr val="101820"/>
-                </a:solidFill>
-                <a:latin typeface="Arial"/>
-                <a:ea typeface="Arial"/>
-                <a:cs typeface="Arial"/>
-              </a:rPr>
-              <a:t>Fitness: 544</a:t>
+                <a16:creationId xmlns:a16="http://schemas.microsoft.com/office/drawing/2014/main" id="{AD52E23E-E7A3-4F30-9020-315365ED78AC}"/>
+              </a:ext>
+            </a:extLst>
+          </p:cNvPr>
+          <p:cNvSpPr>
+            <a:spLocks xmlns:a="http://schemas.openxmlformats.org/drawingml/2006/main" noGrp="1"/>
+          </p:cNvSpPr>
+          <p:nvPr/>
+        </p:nvSpPr>
+        <p:spPr>
+          <a:xfrm xmlns:a="http://schemas.openxmlformats.org/drawingml/2006/main">
+            <a:off x="7905750" y="5905500"/>
+            <a:ext cx="2762250" cy="323850"/>
+          </a:xfrm>
+          <a:prstGeom xmlns:a="http://schemas.openxmlformats.org/drawingml/2006/main" prst="rect">
+            <a:avLst/>
+          </a:prstGeom>
+          <a:noFill xmlns:a="http://schemas.openxmlformats.org/drawingml/2006/main"/>
+          <a:ln xmlns:a="http://schemas.openxmlformats.org/drawingml/2006/main" w="0">
+            <a:noFill/>
+            <a:prstDash val="solid"/>
+          </a:ln>
+        </p:spPr>
+        <p:txBody>
+          <a:bodyPr xmlns:a="http://schemas.openxmlformats.org/drawingml/2006/main"/>
+          <a:lstStyle xmlns:a="http://schemas.openxmlformats.org/drawingml/2006/main"/>
+          <a:p xmlns:a="http://schemas.openxmlformats.org/drawingml/2006/main">
+            <a:pPr algn="ctr">
+              <a:lnSpc>
+                <a:spcPct val="110000"/>
+              </a:lnSpc>
+              <a:buNone/>
+              <a:defRPr sz="975" b="1">
+                <a:solidFill>
+                  <a:srgbClr val="5F6B7A"/>
+                </a:solidFill>
+                <a:latin typeface="Arial"/>
+                <a:ea typeface="Arial"/>
+                <a:cs typeface="Arial"/>
+              </a:defRPr>
+            </a:pPr>
+            <a:r>
+              <a:rPr sz="975" b="1">
+                <a:solidFill>
+                  <a:srgbClr val="5F6B7A"/>
+                </a:solidFill>
+                <a:latin typeface="Arial"/>
+                <a:ea typeface="Arial"/>
+                <a:cs typeface="Arial"/>
+              </a:rPr>
+              <a:t>Step count changes by seed, but the policy reaches the goal every time.</a:t>
             </a:r>
           </a:p>
         </p:txBody>
@@ -4359,7 +4086,7 @@
     </p:spTree>
     <p:extLst>
       <p:ext uri="{BB962C8B-B14F-4D97-AF65-F5344CB8AC3E}">
-        <p14:creationId xmlns:p14="http://schemas.microsoft.com/office/powerpoint/2010/main" val="269497105"/>
+        <p14:creationId xmlns:p14="http://schemas.microsoft.com/office/powerpoint/2010/main" val="1064487532"/>
       </p:ext>
     </p:extLst>
   </p:cSld>
@@ -4390,7 +4117,7 @@
           <p:cNvPr id="1" name="">
             <a:extLst xmlns:a="http://schemas.openxmlformats.org/drawingml/2006/main">
               <a:ext uri="{FF2B5EF4-FFF2-40B4-BE49-F238E27FC236}">
-                <a16:creationId xmlns:a16="http://schemas.microsoft.com/office/drawing/2014/main" id="{E7614601-428E-4C3F-A8F5-BE922E98B938}"/>
+                <a16:creationId xmlns:a16="http://schemas.microsoft.com/office/drawing/2014/main" id="{264B7515-9D62-4FE8-BD53-92DB1D13F56E}"/>
               </a:ext>
             </a:extLst>
           </p:cNvPr>
@@ -4421,7 +4148,7 @@
           <p:cNvPr id="2" name="">
             <a:extLst xmlns:a="http://schemas.openxmlformats.org/drawingml/2006/main">
               <a:ext uri="{FF2B5EF4-FFF2-40B4-BE49-F238E27FC236}">
-                <a16:creationId xmlns:a16="http://schemas.microsoft.com/office/drawing/2014/main" id="{AC21CB19-835F-4ECD-BC90-A7246D110F34}"/>
+                <a16:creationId xmlns:a16="http://schemas.microsoft.com/office/drawing/2014/main" id="{EFF87F09-9705-4AC1-9920-ACF33E6E3226}"/>
               </a:ext>
             </a:extLst>
           </p:cNvPr>
@@ -4481,7 +4208,7 @@
           <p:cNvPr id="3" name="">
             <a:extLst xmlns:a="http://schemas.openxmlformats.org/drawingml/2006/main">
               <a:ext uri="{FF2B5EF4-FFF2-40B4-BE49-F238E27FC236}">
-                <a16:creationId xmlns:a16="http://schemas.microsoft.com/office/drawing/2014/main" id="{0A7948E6-B87B-4056-B90C-93F2DE946C4D}"/>
+                <a16:creationId xmlns:a16="http://schemas.microsoft.com/office/drawing/2014/main" id="{9DDC01CA-083D-4D2D-89AC-1A55B2F41E0F}"/>
               </a:ext>
             </a:extLst>
           </p:cNvPr>
@@ -4532,6 +4259,1120 @@
                 <a:cs typeface="Arial"/>
               </a:rPr>
               <a:t>12</a:t>
+            </a:r>
+          </a:p>
+        </p:txBody>
+      </p:sp>
+      <p:sp>
+        <p:nvSpPr>
+          <p:cNvPr id="4" name="">
+            <a:extLst xmlns:a="http://schemas.openxmlformats.org/drawingml/2006/main">
+              <a:ext uri="{FF2B5EF4-FFF2-40B4-BE49-F238E27FC236}">
+                <a16:creationId xmlns:a16="http://schemas.microsoft.com/office/drawing/2014/main" id="{A69AF3DB-4B35-4204-9E43-3DAF8106C41A}"/>
+              </a:ext>
+            </a:extLst>
+          </p:cNvPr>
+          <p:cNvSpPr>
+            <a:spLocks xmlns:a="http://schemas.openxmlformats.org/drawingml/2006/main" noGrp="1"/>
+          </p:cNvSpPr>
+          <p:nvPr/>
+        </p:nvSpPr>
+        <p:spPr>
+          <a:xfrm xmlns:a="http://schemas.openxmlformats.org/drawingml/2006/main">
+            <a:off x="666750" y="781050"/>
+            <a:ext cx="3429000" cy="228600"/>
+          </a:xfrm>
+          <a:prstGeom xmlns:a="http://schemas.openxmlformats.org/drawingml/2006/main" prst="rect">
+            <a:avLst/>
+          </a:prstGeom>
+          <a:noFill xmlns:a="http://schemas.openxmlformats.org/drawingml/2006/main"/>
+          <a:ln xmlns:a="http://schemas.openxmlformats.org/drawingml/2006/main" w="0">
+            <a:noFill/>
+            <a:prstDash val="solid"/>
+          </a:ln>
+        </p:spPr>
+        <p:txBody>
+          <a:bodyPr xmlns:a="http://schemas.openxmlformats.org/drawingml/2006/main"/>
+          <a:lstStyle xmlns:a="http://schemas.openxmlformats.org/drawingml/2006/main"/>
+          <a:p xmlns:a="http://schemas.openxmlformats.org/drawingml/2006/main">
+            <a:pPr algn="l">
+              <a:lnSpc>
+                <a:spcPct val="110000"/>
+              </a:lnSpc>
+              <a:buNone/>
+              <a:defRPr sz="825" b="1">
+                <a:solidFill>
+                  <a:srgbClr val="5F6B7A"/>
+                </a:solidFill>
+                <a:latin typeface="Arial"/>
+                <a:ea typeface="Arial"/>
+                <a:cs typeface="Arial"/>
+              </a:defRPr>
+            </a:pPr>
+            <a:r>
+              <a:rPr sz="825" b="1">
+                <a:solidFill>
+                  <a:srgbClr val="5F6B7A"/>
+                </a:solidFill>
+                <a:latin typeface="Arial"/>
+                <a:ea typeface="Arial"/>
+                <a:cs typeface="Arial"/>
+              </a:rPr>
+              <a:t>DEMO</a:t>
+            </a:r>
+          </a:p>
+        </p:txBody>
+      </p:sp>
+      <p:sp>
+        <p:nvSpPr>
+          <p:cNvPr id="5" name="">
+            <a:extLst xmlns:a="http://schemas.openxmlformats.org/drawingml/2006/main">
+              <a:ext uri="{FF2B5EF4-FFF2-40B4-BE49-F238E27FC236}">
+                <a16:creationId xmlns:a16="http://schemas.microsoft.com/office/drawing/2014/main" id="{ADBADF68-7BF4-46C0-8133-E88D378E9013}"/>
+              </a:ext>
+            </a:extLst>
+          </p:cNvPr>
+          <p:cNvSpPr>
+            <a:spLocks xmlns:a="http://schemas.openxmlformats.org/drawingml/2006/main" noGrp="1"/>
+          </p:cNvSpPr>
+          <p:nvPr/>
+        </p:nvSpPr>
+        <p:spPr>
+          <a:xfrm xmlns:a="http://schemas.openxmlformats.org/drawingml/2006/main">
+            <a:off x="647700" y="1143000"/>
+            <a:ext cx="419100" cy="28575"/>
+          </a:xfrm>
+          <a:prstGeom xmlns:a="http://schemas.openxmlformats.org/drawingml/2006/main" prst="rect">
+            <a:avLst/>
+          </a:prstGeom>
+          <a:solidFill xmlns:a="http://schemas.openxmlformats.org/drawingml/2006/main">
+            <a:srgbClr val="F2B705"/>
+          </a:solidFill>
+          <a:ln xmlns:a="http://schemas.openxmlformats.org/drawingml/2006/main" w="0">
+            <a:noFill/>
+            <a:prstDash val="solid"/>
+          </a:ln>
+        </p:spPr>
+      </p:sp>
+      <p:sp>
+        <p:nvSpPr>
+          <p:cNvPr id="6" name="">
+            <a:extLst xmlns:a="http://schemas.openxmlformats.org/drawingml/2006/main">
+              <a:ext uri="{FF2B5EF4-FFF2-40B4-BE49-F238E27FC236}">
+                <a16:creationId xmlns:a16="http://schemas.microsoft.com/office/drawing/2014/main" id="{DD347277-5778-4E62-BC9C-3BB06A559DFC}"/>
+              </a:ext>
+            </a:extLst>
+          </p:cNvPr>
+          <p:cNvSpPr>
+            <a:spLocks xmlns:a="http://schemas.openxmlformats.org/drawingml/2006/main" noGrp="1"/>
+          </p:cNvSpPr>
+          <p:nvPr/>
+        </p:nvSpPr>
+        <p:spPr>
+          <a:xfrm xmlns:a="http://schemas.openxmlformats.org/drawingml/2006/main">
+            <a:off x="666750" y="1200150"/>
+            <a:ext cx="8572500" cy="876300"/>
+          </a:xfrm>
+          <a:prstGeom xmlns:a="http://schemas.openxmlformats.org/drawingml/2006/main" prst="rect">
+            <a:avLst/>
+          </a:prstGeom>
+          <a:noFill xmlns:a="http://schemas.openxmlformats.org/drawingml/2006/main"/>
+          <a:ln xmlns:a="http://schemas.openxmlformats.org/drawingml/2006/main" w="0">
+            <a:noFill/>
+            <a:prstDash val="solid"/>
+          </a:ln>
+        </p:spPr>
+        <p:txBody>
+          <a:bodyPr xmlns:a="http://schemas.openxmlformats.org/drawingml/2006/main"/>
+          <a:lstStyle xmlns:a="http://schemas.openxmlformats.org/drawingml/2006/main"/>
+          <a:p xmlns:a="http://schemas.openxmlformats.org/drawingml/2006/main">
+            <a:pPr algn="l">
+              <a:lnSpc>
+                <a:spcPct val="94000"/>
+              </a:lnSpc>
+              <a:buNone/>
+              <a:defRPr sz="2925" b="1">
+                <a:solidFill>
+                  <a:srgbClr val="101820"/>
+                </a:solidFill>
+                <a:latin typeface="Arial"/>
+                <a:ea typeface="Arial"/>
+                <a:cs typeface="Arial"/>
+              </a:defRPr>
+            </a:pPr>
+            <a:r>
+              <a:rPr sz="2925" b="1">
+                <a:solidFill>
+                  <a:srgbClr val="101820"/>
+                </a:solidFill>
+                <a:latin typeface="Arial"/>
+                <a:ea typeface="Arial"/>
+                <a:cs typeface="Arial"/>
+              </a:rPr>
+              <a:t>Graphical Demonstration</a:t>
+            </a:r>
+          </a:p>
+        </p:txBody>
+      </p:sp>
+      <p:sp>
+        <p:nvSpPr>
+          <p:cNvPr id="7" name="">
+            <a:extLst xmlns:a="http://schemas.openxmlformats.org/drawingml/2006/main">
+              <a:ext uri="{FF2B5EF4-FFF2-40B4-BE49-F238E27FC236}">
+                <a16:creationId xmlns:a16="http://schemas.microsoft.com/office/drawing/2014/main" id="{E6F78986-34B7-475C-B228-E494A6AEE62A}"/>
+              </a:ext>
+            </a:extLst>
+          </p:cNvPr>
+          <p:cNvSpPr>
+            <a:spLocks xmlns:a="http://schemas.openxmlformats.org/drawingml/2006/main" noGrp="1"/>
+          </p:cNvSpPr>
+          <p:nvPr/>
+        </p:nvSpPr>
+        <p:spPr>
+          <a:xfrm xmlns:a="http://schemas.openxmlformats.org/drawingml/2006/main">
+            <a:off x="666750" y="2076450"/>
+            <a:ext cx="8001000" cy="304800"/>
+          </a:xfrm>
+          <a:prstGeom xmlns:a="http://schemas.openxmlformats.org/drawingml/2006/main" prst="rect">
+            <a:avLst/>
+          </a:prstGeom>
+          <a:noFill xmlns:a="http://schemas.openxmlformats.org/drawingml/2006/main"/>
+          <a:ln xmlns:a="http://schemas.openxmlformats.org/drawingml/2006/main" w="0">
+            <a:noFill/>
+            <a:prstDash val="solid"/>
+          </a:ln>
+        </p:spPr>
+        <p:txBody>
+          <a:bodyPr xmlns:a="http://schemas.openxmlformats.org/drawingml/2006/main"/>
+          <a:lstStyle xmlns:a="http://schemas.openxmlformats.org/drawingml/2006/main"/>
+          <a:p xmlns:a="http://schemas.openxmlformats.org/drawingml/2006/main">
+            <a:pPr algn="l">
+              <a:lnSpc>
+                <a:spcPct val="110000"/>
+              </a:lnSpc>
+              <a:buNone/>
+              <a:defRPr sz="1575" b="1">
+                <a:solidFill>
+                  <a:srgbClr val="073763"/>
+                </a:solidFill>
+                <a:latin typeface="Arial"/>
+                <a:ea typeface="Arial"/>
+                <a:cs typeface="Arial"/>
+              </a:defRPr>
+            </a:pPr>
+            <a:r>
+              <a:rPr sz="1575" b="1">
+                <a:solidFill>
+                  <a:srgbClr val="073763"/>
+                </a:solidFill>
+                <a:latin typeface="Arial"/>
+                <a:ea typeface="Arial"/>
+                <a:cs typeface="Arial"/>
+              </a:rPr>
+              <a:t>The saved best policy can be shown without retraining.</a:t>
+            </a:r>
+          </a:p>
+        </p:txBody>
+      </p:sp>
+      <p:sp>
+        <p:nvSpPr>
+          <p:cNvPr id="8" name="">
+            <a:extLst xmlns:a="http://schemas.openxmlformats.org/drawingml/2006/main">
+              <a:ext uri="{FF2B5EF4-FFF2-40B4-BE49-F238E27FC236}">
+                <a16:creationId xmlns:a16="http://schemas.microsoft.com/office/drawing/2014/main" id="{C2C26075-8F8A-4E52-9DDA-E7FAAC606BCB}"/>
+              </a:ext>
+            </a:extLst>
+          </p:cNvPr>
+          <p:cNvSpPr>
+            <a:spLocks xmlns:a="http://schemas.openxmlformats.org/drawingml/2006/main" noGrp="1"/>
+          </p:cNvSpPr>
+          <p:nvPr/>
+        </p:nvSpPr>
+        <p:spPr>
+          <a:xfrm xmlns:a="http://schemas.openxmlformats.org/drawingml/2006/main">
+            <a:off x="742950" y="2705100"/>
+            <a:ext cx="5905500" cy="3429000"/>
+          </a:xfrm>
+          <a:prstGeom xmlns:a="http://schemas.openxmlformats.org/drawingml/2006/main" prst="rect">
+            <a:avLst/>
+          </a:prstGeom>
+          <a:solidFill xmlns:a="http://schemas.openxmlformats.org/drawingml/2006/main">
+            <a:srgbClr val="FFFFFF"/>
+          </a:solidFill>
+          <a:ln xmlns:a="http://schemas.openxmlformats.org/drawingml/2006/main" w="9525">
+            <a:solidFill>
+              <a:srgbClr val="D7DEE8"/>
+            </a:solidFill>
+            <a:prstDash val="solid"/>
+          </a:ln>
+        </p:spPr>
+      </p:sp>
+      <p:pic>
+        <p:nvPicPr>
+          <p:cNvPr id="33" name=""/>
+          <p:cNvPicPr>
+            <a:picLocks xmlns:a="http://schemas.openxmlformats.org/drawingml/2006/main" noChangeAspect="1"/>
+          </p:cNvPicPr>
+          <p:nvPr/>
+        </p:nvPicPr>
+        <p:blipFill>
+          <a:blip xmlns:r="http://schemas.openxmlformats.org/officeDocument/2006/relationships" xmlns:a="http://schemas.openxmlformats.org/drawingml/2006/main" r:embed="R48db3cc35ef94531"/>
+          <a:stretch xmlns:a="http://schemas.openxmlformats.org/drawingml/2006/main"/>
+        </p:blipFill>
+        <p:spPr>
+          <a:xfrm xmlns:a="http://schemas.openxmlformats.org/drawingml/2006/main">
+            <a:off x="1423988" y="2895600"/>
+            <a:ext cx="4543425" cy="3028950"/>
+          </a:xfrm>
+          <a:prstGeom xmlns:a="http://schemas.openxmlformats.org/drawingml/2006/main" prst="rect">
+            <a:avLst/>
+          </a:prstGeom>
+        </p:spPr>
+      </p:pic>
+      <p:sp>
+        <p:nvSpPr>
+          <p:cNvPr id="10" name="">
+            <a:extLst xmlns:a="http://schemas.openxmlformats.org/drawingml/2006/main">
+              <a:ext uri="{FF2B5EF4-FFF2-40B4-BE49-F238E27FC236}">
+                <a16:creationId xmlns:a16="http://schemas.microsoft.com/office/drawing/2014/main" id="{45AB8670-03BB-4BF1-841A-68B1BAD8DC95}"/>
+              </a:ext>
+            </a:extLst>
+          </p:cNvPr>
+          <p:cNvSpPr>
+            <a:spLocks xmlns:a="http://schemas.openxmlformats.org/drawingml/2006/main" noGrp="1"/>
+          </p:cNvSpPr>
+          <p:nvPr/>
+        </p:nvSpPr>
+        <p:spPr>
+          <a:xfrm xmlns:a="http://schemas.openxmlformats.org/drawingml/2006/main">
+            <a:off x="7239000" y="2838450"/>
+            <a:ext cx="3048000" cy="285750"/>
+          </a:xfrm>
+          <a:prstGeom xmlns:a="http://schemas.openxmlformats.org/drawingml/2006/main" prst="rect">
+            <a:avLst/>
+          </a:prstGeom>
+          <a:noFill xmlns:a="http://schemas.openxmlformats.org/drawingml/2006/main"/>
+          <a:ln xmlns:a="http://schemas.openxmlformats.org/drawingml/2006/main" w="0">
+            <a:noFill/>
+            <a:prstDash val="solid"/>
+          </a:ln>
+        </p:spPr>
+        <p:txBody>
+          <a:bodyPr xmlns:a="http://schemas.openxmlformats.org/drawingml/2006/main"/>
+          <a:lstStyle xmlns:a="http://schemas.openxmlformats.org/drawingml/2006/main"/>
+          <a:p xmlns:a="http://schemas.openxmlformats.org/drawingml/2006/main">
+            <a:pPr algn="l">
+              <a:lnSpc>
+                <a:spcPct val="110000"/>
+              </a:lnSpc>
+              <a:buNone/>
+              <a:defRPr sz="1575" b="1">
+                <a:solidFill>
+                  <a:srgbClr val="101820"/>
+                </a:solidFill>
+                <a:latin typeface="Arial"/>
+                <a:ea typeface="Arial"/>
+                <a:cs typeface="Arial"/>
+              </a:defRPr>
+            </a:pPr>
+            <a:r>
+              <a:rPr sz="1575" b="1">
+                <a:solidFill>
+                  <a:srgbClr val="101820"/>
+                </a:solidFill>
+                <a:latin typeface="Arial"/>
+                <a:ea typeface="Arial"/>
+                <a:cs typeface="Arial"/>
+              </a:rPr>
+              <a:t>Demo command</a:t>
+            </a:r>
+          </a:p>
+        </p:txBody>
+      </p:sp>
+      <p:sp>
+        <p:nvSpPr>
+          <p:cNvPr id="11" name="">
+            <a:extLst xmlns:a="http://schemas.openxmlformats.org/drawingml/2006/main">
+              <a:ext uri="{FF2B5EF4-FFF2-40B4-BE49-F238E27FC236}">
+                <a16:creationId xmlns:a16="http://schemas.microsoft.com/office/drawing/2014/main" id="{74B0F7B7-7B9D-481C-B844-3AC783306EF7}"/>
+              </a:ext>
+            </a:extLst>
+          </p:cNvPr>
+          <p:cNvSpPr>
+            <a:spLocks xmlns:a="http://schemas.openxmlformats.org/drawingml/2006/main" noGrp="1"/>
+          </p:cNvSpPr>
+          <p:nvPr/>
+        </p:nvSpPr>
+        <p:spPr>
+          <a:xfrm xmlns:a="http://schemas.openxmlformats.org/drawingml/2006/main">
+            <a:off x="7239000" y="3276600"/>
+            <a:ext cx="3429000" cy="514350"/>
+          </a:xfrm>
+          <a:prstGeom xmlns:a="http://schemas.openxmlformats.org/drawingml/2006/main" prst="rect">
+            <a:avLst/>
+          </a:prstGeom>
+          <a:solidFill xmlns:a="http://schemas.openxmlformats.org/drawingml/2006/main">
+            <a:srgbClr val="F4F7FA"/>
+          </a:solidFill>
+          <a:ln xmlns:a="http://schemas.openxmlformats.org/drawingml/2006/main" w="9525">
+            <a:solidFill>
+              <a:srgbClr val="D7DEE8"/>
+            </a:solidFill>
+            <a:prstDash val="solid"/>
+          </a:ln>
+        </p:spPr>
+      </p:sp>
+      <p:sp>
+        <p:nvSpPr>
+          <p:cNvPr id="12" name="">
+            <a:extLst xmlns:a="http://schemas.openxmlformats.org/drawingml/2006/main">
+              <a:ext uri="{FF2B5EF4-FFF2-40B4-BE49-F238E27FC236}">
+                <a16:creationId xmlns:a16="http://schemas.microsoft.com/office/drawing/2014/main" id="{8B823BE6-8947-433A-8AFE-114BFBD818B2}"/>
+              </a:ext>
+            </a:extLst>
+          </p:cNvPr>
+          <p:cNvSpPr>
+            <a:spLocks xmlns:a="http://schemas.openxmlformats.org/drawingml/2006/main" noGrp="1"/>
+          </p:cNvSpPr>
+          <p:nvPr/>
+        </p:nvSpPr>
+        <p:spPr>
+          <a:xfrm xmlns:a="http://schemas.openxmlformats.org/drawingml/2006/main">
+            <a:off x="7410450" y="3429000"/>
+            <a:ext cx="3124200" cy="228600"/>
+          </a:xfrm>
+          <a:prstGeom xmlns:a="http://schemas.openxmlformats.org/drawingml/2006/main" prst="rect">
+            <a:avLst/>
+          </a:prstGeom>
+          <a:noFill xmlns:a="http://schemas.openxmlformats.org/drawingml/2006/main"/>
+          <a:ln xmlns:a="http://schemas.openxmlformats.org/drawingml/2006/main" w="0">
+            <a:noFill/>
+            <a:prstDash val="solid"/>
+          </a:ln>
+        </p:spPr>
+        <p:txBody>
+          <a:bodyPr xmlns:a="http://schemas.openxmlformats.org/drawingml/2006/main"/>
+          <a:lstStyle xmlns:a="http://schemas.openxmlformats.org/drawingml/2006/main"/>
+          <a:p xmlns:a="http://schemas.openxmlformats.org/drawingml/2006/main">
+            <a:pPr algn="ctr">
+              <a:lnSpc>
+                <a:spcPct val="110000"/>
+              </a:lnSpc>
+              <a:buNone/>
+              <a:defRPr sz="1125" b="1">
+                <a:solidFill>
+                  <a:srgbClr val="073763"/>
+                </a:solidFill>
+                <a:latin typeface="Arial"/>
+                <a:ea typeface="Arial"/>
+                <a:cs typeface="Arial"/>
+              </a:defRPr>
+            </a:pPr>
+            <a:r>
+              <a:rPr sz="1125" b="1">
+                <a:solidFill>
+                  <a:srgbClr val="073763"/>
+                </a:solidFill>
+                <a:latin typeface="Arial"/>
+                <a:ea typeface="Arial"/>
+                <a:cs typeface="Arial"/>
+              </a:rPr>
+              <a:t>python IMPL/visualize_best_solution.py</a:t>
+            </a:r>
+          </a:p>
+        </p:txBody>
+      </p:sp>
+      <p:sp>
+        <p:nvSpPr>
+          <p:cNvPr id="13" name="">
+            <a:extLst xmlns:a="http://schemas.openxmlformats.org/drawingml/2006/main">
+              <a:ext uri="{FF2B5EF4-FFF2-40B4-BE49-F238E27FC236}">
+                <a16:creationId xmlns:a16="http://schemas.microsoft.com/office/drawing/2014/main" id="{8E1C4389-3A5E-4953-9E88-A18E11B79CAB}"/>
+              </a:ext>
+            </a:extLst>
+          </p:cNvPr>
+          <p:cNvSpPr>
+            <a:spLocks xmlns:a="http://schemas.openxmlformats.org/drawingml/2006/main" noGrp="1"/>
+          </p:cNvSpPr>
+          <p:nvPr/>
+        </p:nvSpPr>
+        <p:spPr>
+          <a:xfrm xmlns:a="http://schemas.openxmlformats.org/drawingml/2006/main">
+            <a:off x="7239000" y="4286250"/>
+            <a:ext cx="3048000" cy="266700"/>
+          </a:xfrm>
+          <a:prstGeom xmlns:a="http://schemas.openxmlformats.org/drawingml/2006/main" prst="rect">
+            <a:avLst/>
+          </a:prstGeom>
+          <a:noFill xmlns:a="http://schemas.openxmlformats.org/drawingml/2006/main"/>
+          <a:ln xmlns:a="http://schemas.openxmlformats.org/drawingml/2006/main" w="0">
+            <a:noFill/>
+            <a:prstDash val="solid"/>
+          </a:ln>
+        </p:spPr>
+        <p:txBody>
+          <a:bodyPr xmlns:a="http://schemas.openxmlformats.org/drawingml/2006/main"/>
+          <a:lstStyle xmlns:a="http://schemas.openxmlformats.org/drawingml/2006/main"/>
+          <a:p xmlns:a="http://schemas.openxmlformats.org/drawingml/2006/main">
+            <a:pPr algn="l">
+              <a:lnSpc>
+                <a:spcPct val="110000"/>
+              </a:lnSpc>
+              <a:buNone/>
+              <a:defRPr sz="1350" b="1">
+                <a:solidFill>
+                  <a:srgbClr val="101820"/>
+                </a:solidFill>
+                <a:latin typeface="Arial"/>
+                <a:ea typeface="Arial"/>
+                <a:cs typeface="Arial"/>
+              </a:defRPr>
+            </a:pPr>
+            <a:r>
+              <a:rPr sz="1350" b="1">
+                <a:solidFill>
+                  <a:srgbClr val="101820"/>
+                </a:solidFill>
+                <a:latin typeface="Arial"/>
+                <a:ea typeface="Arial"/>
+                <a:cs typeface="Arial"/>
+              </a:rPr>
+              <a:t>Seed 2042 screenshot run</a:t>
+            </a:r>
+          </a:p>
+        </p:txBody>
+      </p:sp>
+      <p:sp>
+        <p:nvSpPr>
+          <p:cNvPr id="14" name="">
+            <a:extLst xmlns:a="http://schemas.openxmlformats.org/drawingml/2006/main">
+              <a:ext uri="{FF2B5EF4-FFF2-40B4-BE49-F238E27FC236}">
+                <a16:creationId xmlns:a16="http://schemas.microsoft.com/office/drawing/2014/main" id="{B6C6771E-47B1-4E87-A0DE-593FEC4930B6}"/>
+              </a:ext>
+            </a:extLst>
+          </p:cNvPr>
+          <p:cNvSpPr>
+            <a:spLocks xmlns:a="http://schemas.openxmlformats.org/drawingml/2006/main" noGrp="1"/>
+          </p:cNvSpPr>
+          <p:nvPr/>
+        </p:nvSpPr>
+        <p:spPr>
+          <a:xfrm xmlns:a="http://schemas.openxmlformats.org/drawingml/2006/main">
+            <a:off x="7277100" y="4838700"/>
+            <a:ext cx="85725" cy="85725"/>
+          </a:xfrm>
+          <a:prstGeom xmlns:a="http://schemas.openxmlformats.org/drawingml/2006/main" prst="rect">
+            <a:avLst/>
+          </a:prstGeom>
+          <a:solidFill xmlns:a="http://schemas.openxmlformats.org/drawingml/2006/main">
+            <a:srgbClr val="005AA9"/>
+          </a:solidFill>
+          <a:ln xmlns:a="http://schemas.openxmlformats.org/drawingml/2006/main" w="0">
+            <a:noFill/>
+            <a:prstDash val="solid"/>
+          </a:ln>
+        </p:spPr>
+      </p:sp>
+      <p:sp>
+        <p:nvSpPr>
+          <p:cNvPr id="15" name="">
+            <a:extLst xmlns:a="http://schemas.openxmlformats.org/drawingml/2006/main">
+              <a:ext uri="{FF2B5EF4-FFF2-40B4-BE49-F238E27FC236}">
+                <a16:creationId xmlns:a16="http://schemas.microsoft.com/office/drawing/2014/main" id="{626FBE8A-43F8-48A5-8545-62E1F418DCE1}"/>
+              </a:ext>
+            </a:extLst>
+          </p:cNvPr>
+          <p:cNvSpPr>
+            <a:spLocks xmlns:a="http://schemas.openxmlformats.org/drawingml/2006/main" noGrp="1"/>
+          </p:cNvSpPr>
+          <p:nvPr/>
+        </p:nvSpPr>
+        <p:spPr>
+          <a:xfrm xmlns:a="http://schemas.openxmlformats.org/drawingml/2006/main">
+            <a:off x="7505700" y="4762500"/>
+            <a:ext cx="2819400" cy="342900"/>
+          </a:xfrm>
+          <a:prstGeom xmlns:a="http://schemas.openxmlformats.org/drawingml/2006/main" prst="rect">
+            <a:avLst/>
+          </a:prstGeom>
+          <a:noFill xmlns:a="http://schemas.openxmlformats.org/drawingml/2006/main"/>
+          <a:ln xmlns:a="http://schemas.openxmlformats.org/drawingml/2006/main" w="0">
+            <a:noFill/>
+            <a:prstDash val="solid"/>
+          </a:ln>
+        </p:spPr>
+        <p:txBody>
+          <a:bodyPr xmlns:a="http://schemas.openxmlformats.org/drawingml/2006/main"/>
+          <a:lstStyle xmlns:a="http://schemas.openxmlformats.org/drawingml/2006/main"/>
+          <a:p xmlns:a="http://schemas.openxmlformats.org/drawingml/2006/main">
+            <a:pPr algn="l">
+              <a:lnSpc>
+                <a:spcPct val="108000"/>
+              </a:lnSpc>
+              <a:buNone/>
+              <a:defRPr sz="1125" b="0">
+                <a:solidFill>
+                  <a:srgbClr val="101820"/>
+                </a:solidFill>
+                <a:latin typeface="Arial"/>
+                <a:ea typeface="Arial"/>
+                <a:cs typeface="Arial"/>
+              </a:defRPr>
+            </a:pPr>
+            <a:r>
+              <a:rPr sz="1125" b="0">
+                <a:solidFill>
+                  <a:srgbClr val="101820"/>
+                </a:solidFill>
+                <a:latin typeface="Arial"/>
+                <a:ea typeface="Arial"/>
+                <a:cs typeface="Arial"/>
+              </a:rPr>
+              <a:t>Steps to goal: 156</a:t>
+            </a:r>
+          </a:p>
+        </p:txBody>
+      </p:sp>
+      <p:sp>
+        <p:nvSpPr>
+          <p:cNvPr id="16" name="">
+            <a:extLst xmlns:a="http://schemas.openxmlformats.org/drawingml/2006/main">
+              <a:ext uri="{FF2B5EF4-FFF2-40B4-BE49-F238E27FC236}">
+                <a16:creationId xmlns:a16="http://schemas.microsoft.com/office/drawing/2014/main" id="{61013FD8-11F5-44B0-B7D2-32C71A5BE740}"/>
+              </a:ext>
+            </a:extLst>
+          </p:cNvPr>
+          <p:cNvSpPr>
+            <a:spLocks xmlns:a="http://schemas.openxmlformats.org/drawingml/2006/main" noGrp="1"/>
+          </p:cNvSpPr>
+          <p:nvPr/>
+        </p:nvSpPr>
+        <p:spPr>
+          <a:xfrm xmlns:a="http://schemas.openxmlformats.org/drawingml/2006/main">
+            <a:off x="7277100" y="5105400"/>
+            <a:ext cx="85725" cy="85725"/>
+          </a:xfrm>
+          <a:prstGeom xmlns:a="http://schemas.openxmlformats.org/drawingml/2006/main" prst="rect">
+            <a:avLst/>
+          </a:prstGeom>
+          <a:solidFill xmlns:a="http://schemas.openxmlformats.org/drawingml/2006/main">
+            <a:srgbClr val="005AA9"/>
+          </a:solidFill>
+          <a:ln xmlns:a="http://schemas.openxmlformats.org/drawingml/2006/main" w="0">
+            <a:noFill/>
+            <a:prstDash val="solid"/>
+          </a:ln>
+        </p:spPr>
+      </p:sp>
+      <p:sp>
+        <p:nvSpPr>
+          <p:cNvPr id="17" name="">
+            <a:extLst xmlns:a="http://schemas.openxmlformats.org/drawingml/2006/main">
+              <a:ext uri="{FF2B5EF4-FFF2-40B4-BE49-F238E27FC236}">
+                <a16:creationId xmlns:a16="http://schemas.microsoft.com/office/drawing/2014/main" id="{D7C9AE09-89B4-4004-AB65-94F13E5AB5F6}"/>
+              </a:ext>
+            </a:extLst>
+          </p:cNvPr>
+          <p:cNvSpPr>
+            <a:spLocks xmlns:a="http://schemas.openxmlformats.org/drawingml/2006/main" noGrp="1"/>
+          </p:cNvSpPr>
+          <p:nvPr/>
+        </p:nvSpPr>
+        <p:spPr>
+          <a:xfrm xmlns:a="http://schemas.openxmlformats.org/drawingml/2006/main">
+            <a:off x="7505700" y="5029200"/>
+            <a:ext cx="2819400" cy="342900"/>
+          </a:xfrm>
+          <a:prstGeom xmlns:a="http://schemas.openxmlformats.org/drawingml/2006/main" prst="rect">
+            <a:avLst/>
+          </a:prstGeom>
+          <a:noFill xmlns:a="http://schemas.openxmlformats.org/drawingml/2006/main"/>
+          <a:ln xmlns:a="http://schemas.openxmlformats.org/drawingml/2006/main" w="0">
+            <a:noFill/>
+            <a:prstDash val="solid"/>
+          </a:ln>
+        </p:spPr>
+        <p:txBody>
+          <a:bodyPr xmlns:a="http://schemas.openxmlformats.org/drawingml/2006/main"/>
+          <a:lstStyle xmlns:a="http://schemas.openxmlformats.org/drawingml/2006/main"/>
+          <a:p xmlns:a="http://schemas.openxmlformats.org/drawingml/2006/main">
+            <a:pPr algn="l">
+              <a:lnSpc>
+                <a:spcPct val="108000"/>
+              </a:lnSpc>
+              <a:buNone/>
+              <a:defRPr sz="1125" b="0">
+                <a:solidFill>
+                  <a:srgbClr val="101820"/>
+                </a:solidFill>
+                <a:latin typeface="Arial"/>
+                <a:ea typeface="Arial"/>
+                <a:cs typeface="Arial"/>
+              </a:defRPr>
+            </a:pPr>
+            <a:r>
+              <a:rPr sz="1125" b="0">
+                <a:solidFill>
+                  <a:srgbClr val="101820"/>
+                </a:solidFill>
+                <a:latin typeface="Arial"/>
+                <a:ea typeface="Arial"/>
+                <a:cs typeface="Arial"/>
+              </a:rPr>
+              <a:t>Total reward: -156</a:t>
+            </a:r>
+          </a:p>
+        </p:txBody>
+      </p:sp>
+      <p:sp>
+        <p:nvSpPr>
+          <p:cNvPr id="18" name="">
+            <a:extLst xmlns:a="http://schemas.openxmlformats.org/drawingml/2006/main">
+              <a:ext uri="{FF2B5EF4-FFF2-40B4-BE49-F238E27FC236}">
+                <a16:creationId xmlns:a16="http://schemas.microsoft.com/office/drawing/2014/main" id="{9197AD53-8797-4455-9366-47C49A5D38B6}"/>
+              </a:ext>
+            </a:extLst>
+          </p:cNvPr>
+          <p:cNvSpPr>
+            <a:spLocks xmlns:a="http://schemas.openxmlformats.org/drawingml/2006/main" noGrp="1"/>
+          </p:cNvSpPr>
+          <p:nvPr/>
+        </p:nvSpPr>
+        <p:spPr>
+          <a:xfrm xmlns:a="http://schemas.openxmlformats.org/drawingml/2006/main">
+            <a:off x="7277100" y="5372100"/>
+            <a:ext cx="85725" cy="85725"/>
+          </a:xfrm>
+          <a:prstGeom xmlns:a="http://schemas.openxmlformats.org/drawingml/2006/main" prst="rect">
+            <a:avLst/>
+          </a:prstGeom>
+          <a:solidFill xmlns:a="http://schemas.openxmlformats.org/drawingml/2006/main">
+            <a:srgbClr val="005AA9"/>
+          </a:solidFill>
+          <a:ln xmlns:a="http://schemas.openxmlformats.org/drawingml/2006/main" w="0">
+            <a:noFill/>
+            <a:prstDash val="solid"/>
+          </a:ln>
+        </p:spPr>
+      </p:sp>
+      <p:sp>
+        <p:nvSpPr>
+          <p:cNvPr id="19" name="">
+            <a:extLst xmlns:a="http://schemas.openxmlformats.org/drawingml/2006/main">
+              <a:ext uri="{FF2B5EF4-FFF2-40B4-BE49-F238E27FC236}">
+                <a16:creationId xmlns:a16="http://schemas.microsoft.com/office/drawing/2014/main" id="{5359C0A0-F5CB-4C79-B9D7-42ABEDC5F4A1}"/>
+              </a:ext>
+            </a:extLst>
+          </p:cNvPr>
+          <p:cNvSpPr>
+            <a:spLocks xmlns:a="http://schemas.openxmlformats.org/drawingml/2006/main" noGrp="1"/>
+          </p:cNvSpPr>
+          <p:nvPr/>
+        </p:nvSpPr>
+        <p:spPr>
+          <a:xfrm xmlns:a="http://schemas.openxmlformats.org/drawingml/2006/main">
+            <a:off x="7505700" y="5295900"/>
+            <a:ext cx="2819400" cy="342900"/>
+          </a:xfrm>
+          <a:prstGeom xmlns:a="http://schemas.openxmlformats.org/drawingml/2006/main" prst="rect">
+            <a:avLst/>
+          </a:prstGeom>
+          <a:noFill xmlns:a="http://schemas.openxmlformats.org/drawingml/2006/main"/>
+          <a:ln xmlns:a="http://schemas.openxmlformats.org/drawingml/2006/main" w="0">
+            <a:noFill/>
+            <a:prstDash val="solid"/>
+          </a:ln>
+        </p:spPr>
+        <p:txBody>
+          <a:bodyPr xmlns:a="http://schemas.openxmlformats.org/drawingml/2006/main"/>
+          <a:lstStyle xmlns:a="http://schemas.openxmlformats.org/drawingml/2006/main"/>
+          <a:p xmlns:a="http://schemas.openxmlformats.org/drawingml/2006/main">
+            <a:pPr algn="l">
+              <a:lnSpc>
+                <a:spcPct val="108000"/>
+              </a:lnSpc>
+              <a:buNone/>
+              <a:defRPr sz="1125" b="0">
+                <a:solidFill>
+                  <a:srgbClr val="101820"/>
+                </a:solidFill>
+                <a:latin typeface="Arial"/>
+                <a:ea typeface="Arial"/>
+                <a:cs typeface="Arial"/>
+              </a:defRPr>
+            </a:pPr>
+            <a:r>
+              <a:rPr sz="1125" b="0">
+                <a:solidFill>
+                  <a:srgbClr val="101820"/>
+                </a:solidFill>
+                <a:latin typeface="Arial"/>
+                <a:ea typeface="Arial"/>
+                <a:cs typeface="Arial"/>
+              </a:rPr>
+              <a:t>Progress bonus: 500</a:t>
+            </a:r>
+          </a:p>
+        </p:txBody>
+      </p:sp>
+      <p:sp>
+        <p:nvSpPr>
+          <p:cNvPr id="20" name="">
+            <a:extLst xmlns:a="http://schemas.openxmlformats.org/drawingml/2006/main">
+              <a:ext uri="{FF2B5EF4-FFF2-40B4-BE49-F238E27FC236}">
+                <a16:creationId xmlns:a16="http://schemas.microsoft.com/office/drawing/2014/main" id="{12B39503-3877-492E-90AB-7697C62DBDDE}"/>
+              </a:ext>
+            </a:extLst>
+          </p:cNvPr>
+          <p:cNvSpPr>
+            <a:spLocks xmlns:a="http://schemas.openxmlformats.org/drawingml/2006/main" noGrp="1"/>
+          </p:cNvSpPr>
+          <p:nvPr/>
+        </p:nvSpPr>
+        <p:spPr>
+          <a:xfrm xmlns:a="http://schemas.openxmlformats.org/drawingml/2006/main">
+            <a:off x="7277100" y="5638800"/>
+            <a:ext cx="85725" cy="85725"/>
+          </a:xfrm>
+          <a:prstGeom xmlns:a="http://schemas.openxmlformats.org/drawingml/2006/main" prst="rect">
+            <a:avLst/>
+          </a:prstGeom>
+          <a:solidFill xmlns:a="http://schemas.openxmlformats.org/drawingml/2006/main">
+            <a:srgbClr val="005AA9"/>
+          </a:solidFill>
+          <a:ln xmlns:a="http://schemas.openxmlformats.org/drawingml/2006/main" w="0">
+            <a:noFill/>
+            <a:prstDash val="solid"/>
+          </a:ln>
+        </p:spPr>
+      </p:sp>
+      <p:sp>
+        <p:nvSpPr>
+          <p:cNvPr id="21" name="">
+            <a:extLst xmlns:a="http://schemas.openxmlformats.org/drawingml/2006/main">
+              <a:ext uri="{FF2B5EF4-FFF2-40B4-BE49-F238E27FC236}">
+                <a16:creationId xmlns:a16="http://schemas.microsoft.com/office/drawing/2014/main" id="{928610D9-4EC5-47F5-8944-434E9BBD2202}"/>
+              </a:ext>
+            </a:extLst>
+          </p:cNvPr>
+          <p:cNvSpPr>
+            <a:spLocks xmlns:a="http://schemas.openxmlformats.org/drawingml/2006/main" noGrp="1"/>
+          </p:cNvSpPr>
+          <p:nvPr/>
+        </p:nvSpPr>
+        <p:spPr>
+          <a:xfrm xmlns:a="http://schemas.openxmlformats.org/drawingml/2006/main">
+            <a:off x="7505700" y="5562600"/>
+            <a:ext cx="2819400" cy="342900"/>
+          </a:xfrm>
+          <a:prstGeom xmlns:a="http://schemas.openxmlformats.org/drawingml/2006/main" prst="rect">
+            <a:avLst/>
+          </a:prstGeom>
+          <a:noFill xmlns:a="http://schemas.openxmlformats.org/drawingml/2006/main"/>
+          <a:ln xmlns:a="http://schemas.openxmlformats.org/drawingml/2006/main" w="0">
+            <a:noFill/>
+            <a:prstDash val="solid"/>
+          </a:ln>
+        </p:spPr>
+        <p:txBody>
+          <a:bodyPr xmlns:a="http://schemas.openxmlformats.org/drawingml/2006/main"/>
+          <a:lstStyle xmlns:a="http://schemas.openxmlformats.org/drawingml/2006/main"/>
+          <a:p xmlns:a="http://schemas.openxmlformats.org/drawingml/2006/main">
+            <a:pPr algn="l">
+              <a:lnSpc>
+                <a:spcPct val="108000"/>
+              </a:lnSpc>
+              <a:buNone/>
+              <a:defRPr sz="1125" b="0">
+                <a:solidFill>
+                  <a:srgbClr val="101820"/>
+                </a:solidFill>
+                <a:latin typeface="Arial"/>
+                <a:ea typeface="Arial"/>
+                <a:cs typeface="Arial"/>
+              </a:defRPr>
+            </a:pPr>
+            <a:r>
+              <a:rPr sz="1125" b="0">
+                <a:solidFill>
+                  <a:srgbClr val="101820"/>
+                </a:solidFill>
+                <a:latin typeface="Arial"/>
+                <a:ea typeface="Arial"/>
+                <a:cs typeface="Arial"/>
+              </a:rPr>
+              <a:t>Goal bonus: 200</a:t>
+            </a:r>
+          </a:p>
+        </p:txBody>
+      </p:sp>
+      <p:sp>
+        <p:nvSpPr>
+          <p:cNvPr id="22" name="">
+            <a:extLst xmlns:a="http://schemas.openxmlformats.org/drawingml/2006/main">
+              <a:ext uri="{FF2B5EF4-FFF2-40B4-BE49-F238E27FC236}">
+                <a16:creationId xmlns:a16="http://schemas.microsoft.com/office/drawing/2014/main" id="{BEB0C0A8-BA29-4BA7-BDC4-ADAA707FEF1D}"/>
+              </a:ext>
+            </a:extLst>
+          </p:cNvPr>
+          <p:cNvSpPr>
+            <a:spLocks xmlns:a="http://schemas.openxmlformats.org/drawingml/2006/main" noGrp="1"/>
+          </p:cNvSpPr>
+          <p:nvPr/>
+        </p:nvSpPr>
+        <p:spPr>
+          <a:xfrm xmlns:a="http://schemas.openxmlformats.org/drawingml/2006/main">
+            <a:off x="7277100" y="5905500"/>
+            <a:ext cx="85725" cy="85725"/>
+          </a:xfrm>
+          <a:prstGeom xmlns:a="http://schemas.openxmlformats.org/drawingml/2006/main" prst="rect">
+            <a:avLst/>
+          </a:prstGeom>
+          <a:solidFill xmlns:a="http://schemas.openxmlformats.org/drawingml/2006/main">
+            <a:srgbClr val="005AA9"/>
+          </a:solidFill>
+          <a:ln xmlns:a="http://schemas.openxmlformats.org/drawingml/2006/main" w="0">
+            <a:noFill/>
+            <a:prstDash val="solid"/>
+          </a:ln>
+        </p:spPr>
+      </p:sp>
+      <p:sp>
+        <p:nvSpPr>
+          <p:cNvPr id="23" name="">
+            <a:extLst xmlns:a="http://schemas.openxmlformats.org/drawingml/2006/main">
+              <a:ext uri="{FF2B5EF4-FFF2-40B4-BE49-F238E27FC236}">
+                <a16:creationId xmlns:a16="http://schemas.microsoft.com/office/drawing/2014/main" id="{9061E55D-00EC-4103-9FE7-A7A777E5FC49}"/>
+              </a:ext>
+            </a:extLst>
+          </p:cNvPr>
+          <p:cNvSpPr>
+            <a:spLocks xmlns:a="http://schemas.openxmlformats.org/drawingml/2006/main" noGrp="1"/>
+          </p:cNvSpPr>
+          <p:nvPr/>
+        </p:nvSpPr>
+        <p:spPr>
+          <a:xfrm xmlns:a="http://schemas.openxmlformats.org/drawingml/2006/main">
+            <a:off x="7505700" y="5829300"/>
+            <a:ext cx="2819400" cy="342900"/>
+          </a:xfrm>
+          <a:prstGeom xmlns:a="http://schemas.openxmlformats.org/drawingml/2006/main" prst="rect">
+            <a:avLst/>
+          </a:prstGeom>
+          <a:noFill xmlns:a="http://schemas.openxmlformats.org/drawingml/2006/main"/>
+          <a:ln xmlns:a="http://schemas.openxmlformats.org/drawingml/2006/main" w="0">
+            <a:noFill/>
+            <a:prstDash val="solid"/>
+          </a:ln>
+        </p:spPr>
+        <p:txBody>
+          <a:bodyPr xmlns:a="http://schemas.openxmlformats.org/drawingml/2006/main"/>
+          <a:lstStyle xmlns:a="http://schemas.openxmlformats.org/drawingml/2006/main"/>
+          <a:p xmlns:a="http://schemas.openxmlformats.org/drawingml/2006/main">
+            <a:pPr algn="l">
+              <a:lnSpc>
+                <a:spcPct val="108000"/>
+              </a:lnSpc>
+              <a:buNone/>
+              <a:defRPr sz="1125" b="0">
+                <a:solidFill>
+                  <a:srgbClr val="101820"/>
+                </a:solidFill>
+                <a:latin typeface="Arial"/>
+                <a:ea typeface="Arial"/>
+                <a:cs typeface="Arial"/>
+              </a:defRPr>
+            </a:pPr>
+            <a:r>
+              <a:rPr sz="1125" b="0">
+                <a:solidFill>
+                  <a:srgbClr val="101820"/>
+                </a:solidFill>
+                <a:latin typeface="Arial"/>
+                <a:ea typeface="Arial"/>
+                <a:cs typeface="Arial"/>
+              </a:rPr>
+              <a:t>Fitness: 544</a:t>
+            </a:r>
+          </a:p>
+        </p:txBody>
+      </p:sp>
+    </p:spTree>
+    <p:extLst>
+      <p:ext uri="{BB962C8B-B14F-4D97-AF65-F5344CB8AC3E}">
+        <p14:creationId xmlns:p14="http://schemas.microsoft.com/office/powerpoint/2010/main" val="269497105"/>
+      </p:ext>
+    </p:extLst>
+  </p:cSld>
+</p:sld>
+</file>
+
+<file path=ppt/slides/slide13.xml><?xml version="1.0" encoding="utf-8"?>
+<p:sld xmlns:p="http://schemas.openxmlformats.org/presentationml/2006/main">
+  <p:cSld>
+    <p:bg>
+      <p:bgPr>
+        <a:solidFill xmlns:a="http://schemas.openxmlformats.org/drawingml/2006/main">
+          <a:srgbClr val="FFFFFF"/>
+        </a:solidFill>
+      </p:bgPr>
+    </p:bg>
+    <p:spTree>
+      <p:nvGrpSpPr>
+        <p:cNvPr id="1" name=""/>
+        <p:cNvGrpSpPr/>
+        <p:nvPr/>
+      </p:nvGrpSpPr>
+      <p:grpSpPr>
+        <a:xfrm xmlns:a="http://schemas.openxmlformats.org/drawingml/2006/main"/>
+      </p:grpSpPr>
+      <p:sp>
+        <p:nvSpPr>
+          <p:cNvPr id="1" name="">
+            <a:extLst xmlns:a="http://schemas.openxmlformats.org/drawingml/2006/main">
+              <a:ext uri="{FF2B5EF4-FFF2-40B4-BE49-F238E27FC236}">
+                <a16:creationId xmlns:a16="http://schemas.microsoft.com/office/drawing/2014/main" id="{E7614601-428E-4C3F-A8F5-BE922E98B938}"/>
+              </a:ext>
+            </a:extLst>
+          </p:cNvPr>
+          <p:cNvSpPr>
+            <a:spLocks xmlns:a="http://schemas.openxmlformats.org/drawingml/2006/main" noGrp="1"/>
+          </p:cNvSpPr>
+          <p:nvPr/>
+        </p:nvSpPr>
+        <p:spPr>
+          <a:xfrm xmlns:a="http://schemas.openxmlformats.org/drawingml/2006/main">
+            <a:off x="0" y="6362700"/>
+            <a:ext cx="12192000" cy="495300"/>
+          </a:xfrm>
+          <a:prstGeom xmlns:a="http://schemas.openxmlformats.org/drawingml/2006/main" prst="rect">
+            <a:avLst/>
+          </a:prstGeom>
+          <a:solidFill xmlns:a="http://schemas.openxmlformats.org/drawingml/2006/main">
+            <a:srgbClr val="005AA9"/>
+          </a:solidFill>
+          <a:ln xmlns:a="http://schemas.openxmlformats.org/drawingml/2006/main" w="0">
+            <a:noFill/>
+            <a:prstDash val="solid"/>
+          </a:ln>
+        </p:spPr>
+      </p:sp>
+      <p:sp>
+        <p:nvSpPr>
+          <p:cNvPr id="2" name="">
+            <a:extLst xmlns:a="http://schemas.openxmlformats.org/drawingml/2006/main">
+              <a:ext uri="{FF2B5EF4-FFF2-40B4-BE49-F238E27FC236}">
+                <a16:creationId xmlns:a16="http://schemas.microsoft.com/office/drawing/2014/main" id="{AC21CB19-835F-4ECD-BC90-A7246D110F34}"/>
+              </a:ext>
+            </a:extLst>
+          </p:cNvPr>
+          <p:cNvSpPr>
+            <a:spLocks xmlns:a="http://schemas.openxmlformats.org/drawingml/2006/main" noGrp="1"/>
+          </p:cNvSpPr>
+          <p:nvPr/>
+        </p:nvSpPr>
+        <p:spPr>
+          <a:xfrm xmlns:a="http://schemas.openxmlformats.org/drawingml/2006/main">
+            <a:off x="666750" y="6534150"/>
+            <a:ext cx="7239000" cy="190500"/>
+          </a:xfrm>
+          <a:prstGeom xmlns:a="http://schemas.openxmlformats.org/drawingml/2006/main" prst="rect">
+            <a:avLst/>
+          </a:prstGeom>
+          <a:noFill xmlns:a="http://schemas.openxmlformats.org/drawingml/2006/main"/>
+          <a:ln xmlns:a="http://schemas.openxmlformats.org/drawingml/2006/main" w="0">
+            <a:noFill/>
+            <a:prstDash val="solid"/>
+          </a:ln>
+        </p:spPr>
+        <p:txBody>
+          <a:bodyPr xmlns:a="http://schemas.openxmlformats.org/drawingml/2006/main"/>
+          <a:lstStyle xmlns:a="http://schemas.openxmlformats.org/drawingml/2006/main"/>
+          <a:p xmlns:a="http://schemas.openxmlformats.org/drawingml/2006/main">
+            <a:pPr algn="l">
+              <a:lnSpc>
+                <a:spcPct val="110000"/>
+              </a:lnSpc>
+              <a:buNone/>
+              <a:defRPr sz="900" b="1">
+                <a:solidFill>
+                  <a:srgbClr val="FFFFFF"/>
+                </a:solidFill>
+                <a:latin typeface="Arial"/>
+                <a:ea typeface="Arial"/>
+                <a:cs typeface="Arial"/>
+              </a:defRPr>
+            </a:pPr>
+            <a:r>
+              <a:rPr sz="900" b="1">
+                <a:solidFill>
+                  <a:srgbClr val="FFFFFF"/>
+                </a:solidFill>
+                <a:latin typeface="Arial"/>
+                <a:ea typeface="Arial"/>
+                <a:cs typeface="Arial"/>
+              </a:rPr>
+              <a:t>BIAI Project  |  Genetic Algorithm for MountainCar-v0</a:t>
+            </a:r>
+          </a:p>
+        </p:txBody>
+      </p:sp>
+      <p:sp>
+        <p:nvSpPr>
+          <p:cNvPr id="3" name="">
+            <a:extLst xmlns:a="http://schemas.openxmlformats.org/drawingml/2006/main">
+              <a:ext uri="{FF2B5EF4-FFF2-40B4-BE49-F238E27FC236}">
+                <a16:creationId xmlns:a16="http://schemas.microsoft.com/office/drawing/2014/main" id="{0A7948E6-B87B-4056-B90C-93F2DE946C4D}"/>
+              </a:ext>
+            </a:extLst>
+          </p:cNvPr>
+          <p:cNvSpPr>
+            <a:spLocks xmlns:a="http://schemas.openxmlformats.org/drawingml/2006/main" noGrp="1"/>
+          </p:cNvSpPr>
+          <p:nvPr/>
+        </p:nvSpPr>
+        <p:spPr>
+          <a:xfrm xmlns:a="http://schemas.openxmlformats.org/drawingml/2006/main">
+            <a:off x="11277600" y="6515100"/>
+            <a:ext cx="381000" cy="209550"/>
+          </a:xfrm>
+          <a:prstGeom xmlns:a="http://schemas.openxmlformats.org/drawingml/2006/main" prst="rect">
+            <a:avLst/>
+          </a:prstGeom>
+          <a:noFill xmlns:a="http://schemas.openxmlformats.org/drawingml/2006/main"/>
+          <a:ln xmlns:a="http://schemas.openxmlformats.org/drawingml/2006/main" w="0">
+            <a:noFill/>
+            <a:prstDash val="solid"/>
+          </a:ln>
+        </p:spPr>
+        <p:txBody>
+          <a:bodyPr xmlns:a="http://schemas.openxmlformats.org/drawingml/2006/main"/>
+          <a:lstStyle xmlns:a="http://schemas.openxmlformats.org/drawingml/2006/main"/>
+          <a:p xmlns:a="http://schemas.openxmlformats.org/drawingml/2006/main">
+            <a:pPr algn="r">
+              <a:lnSpc>
+                <a:spcPct val="110000"/>
+              </a:lnSpc>
+              <a:buNone/>
+              <a:defRPr sz="975" b="1">
+                <a:solidFill>
+                  <a:srgbClr val="FFFFFF"/>
+                </a:solidFill>
+                <a:latin typeface="Arial"/>
+                <a:ea typeface="Arial"/>
+                <a:cs typeface="Arial"/>
+              </a:defRPr>
+            </a:pPr>
+            <a:r>
+              <a:rPr sz="975" b="1">
+                <a:solidFill>
+                  <a:srgbClr val="FFFFFF"/>
+                </a:solidFill>
+                <a:latin typeface="Arial"/>
+                <a:ea typeface="Arial"/>
+                <a:cs typeface="Arial"/>
+              </a:rPr>
+              <a:t>13</a:t>
             </a:r>
           </a:p>
         </p:txBody>
@@ -7780,7 +8621,7 @@
           <p:nvPr/>
         </p:nvPicPr>
         <p:blipFill>
-          <a:blip xmlns:r="http://schemas.openxmlformats.org/officeDocument/2006/relationships" xmlns:a="http://schemas.openxmlformats.org/drawingml/2006/main" r:embed="Ra5770a3fa9604a5f"/>
+          <a:blip xmlns:r="http://schemas.openxmlformats.org/officeDocument/2006/relationships" xmlns:a="http://schemas.openxmlformats.org/drawingml/2006/main" r:embed="R93a98478cb3d4f31"/>
           <a:stretch xmlns:a="http://schemas.openxmlformats.org/drawingml/2006/main"/>
         </p:blipFill>
         <p:spPr>
@@ -12011,7 +12852,7 @@
           <p:cNvPr id="1" name="">
             <a:extLst xmlns:a="http://schemas.openxmlformats.org/drawingml/2006/main">
               <a:ext uri="{FF2B5EF4-FFF2-40B4-BE49-F238E27FC236}">
-                <a16:creationId xmlns:a16="http://schemas.microsoft.com/office/drawing/2014/main" id="{B2892416-6F09-4C75-97F5-1BBBBA35DB66}"/>
+                <a16:creationId xmlns:a16="http://schemas.microsoft.com/office/drawing/2014/main" id="{F3C025FD-BC39-4105-B43F-D45E7479E937}"/>
               </a:ext>
             </a:extLst>
           </p:cNvPr>
@@ -12042,7 +12883,7 @@
           <p:cNvPr id="2" name="">
             <a:extLst xmlns:a="http://schemas.openxmlformats.org/drawingml/2006/main">
               <a:ext uri="{FF2B5EF4-FFF2-40B4-BE49-F238E27FC236}">
-                <a16:creationId xmlns:a16="http://schemas.microsoft.com/office/drawing/2014/main" id="{CE622C4F-7C10-465C-B2F8-1B4D207B061A}"/>
+                <a16:creationId xmlns:a16="http://schemas.microsoft.com/office/drawing/2014/main" id="{B161094C-F2A7-4807-9112-94273F5F4A29}"/>
               </a:ext>
             </a:extLst>
           </p:cNvPr>
@@ -12102,7 +12943,7 @@
           <p:cNvPr id="3" name="">
             <a:extLst xmlns:a="http://schemas.openxmlformats.org/drawingml/2006/main">
               <a:ext uri="{FF2B5EF4-FFF2-40B4-BE49-F238E27FC236}">
-                <a16:creationId xmlns:a16="http://schemas.microsoft.com/office/drawing/2014/main" id="{EAED21C3-C3B9-493B-BF63-208FC7638A37}"/>
+                <a16:creationId xmlns:a16="http://schemas.microsoft.com/office/drawing/2014/main" id="{78AD50A6-0217-45A4-B136-2EE3C20EE0C5}"/>
               </a:ext>
             </a:extLst>
           </p:cNvPr>
@@ -12162,18 +13003,18 @@
           <p:cNvPr id="4" name="">
             <a:extLst xmlns:a="http://schemas.openxmlformats.org/drawingml/2006/main">
               <a:ext uri="{FF2B5EF4-FFF2-40B4-BE49-F238E27FC236}">
-                <a16:creationId xmlns:a16="http://schemas.microsoft.com/office/drawing/2014/main" id="{B0B0DC85-1175-4886-BD96-7B0999FDDD1C}"/>
-              </a:ext>
-            </a:extLst>
-          </p:cNvPr>
-          <p:cNvSpPr>
-            <a:spLocks xmlns:a="http://schemas.openxmlformats.org/drawingml/2006/main" noGrp="1"/>
-          </p:cNvSpPr>
-          <p:nvPr/>
-        </p:nvSpPr>
-        <p:spPr>
-          <a:xfrm xmlns:a="http://schemas.openxmlformats.org/drawingml/2006/main">
-            <a:off x="666750" y="781050"/>
+                <a16:creationId xmlns:a16="http://schemas.microsoft.com/office/drawing/2014/main" id="{F70DEED9-DBC8-4E67-911F-BA99CB944F36}"/>
+              </a:ext>
+            </a:extLst>
+          </p:cNvPr>
+          <p:cNvSpPr>
+            <a:spLocks xmlns:a="http://schemas.openxmlformats.org/drawingml/2006/main" noGrp="1"/>
+          </p:cNvSpPr>
+          <p:nvPr/>
+        </p:nvSpPr>
+        <p:spPr>
+          <a:xfrm xmlns:a="http://schemas.openxmlformats.org/drawingml/2006/main">
+            <a:off x="666750" y="952500"/>
             <a:ext cx="3429000" cy="228600"/>
           </a:xfrm>
           <a:prstGeom xmlns:a="http://schemas.openxmlformats.org/drawingml/2006/main" prst="rect">
@@ -12212,7 +13053,7 @@
                 <a:ea typeface="Arial"/>
                 <a:cs typeface="Arial"/>
               </a:rPr>
-              <a:t>REPOSITORY STRUCTURE</a:t>
+              <a:t>ALGORITHM FLOW-CHART</a:t>
             </a:r>
           </a:p>
         </p:txBody>
@@ -12222,18 +13063,18 @@
           <p:cNvPr id="5" name="">
             <a:extLst xmlns:a="http://schemas.openxmlformats.org/drawingml/2006/main">
               <a:ext uri="{FF2B5EF4-FFF2-40B4-BE49-F238E27FC236}">
-                <a16:creationId xmlns:a16="http://schemas.microsoft.com/office/drawing/2014/main" id="{102BD9EE-BF97-47A6-9F0B-7690E618400D}"/>
-              </a:ext>
-            </a:extLst>
-          </p:cNvPr>
-          <p:cNvSpPr>
-            <a:spLocks xmlns:a="http://schemas.openxmlformats.org/drawingml/2006/main" noGrp="1"/>
-          </p:cNvSpPr>
-          <p:nvPr/>
-        </p:nvSpPr>
-        <p:spPr>
-          <a:xfrm xmlns:a="http://schemas.openxmlformats.org/drawingml/2006/main">
-            <a:off x="647700" y="1143000"/>
+                <a16:creationId xmlns:a16="http://schemas.microsoft.com/office/drawing/2014/main" id="{B59F567A-9FBE-4747-92DE-3AC2F7C59BED}"/>
+              </a:ext>
+            </a:extLst>
+          </p:cNvPr>
+          <p:cNvSpPr>
+            <a:spLocks xmlns:a="http://schemas.openxmlformats.org/drawingml/2006/main" noGrp="1"/>
+          </p:cNvSpPr>
+          <p:nvPr/>
+        </p:nvSpPr>
+        <p:spPr>
+          <a:xfrm xmlns:a="http://schemas.openxmlformats.org/drawingml/2006/main">
+            <a:off x="647700" y="1314450"/>
             <a:ext cx="419100" cy="28575"/>
           </a:xfrm>
           <a:prstGeom xmlns:a="http://schemas.openxmlformats.org/drawingml/2006/main" prst="rect">
@@ -12253,19 +13094,19 @@
           <p:cNvPr id="6" name="">
             <a:extLst xmlns:a="http://schemas.openxmlformats.org/drawingml/2006/main">
               <a:ext uri="{FF2B5EF4-FFF2-40B4-BE49-F238E27FC236}">
-                <a16:creationId xmlns:a16="http://schemas.microsoft.com/office/drawing/2014/main" id="{2B26D8DE-8E20-48D6-910D-0F2CA30457C2}"/>
-              </a:ext>
-            </a:extLst>
-          </p:cNvPr>
-          <p:cNvSpPr>
-            <a:spLocks xmlns:a="http://schemas.openxmlformats.org/drawingml/2006/main" noGrp="1"/>
-          </p:cNvSpPr>
-          <p:nvPr/>
-        </p:nvSpPr>
-        <p:spPr>
-          <a:xfrm xmlns:a="http://schemas.openxmlformats.org/drawingml/2006/main">
-            <a:off x="666750" y="1200150"/>
-            <a:ext cx="8572500" cy="876300"/>
+                <a16:creationId xmlns:a16="http://schemas.microsoft.com/office/drawing/2014/main" id="{1F2B3CFF-56DF-49AD-B0C2-5DCCBAC9F093}"/>
+              </a:ext>
+            </a:extLst>
+          </p:cNvPr>
+          <p:cNvSpPr>
+            <a:spLocks xmlns:a="http://schemas.openxmlformats.org/drawingml/2006/main" noGrp="1"/>
+          </p:cNvSpPr>
+          <p:nvPr/>
+        </p:nvSpPr>
+        <p:spPr>
+          <a:xfrm xmlns:a="http://schemas.openxmlformats.org/drawingml/2006/main">
+            <a:off x="666750" y="1504950"/>
+            <a:ext cx="4762500" cy="990600"/>
           </a:xfrm>
           <a:prstGeom xmlns:a="http://schemas.openxmlformats.org/drawingml/2006/main" prst="rect">
             <a:avLst/>
@@ -12282,10 +13123,10 @@
           <a:p xmlns:a="http://schemas.openxmlformats.org/drawingml/2006/main">
             <a:pPr algn="l">
               <a:lnSpc>
-                <a:spcPct val="94000"/>
-              </a:lnSpc>
-              <a:buNone/>
-              <a:defRPr sz="2925" b="1">
+                <a:spcPct val="92000"/>
+              </a:lnSpc>
+              <a:buNone/>
+              <a:defRPr sz="3000" b="1">
                 <a:solidFill>
                   <a:srgbClr val="101820"/>
                 </a:solidFill>
@@ -12295,7 +13136,7 @@
               </a:defRPr>
             </a:pPr>
             <a:r>
-              <a:rPr sz="2925" b="1">
+              <a:rPr sz="3000" b="1">
                 <a:solidFill>
                   <a:srgbClr val="101820"/>
                 </a:solidFill>
@@ -12303,7 +13144,34 @@
                 <a:ea typeface="Arial"/>
                 <a:cs typeface="Arial"/>
               </a:rPr>
-              <a:t>Implementation Overview</a:t>
+              <a:t>Task 3</a:t>
+            </a:r>
+          </a:p>
+          <a:p xmlns:a="http://schemas.openxmlformats.org/drawingml/2006/main">
+            <a:pPr algn="l">
+              <a:lnSpc>
+                <a:spcPct val="92000"/>
+              </a:lnSpc>
+              <a:buNone/>
+              <a:defRPr sz="3000" b="1">
+                <a:solidFill>
+                  <a:srgbClr val="101820"/>
+                </a:solidFill>
+                <a:latin typeface="Arial"/>
+                <a:ea typeface="Arial"/>
+                <a:cs typeface="Arial"/>
+              </a:defRPr>
+            </a:pPr>
+            <a:r>
+              <a:rPr sz="3000" b="1">
+                <a:solidFill>
+                  <a:srgbClr val="101820"/>
+                </a:solidFill>
+                <a:latin typeface="Arial"/>
+                <a:ea typeface="Arial"/>
+                <a:cs typeface="Arial"/>
+              </a:rPr>
+              <a:t>Algorithm Flow Chart</a:t>
             </a:r>
           </a:p>
         </p:txBody>
@@ -12313,19 +13181,19 @@
           <p:cNvPr id="7" name="">
             <a:extLst xmlns:a="http://schemas.openxmlformats.org/drawingml/2006/main">
               <a:ext uri="{FF2B5EF4-FFF2-40B4-BE49-F238E27FC236}">
-                <a16:creationId xmlns:a16="http://schemas.microsoft.com/office/drawing/2014/main" id="{30A115DB-C5F4-49CD-A431-84A5A879067A}"/>
-              </a:ext>
-            </a:extLst>
-          </p:cNvPr>
-          <p:cNvSpPr>
-            <a:spLocks xmlns:a="http://schemas.openxmlformats.org/drawingml/2006/main" noGrp="1"/>
-          </p:cNvSpPr>
-          <p:nvPr/>
-        </p:nvSpPr>
-        <p:spPr>
-          <a:xfrm xmlns:a="http://schemas.openxmlformats.org/drawingml/2006/main">
-            <a:off x="666750" y="2095500"/>
-            <a:ext cx="7429500" cy="323850"/>
+                <a16:creationId xmlns:a16="http://schemas.microsoft.com/office/drawing/2014/main" id="{A509C531-D32A-4220-BB46-2CB740962100}"/>
+              </a:ext>
+            </a:extLst>
+          </p:cNvPr>
+          <p:cNvSpPr>
+            <a:spLocks xmlns:a="http://schemas.openxmlformats.org/drawingml/2006/main" noGrp="1"/>
+          </p:cNvSpPr>
+          <p:nvPr/>
+        </p:nvSpPr>
+        <p:spPr>
+          <a:xfrm xmlns:a="http://schemas.openxmlformats.org/drawingml/2006/main">
+            <a:off x="685800" y="2800350"/>
+            <a:ext cx="4381500" cy="742950"/>
           </a:xfrm>
           <a:prstGeom xmlns:a="http://schemas.openxmlformats.org/drawingml/2006/main" prst="rect">
             <a:avLst/>
@@ -12342,10 +13210,10 @@
           <a:p xmlns:a="http://schemas.openxmlformats.org/drawingml/2006/main">
             <a:pPr algn="l">
               <a:lnSpc>
-                <a:spcPct val="110000"/>
-              </a:lnSpc>
-              <a:buNone/>
-              <a:defRPr sz="1650" b="1">
+                <a:spcPct val="118000"/>
+              </a:lnSpc>
+              <a:buNone/>
+              <a:defRPr sz="1350" b="1">
                 <a:solidFill>
                   <a:srgbClr val="073763"/>
                 </a:solidFill>
@@ -12355,7 +13223,7 @@
               </a:defRPr>
             </a:pPr>
             <a:r>
-              <a:rPr sz="1650" b="1">
+              <a:rPr sz="1350" b="1">
                 <a:solidFill>
                   <a:srgbClr val="073763"/>
                 </a:solidFill>
@@ -12363,7 +13231,7 @@
                 <a:ea typeface="Arial"/>
                 <a:cs typeface="Arial"/>
               </a:rPr>
-              <a:t>The repository is organized for final submission.</a:t>
+              <a:t>The complete GA process: initialization, generation loop, champion saving, final validation, and visualization.</a:t>
             </a:r>
           </a:p>
         </p:txBody>
@@ -12373,821 +13241,60 @@
           <p:cNvPr id="8" name="">
             <a:extLst xmlns:a="http://schemas.openxmlformats.org/drawingml/2006/main">
               <a:ext uri="{FF2B5EF4-FFF2-40B4-BE49-F238E27FC236}">
-                <a16:creationId xmlns:a16="http://schemas.microsoft.com/office/drawing/2014/main" id="{B3A99C73-B91A-4328-B6EF-33345FC4279C}"/>
-              </a:ext>
-            </a:extLst>
-          </p:cNvPr>
-          <p:cNvSpPr>
-            <a:spLocks xmlns:a="http://schemas.openxmlformats.org/drawingml/2006/main" noGrp="1"/>
-          </p:cNvSpPr>
-          <p:nvPr/>
-        </p:nvSpPr>
-        <p:spPr>
-          <a:xfrm xmlns:a="http://schemas.openxmlformats.org/drawingml/2006/main">
-            <a:off x="876300" y="3028950"/>
-            <a:ext cx="2667000" cy="28575"/>
+                <a16:creationId xmlns:a16="http://schemas.microsoft.com/office/drawing/2014/main" id="{21BA1DA0-782B-4D37-9BED-EF854A7A2F0B}"/>
+              </a:ext>
+            </a:extLst>
+          </p:cNvPr>
+          <p:cNvSpPr>
+            <a:spLocks xmlns:a="http://schemas.openxmlformats.org/drawingml/2006/main" noGrp="1"/>
+          </p:cNvSpPr>
+          <p:nvPr/>
+        </p:nvSpPr>
+        <p:spPr>
+          <a:xfrm xmlns:a="http://schemas.openxmlformats.org/drawingml/2006/main">
+            <a:off x="6096000" y="438150"/>
+            <a:ext cx="5429250" cy="5772150"/>
           </a:xfrm>
           <a:prstGeom xmlns:a="http://schemas.openxmlformats.org/drawingml/2006/main" prst="rect">
             <a:avLst/>
           </a:prstGeom>
           <a:solidFill xmlns:a="http://schemas.openxmlformats.org/drawingml/2006/main">
-            <a:srgbClr val="F2B705"/>
+            <a:srgbClr val="F4F7FA"/>
           </a:solidFill>
-          <a:ln xmlns:a="http://schemas.openxmlformats.org/drawingml/2006/main" w="0">
-            <a:noFill/>
-            <a:prstDash val="solid"/>
-          </a:ln>
-        </p:spPr>
-      </p:sp>
-      <p:sp>
-        <p:nvSpPr>
-          <p:cNvPr id="9" name="">
-            <a:extLst xmlns:a="http://schemas.openxmlformats.org/drawingml/2006/main">
-              <a:ext uri="{FF2B5EF4-FFF2-40B4-BE49-F238E27FC236}">
-                <a16:creationId xmlns:a16="http://schemas.microsoft.com/office/drawing/2014/main" id="{CE86D803-C880-4EA8-9DBB-425C90908951}"/>
-              </a:ext>
-            </a:extLst>
-          </p:cNvPr>
-          <p:cNvSpPr>
-            <a:spLocks xmlns:a="http://schemas.openxmlformats.org/drawingml/2006/main" noGrp="1"/>
-          </p:cNvSpPr>
-          <p:nvPr/>
-        </p:nvSpPr>
-        <p:spPr>
-          <a:xfrm xmlns:a="http://schemas.openxmlformats.org/drawingml/2006/main">
-            <a:off x="876300" y="3276600"/>
-            <a:ext cx="2476500" cy="361950"/>
-          </a:xfrm>
-          <a:prstGeom xmlns:a="http://schemas.openxmlformats.org/drawingml/2006/main" prst="rect">
-            <a:avLst/>
-          </a:prstGeom>
-          <a:noFill xmlns:a="http://schemas.openxmlformats.org/drawingml/2006/main"/>
-          <a:ln xmlns:a="http://schemas.openxmlformats.org/drawingml/2006/main" w="0">
-            <a:noFill/>
-            <a:prstDash val="solid"/>
-          </a:ln>
-        </p:spPr>
-        <p:txBody>
-          <a:bodyPr xmlns:a="http://schemas.openxmlformats.org/drawingml/2006/main"/>
-          <a:lstStyle xmlns:a="http://schemas.openxmlformats.org/drawingml/2006/main"/>
-          <a:p xmlns:a="http://schemas.openxmlformats.org/drawingml/2006/main">
-            <a:pPr algn="l">
-              <a:lnSpc>
-                <a:spcPct val="110000"/>
-              </a:lnSpc>
-              <a:buNone/>
-              <a:defRPr sz="2025" b="1">
-                <a:solidFill>
-                  <a:srgbClr val="073763"/>
-                </a:solidFill>
-                <a:latin typeface="Arial"/>
-                <a:ea typeface="Arial"/>
-                <a:cs typeface="Arial"/>
-              </a:defRPr>
-            </a:pPr>
-            <a:r>
-              <a:rPr sz="2025" b="1">
-                <a:solidFill>
-                  <a:srgbClr val="073763"/>
-                </a:solidFill>
-                <a:latin typeface="Arial"/>
-                <a:ea typeface="Arial"/>
-                <a:cs typeface="Arial"/>
-              </a:rPr>
-              <a:t>IMPL</a:t>
-            </a:r>
-          </a:p>
-        </p:txBody>
-      </p:sp>
-      <p:sp>
-        <p:nvSpPr>
-          <p:cNvPr id="10" name="">
-            <a:extLst xmlns:a="http://schemas.openxmlformats.org/drawingml/2006/main">
-              <a:ext uri="{FF2B5EF4-FFF2-40B4-BE49-F238E27FC236}">
-                <a16:creationId xmlns:a16="http://schemas.microsoft.com/office/drawing/2014/main" id="{DD9FF347-F9AB-4035-8701-6946494C1D01}"/>
-              </a:ext>
-            </a:extLst>
-          </p:cNvPr>
-          <p:cNvSpPr>
-            <a:spLocks xmlns:a="http://schemas.openxmlformats.org/drawingml/2006/main" noGrp="1"/>
-          </p:cNvSpPr>
-          <p:nvPr/>
-        </p:nvSpPr>
-        <p:spPr>
-          <a:xfrm xmlns:a="http://schemas.openxmlformats.org/drawingml/2006/main">
-            <a:off x="876300" y="3810000"/>
-            <a:ext cx="2857500" cy="1238250"/>
-          </a:xfrm>
-          <a:prstGeom xmlns:a="http://schemas.openxmlformats.org/drawingml/2006/main" prst="rect">
-            <a:avLst/>
-          </a:prstGeom>
-          <a:noFill xmlns:a="http://schemas.openxmlformats.org/drawingml/2006/main"/>
-          <a:ln xmlns:a="http://schemas.openxmlformats.org/drawingml/2006/main" w="0">
-            <a:noFill/>
-            <a:prstDash val="solid"/>
-          </a:ln>
-        </p:spPr>
-        <p:txBody>
-          <a:bodyPr xmlns:a="http://schemas.openxmlformats.org/drawingml/2006/main"/>
-          <a:lstStyle xmlns:a="http://schemas.openxmlformats.org/drawingml/2006/main"/>
-          <a:p xmlns:a="http://schemas.openxmlformats.org/drawingml/2006/main">
-            <a:pPr algn="l">
-              <a:lnSpc>
-                <a:spcPct val="122000"/>
-              </a:lnSpc>
-              <a:buNone/>
-              <a:defRPr sz="1275" b="0">
-                <a:solidFill>
-                  <a:srgbClr val="101820"/>
-                </a:solidFill>
-                <a:latin typeface="Arial"/>
-                <a:ea typeface="Arial"/>
-                <a:cs typeface="Arial"/>
-              </a:defRPr>
-            </a:pPr>
-            <a:r>
-              <a:rPr sz="1275" b="0">
-                <a:solidFill>
-                  <a:srgbClr val="101820"/>
-                </a:solidFill>
-                <a:latin typeface="Arial"/>
-                <a:ea typeface="Arial"/>
-                <a:cs typeface="Arial"/>
-              </a:rPr>
-              <a:t>mountain_car_ga.py</a:t>
-            </a:r>
-          </a:p>
-          <a:p xmlns:a="http://schemas.openxmlformats.org/drawingml/2006/main">
-            <a:pPr algn="l">
-              <a:lnSpc>
-                <a:spcPct val="122000"/>
-              </a:lnSpc>
-              <a:buNone/>
-              <a:defRPr sz="1275" b="0">
-                <a:solidFill>
-                  <a:srgbClr val="101820"/>
-                </a:solidFill>
-                <a:latin typeface="Arial"/>
-                <a:ea typeface="Arial"/>
-                <a:cs typeface="Arial"/>
-              </a:defRPr>
-            </a:pPr>
-            <a:r>
-              <a:rPr sz="1275" b="0">
-                <a:solidFill>
-                  <a:srgbClr val="101820"/>
-                </a:solidFill>
-                <a:latin typeface="Arial"/>
-                <a:ea typeface="Arial"/>
-                <a:cs typeface="Arial"/>
-              </a:rPr>
-              <a:t>visualize_best_solution.py</a:t>
-            </a:r>
-          </a:p>
-          <a:p xmlns:a="http://schemas.openxmlformats.org/drawingml/2006/main">
-            <a:pPr algn="l">
-              <a:lnSpc>
-                <a:spcPct val="122000"/>
-              </a:lnSpc>
-              <a:buNone/>
-              <a:defRPr sz="1275" b="0">
-                <a:solidFill>
-                  <a:srgbClr val="101820"/>
-                </a:solidFill>
-                <a:latin typeface="Arial"/>
-                <a:ea typeface="Arial"/>
-                <a:cs typeface="Arial"/>
-              </a:defRPr>
-            </a:pPr>
-            <a:r>
-              <a:rPr sz="1275" b="0">
-                <a:solidFill>
-                  <a:srgbClr val="101820"/>
-                </a:solidFill>
-                <a:latin typeface="Arial"/>
-                <a:ea typeface="Arial"/>
-                <a:cs typeface="Arial"/>
-              </a:rPr>
-              <a:t>requirements.txt</a:t>
-            </a:r>
-          </a:p>
-          <a:p xmlns:a="http://schemas.openxmlformats.org/drawingml/2006/main">
-            <a:pPr algn="l">
-              <a:lnSpc>
-                <a:spcPct val="122000"/>
-              </a:lnSpc>
-              <a:buNone/>
-              <a:defRPr sz="1275" b="0">
-                <a:solidFill>
-                  <a:srgbClr val="101820"/>
-                </a:solidFill>
-                <a:latin typeface="Arial"/>
-                <a:ea typeface="Arial"/>
-                <a:cs typeface="Arial"/>
-              </a:defRPr>
-            </a:pPr>
-            <a:r>
-              <a:rPr sz="1275" b="0">
-                <a:solidFill>
-                  <a:srgbClr val="101820"/>
-                </a:solidFill>
-                <a:latin typeface="Arial"/>
-                <a:ea typeface="Arial"/>
-                <a:cs typeface="Arial"/>
-              </a:rPr>
-              <a:t>README.md</a:t>
-            </a:r>
-          </a:p>
-        </p:txBody>
-      </p:sp>
-      <p:sp>
-        <p:nvSpPr>
-          <p:cNvPr id="11" name="">
-            <a:extLst xmlns:a="http://schemas.openxmlformats.org/drawingml/2006/main">
-              <a:ext uri="{FF2B5EF4-FFF2-40B4-BE49-F238E27FC236}">
-                <a16:creationId xmlns:a16="http://schemas.microsoft.com/office/drawing/2014/main" id="{FAA515B2-816F-4481-8B28-AC135134D2DE}"/>
-              </a:ext>
-            </a:extLst>
-          </p:cNvPr>
-          <p:cNvSpPr>
-            <a:spLocks xmlns:a="http://schemas.openxmlformats.org/drawingml/2006/main" noGrp="1"/>
-          </p:cNvSpPr>
-          <p:nvPr/>
-        </p:nvSpPr>
-        <p:spPr>
-          <a:xfrm xmlns:a="http://schemas.openxmlformats.org/drawingml/2006/main">
-            <a:off x="4591050" y="3028950"/>
-            <a:ext cx="2667000" cy="28575"/>
-          </a:xfrm>
-          <a:prstGeom xmlns:a="http://schemas.openxmlformats.org/drawingml/2006/main" prst="rect">
-            <a:avLst/>
-          </a:prstGeom>
-          <a:solidFill xmlns:a="http://schemas.openxmlformats.org/drawingml/2006/main">
-            <a:srgbClr val="F2B705"/>
-          </a:solidFill>
-          <a:ln xmlns:a="http://schemas.openxmlformats.org/drawingml/2006/main" w="0">
-            <a:noFill/>
-            <a:prstDash val="solid"/>
-          </a:ln>
-        </p:spPr>
-      </p:sp>
-      <p:sp>
-        <p:nvSpPr>
-          <p:cNvPr id="12" name="">
-            <a:extLst xmlns:a="http://schemas.openxmlformats.org/drawingml/2006/main">
-              <a:ext uri="{FF2B5EF4-FFF2-40B4-BE49-F238E27FC236}">
-                <a16:creationId xmlns:a16="http://schemas.microsoft.com/office/drawing/2014/main" id="{147AB2C2-F3C2-4C68-8941-BDB23DCBF3C5}"/>
-              </a:ext>
-            </a:extLst>
-          </p:cNvPr>
-          <p:cNvSpPr>
-            <a:spLocks xmlns:a="http://schemas.openxmlformats.org/drawingml/2006/main" noGrp="1"/>
-          </p:cNvSpPr>
-          <p:nvPr/>
-        </p:nvSpPr>
-        <p:spPr>
-          <a:xfrm xmlns:a="http://schemas.openxmlformats.org/drawingml/2006/main">
-            <a:off x="4591050" y="3276600"/>
-            <a:ext cx="2476500" cy="361950"/>
-          </a:xfrm>
-          <a:prstGeom xmlns:a="http://schemas.openxmlformats.org/drawingml/2006/main" prst="rect">
-            <a:avLst/>
-          </a:prstGeom>
-          <a:noFill xmlns:a="http://schemas.openxmlformats.org/drawingml/2006/main"/>
-          <a:ln xmlns:a="http://schemas.openxmlformats.org/drawingml/2006/main" w="0">
-            <a:noFill/>
-            <a:prstDash val="solid"/>
-          </a:ln>
-        </p:spPr>
-        <p:txBody>
-          <a:bodyPr xmlns:a="http://schemas.openxmlformats.org/drawingml/2006/main"/>
-          <a:lstStyle xmlns:a="http://schemas.openxmlformats.org/drawingml/2006/main"/>
-          <a:p xmlns:a="http://schemas.openxmlformats.org/drawingml/2006/main">
-            <a:pPr algn="l">
-              <a:lnSpc>
-                <a:spcPct val="110000"/>
-              </a:lnSpc>
-              <a:buNone/>
-              <a:defRPr sz="2025" b="1">
-                <a:solidFill>
-                  <a:srgbClr val="073763"/>
-                </a:solidFill>
-                <a:latin typeface="Arial"/>
-                <a:ea typeface="Arial"/>
-                <a:cs typeface="Arial"/>
-              </a:defRPr>
-            </a:pPr>
-            <a:r>
-              <a:rPr sz="2025" b="1">
-                <a:solidFill>
-                  <a:srgbClr val="073763"/>
-                </a:solidFill>
-                <a:latin typeface="Arial"/>
-                <a:ea typeface="Arial"/>
-                <a:cs typeface="Arial"/>
-              </a:rPr>
-              <a:t>DATA</a:t>
-            </a:r>
-          </a:p>
-        </p:txBody>
-      </p:sp>
-      <p:sp>
-        <p:nvSpPr>
-          <p:cNvPr id="13" name="">
-            <a:extLst xmlns:a="http://schemas.openxmlformats.org/drawingml/2006/main">
-              <a:ext uri="{FF2B5EF4-FFF2-40B4-BE49-F238E27FC236}">
-                <a16:creationId xmlns:a16="http://schemas.microsoft.com/office/drawing/2014/main" id="{00797F38-8D1D-4809-AA19-FED95C1137FE}"/>
-              </a:ext>
-            </a:extLst>
-          </p:cNvPr>
-          <p:cNvSpPr>
-            <a:spLocks xmlns:a="http://schemas.openxmlformats.org/drawingml/2006/main" noGrp="1"/>
-          </p:cNvSpPr>
-          <p:nvPr/>
-        </p:nvSpPr>
-        <p:spPr>
-          <a:xfrm xmlns:a="http://schemas.openxmlformats.org/drawingml/2006/main">
-            <a:off x="4591050" y="3810000"/>
-            <a:ext cx="2857500" cy="1238250"/>
-          </a:xfrm>
-          <a:prstGeom xmlns:a="http://schemas.openxmlformats.org/drawingml/2006/main" prst="rect">
-            <a:avLst/>
-          </a:prstGeom>
-          <a:noFill xmlns:a="http://schemas.openxmlformats.org/drawingml/2006/main"/>
-          <a:ln xmlns:a="http://schemas.openxmlformats.org/drawingml/2006/main" w="0">
-            <a:noFill/>
-            <a:prstDash val="solid"/>
-          </a:ln>
-        </p:spPr>
-        <p:txBody>
-          <a:bodyPr xmlns:a="http://schemas.openxmlformats.org/drawingml/2006/main"/>
-          <a:lstStyle xmlns:a="http://schemas.openxmlformats.org/drawingml/2006/main"/>
-          <a:p xmlns:a="http://schemas.openxmlformats.org/drawingml/2006/main">
-            <a:pPr algn="l">
-              <a:lnSpc>
-                <a:spcPct val="122000"/>
-              </a:lnSpc>
-              <a:buNone/>
-              <a:defRPr sz="1275" b="0">
-                <a:solidFill>
-                  <a:srgbClr val="101820"/>
-                </a:solidFill>
-                <a:latin typeface="Arial"/>
-                <a:ea typeface="Arial"/>
-                <a:cs typeface="Arial"/>
-              </a:defRPr>
-            </a:pPr>
-            <a:r>
-              <a:rPr sz="1275" b="0">
-                <a:solidFill>
-                  <a:srgbClr val="101820"/>
-                </a:solidFill>
-                <a:latin typeface="Arial"/>
-                <a:ea typeface="Arial"/>
-                <a:cs typeface="Arial"/>
-              </a:rPr>
-              <a:t>CSV results</a:t>
-            </a:r>
-          </a:p>
-          <a:p xmlns:a="http://schemas.openxmlformats.org/drawingml/2006/main">
-            <a:pPr algn="l">
-              <a:lnSpc>
-                <a:spcPct val="122000"/>
-              </a:lnSpc>
-              <a:buNone/>
-              <a:defRPr sz="1275" b="0">
-                <a:solidFill>
-                  <a:srgbClr val="101820"/>
-                </a:solidFill>
-                <a:latin typeface="Arial"/>
-                <a:ea typeface="Arial"/>
-                <a:cs typeface="Arial"/>
-              </a:defRPr>
-            </a:pPr>
-            <a:r>
-              <a:rPr sz="1275" b="0">
-                <a:solidFill>
-                  <a:srgbClr val="101820"/>
-                </a:solidFill>
-                <a:latin typeface="Arial"/>
-                <a:ea typeface="Arial"/>
-                <a:cs typeface="Arial"/>
-              </a:rPr>
-              <a:t>training and validation plots</a:t>
-            </a:r>
-          </a:p>
-          <a:p xmlns:a="http://schemas.openxmlformats.org/drawingml/2006/main">
-            <a:pPr algn="l">
-              <a:lnSpc>
-                <a:spcPct val="122000"/>
-              </a:lnSpc>
-              <a:buNone/>
-              <a:defRPr sz="1275" b="0">
-                <a:solidFill>
-                  <a:srgbClr val="101820"/>
-                </a:solidFill>
-                <a:latin typeface="Arial"/>
-                <a:ea typeface="Arial"/>
-                <a:cs typeface="Arial"/>
-              </a:defRPr>
-            </a:pPr>
-            <a:r>
-              <a:rPr sz="1275" b="0">
-                <a:solidFill>
-                  <a:srgbClr val="101820"/>
-                </a:solidFill>
-                <a:latin typeface="Arial"/>
-                <a:ea typeface="Arial"/>
-                <a:cs typeface="Arial"/>
-              </a:rPr>
-              <a:t>best_individual.npy</a:t>
-            </a:r>
-          </a:p>
-          <a:p xmlns:a="http://schemas.openxmlformats.org/drawingml/2006/main">
-            <a:pPr algn="l">
-              <a:lnSpc>
-                <a:spcPct val="122000"/>
-              </a:lnSpc>
-              <a:buNone/>
-              <a:defRPr sz="1275" b="0">
-                <a:solidFill>
-                  <a:srgbClr val="101820"/>
-                </a:solidFill>
-                <a:latin typeface="Arial"/>
-                <a:ea typeface="Arial"/>
-                <a:cs typeface="Arial"/>
-              </a:defRPr>
-            </a:pPr>
-            <a:r>
-              <a:rPr sz="1275" b="0">
-                <a:solidFill>
-                  <a:srgbClr val="101820"/>
-                </a:solidFill>
-                <a:latin typeface="Arial"/>
-                <a:ea typeface="Arial"/>
-                <a:cs typeface="Arial"/>
-              </a:rPr>
-              <a:t>generation champions</a:t>
-            </a:r>
-          </a:p>
-        </p:txBody>
-      </p:sp>
-      <p:sp>
-        <p:nvSpPr>
-          <p:cNvPr id="14" name="">
-            <a:extLst xmlns:a="http://schemas.openxmlformats.org/drawingml/2006/main">
-              <a:ext uri="{FF2B5EF4-FFF2-40B4-BE49-F238E27FC236}">
-                <a16:creationId xmlns:a16="http://schemas.microsoft.com/office/drawing/2014/main" id="{2FA30DE0-9238-4838-A815-E15EBB125B0B}"/>
-              </a:ext>
-            </a:extLst>
-          </p:cNvPr>
-          <p:cNvSpPr>
-            <a:spLocks xmlns:a="http://schemas.openxmlformats.org/drawingml/2006/main" noGrp="1"/>
-          </p:cNvSpPr>
-          <p:nvPr/>
-        </p:nvSpPr>
-        <p:spPr>
-          <a:xfrm xmlns:a="http://schemas.openxmlformats.org/drawingml/2006/main">
-            <a:off x="8305800" y="3028950"/>
-            <a:ext cx="2667000" cy="28575"/>
-          </a:xfrm>
-          <a:prstGeom xmlns:a="http://schemas.openxmlformats.org/drawingml/2006/main" prst="rect">
-            <a:avLst/>
-          </a:prstGeom>
-          <a:solidFill xmlns:a="http://schemas.openxmlformats.org/drawingml/2006/main">
-            <a:srgbClr val="F2B705"/>
-          </a:solidFill>
-          <a:ln xmlns:a="http://schemas.openxmlformats.org/drawingml/2006/main" w="0">
-            <a:noFill/>
-            <a:prstDash val="solid"/>
-          </a:ln>
-        </p:spPr>
-      </p:sp>
-      <p:sp>
-        <p:nvSpPr>
-          <p:cNvPr id="15" name="">
-            <a:extLst xmlns:a="http://schemas.openxmlformats.org/drawingml/2006/main">
-              <a:ext uri="{FF2B5EF4-FFF2-40B4-BE49-F238E27FC236}">
-                <a16:creationId xmlns:a16="http://schemas.microsoft.com/office/drawing/2014/main" id="{E4DBCCDF-1EC3-4E10-A2A4-B444A3D88990}"/>
-              </a:ext>
-            </a:extLst>
-          </p:cNvPr>
-          <p:cNvSpPr>
-            <a:spLocks xmlns:a="http://schemas.openxmlformats.org/drawingml/2006/main" noGrp="1"/>
-          </p:cNvSpPr>
-          <p:nvPr/>
-        </p:nvSpPr>
-        <p:spPr>
-          <a:xfrm xmlns:a="http://schemas.openxmlformats.org/drawingml/2006/main">
-            <a:off x="8305800" y="3276600"/>
-            <a:ext cx="2476500" cy="361950"/>
-          </a:xfrm>
-          <a:prstGeom xmlns:a="http://schemas.openxmlformats.org/drawingml/2006/main" prst="rect">
-            <a:avLst/>
-          </a:prstGeom>
-          <a:noFill xmlns:a="http://schemas.openxmlformats.org/drawingml/2006/main"/>
-          <a:ln xmlns:a="http://schemas.openxmlformats.org/drawingml/2006/main" w="0">
-            <a:noFill/>
-            <a:prstDash val="solid"/>
-          </a:ln>
-        </p:spPr>
-        <p:txBody>
-          <a:bodyPr xmlns:a="http://schemas.openxmlformats.org/drawingml/2006/main"/>
-          <a:lstStyle xmlns:a="http://schemas.openxmlformats.org/drawingml/2006/main"/>
-          <a:p xmlns:a="http://schemas.openxmlformats.org/drawingml/2006/main">
-            <a:pPr algn="l">
-              <a:lnSpc>
-                <a:spcPct val="110000"/>
-              </a:lnSpc>
-              <a:buNone/>
-              <a:defRPr sz="2025" b="1">
-                <a:solidFill>
-                  <a:srgbClr val="073763"/>
-                </a:solidFill>
-                <a:latin typeface="Arial"/>
-                <a:ea typeface="Arial"/>
-                <a:cs typeface="Arial"/>
-              </a:defRPr>
-            </a:pPr>
-            <a:r>
-              <a:rPr sz="2025" b="1">
-                <a:solidFill>
-                  <a:srgbClr val="073763"/>
-                </a:solidFill>
-                <a:latin typeface="Arial"/>
-                <a:ea typeface="Arial"/>
-                <a:cs typeface="Arial"/>
-              </a:rPr>
-              <a:t>DOC</a:t>
-            </a:r>
-          </a:p>
-        </p:txBody>
-      </p:sp>
-      <p:sp>
-        <p:nvSpPr>
-          <p:cNvPr id="16" name="">
-            <a:extLst xmlns:a="http://schemas.openxmlformats.org/drawingml/2006/main">
-              <a:ext uri="{FF2B5EF4-FFF2-40B4-BE49-F238E27FC236}">
-                <a16:creationId xmlns:a16="http://schemas.microsoft.com/office/drawing/2014/main" id="{404E2A50-3D95-487F-AF47-E6C97EC0FFD2}"/>
-              </a:ext>
-            </a:extLst>
-          </p:cNvPr>
-          <p:cNvSpPr>
-            <a:spLocks xmlns:a="http://schemas.openxmlformats.org/drawingml/2006/main" noGrp="1"/>
-          </p:cNvSpPr>
-          <p:nvPr/>
-        </p:nvSpPr>
-        <p:spPr>
-          <a:xfrm xmlns:a="http://schemas.openxmlformats.org/drawingml/2006/main">
-            <a:off x="8305800" y="3810000"/>
-            <a:ext cx="2857500" cy="1238250"/>
-          </a:xfrm>
-          <a:prstGeom xmlns:a="http://schemas.openxmlformats.org/drawingml/2006/main" prst="rect">
-            <a:avLst/>
-          </a:prstGeom>
-          <a:noFill xmlns:a="http://schemas.openxmlformats.org/drawingml/2006/main"/>
-          <a:ln xmlns:a="http://schemas.openxmlformats.org/drawingml/2006/main" w="0">
-            <a:noFill/>
-            <a:prstDash val="solid"/>
-          </a:ln>
-        </p:spPr>
-        <p:txBody>
-          <a:bodyPr xmlns:a="http://schemas.openxmlformats.org/drawingml/2006/main"/>
-          <a:lstStyle xmlns:a="http://schemas.openxmlformats.org/drawingml/2006/main"/>
-          <a:p xmlns:a="http://schemas.openxmlformats.org/drawingml/2006/main">
-            <a:pPr algn="l">
-              <a:lnSpc>
-                <a:spcPct val="122000"/>
-              </a:lnSpc>
-              <a:buNone/>
-              <a:defRPr sz="1275" b="0">
-                <a:solidFill>
-                  <a:srgbClr val="101820"/>
-                </a:solidFill>
-                <a:latin typeface="Arial"/>
-                <a:ea typeface="Arial"/>
-                <a:cs typeface="Arial"/>
-              </a:defRPr>
-            </a:pPr>
-            <a:r>
-              <a:rPr sz="1275" b="0">
-                <a:solidFill>
-                  <a:srgbClr val="101820"/>
-                </a:solidFill>
-                <a:latin typeface="Arial"/>
-                <a:ea typeface="Arial"/>
-                <a:cs typeface="Arial"/>
-              </a:rPr>
-              <a:t>final report</a:t>
-            </a:r>
-          </a:p>
-          <a:p xmlns:a="http://schemas.openxmlformats.org/drawingml/2006/main">
-            <a:pPr algn="l">
-              <a:lnSpc>
-                <a:spcPct val="122000"/>
-              </a:lnSpc>
-              <a:buNone/>
-              <a:defRPr sz="1275" b="0">
-                <a:solidFill>
-                  <a:srgbClr val="101820"/>
-                </a:solidFill>
-                <a:latin typeface="Arial"/>
-                <a:ea typeface="Arial"/>
-                <a:cs typeface="Arial"/>
-              </a:defRPr>
-            </a:pPr>
-            <a:r>
-              <a:rPr sz="1275" b="0">
-                <a:solidFill>
-                  <a:srgbClr val="101820"/>
-                </a:solidFill>
-                <a:latin typeface="Arial"/>
-                <a:ea typeface="Arial"/>
-                <a:cs typeface="Arial"/>
-              </a:rPr>
-              <a:t>task reports</a:t>
-            </a:r>
-          </a:p>
-          <a:p xmlns:a="http://schemas.openxmlformats.org/drawingml/2006/main">
-            <a:pPr algn="l">
-              <a:lnSpc>
-                <a:spcPct val="122000"/>
-              </a:lnSpc>
-              <a:buNone/>
-              <a:defRPr sz="1275" b="0">
-                <a:solidFill>
-                  <a:srgbClr val="101820"/>
-                </a:solidFill>
-                <a:latin typeface="Arial"/>
-                <a:ea typeface="Arial"/>
-                <a:cs typeface="Arial"/>
-              </a:defRPr>
-            </a:pPr>
-            <a:r>
-              <a:rPr sz="1275" b="0">
-                <a:solidFill>
-                  <a:srgbClr val="101820"/>
-                </a:solidFill>
-                <a:latin typeface="Arial"/>
-                <a:ea typeface="Arial"/>
-                <a:cs typeface="Arial"/>
-              </a:rPr>
-              <a:t>algorithm details</a:t>
-            </a:r>
-          </a:p>
-          <a:p xmlns:a="http://schemas.openxmlformats.org/drawingml/2006/main">
-            <a:pPr algn="l">
-              <a:lnSpc>
-                <a:spcPct val="122000"/>
-              </a:lnSpc>
-              <a:buNone/>
-              <a:defRPr sz="1275" b="0">
-                <a:solidFill>
-                  <a:srgbClr val="101820"/>
-                </a:solidFill>
-                <a:latin typeface="Arial"/>
-                <a:ea typeface="Arial"/>
-                <a:cs typeface="Arial"/>
-              </a:defRPr>
-            </a:pPr>
-            <a:r>
-              <a:rPr sz="1275" b="0">
-                <a:solidFill>
-                  <a:srgbClr val="101820"/>
-                </a:solidFill>
-                <a:latin typeface="Arial"/>
-                <a:ea typeface="Arial"/>
-                <a:cs typeface="Arial"/>
-              </a:rPr>
-              <a:t>presentation</a:t>
-            </a:r>
-          </a:p>
-        </p:txBody>
-      </p:sp>
-      <p:sp>
-        <p:nvSpPr>
-          <p:cNvPr id="17" name="">
-            <a:extLst xmlns:a="http://schemas.openxmlformats.org/drawingml/2006/main">
-              <a:ext uri="{FF2B5EF4-FFF2-40B4-BE49-F238E27FC236}">
-                <a16:creationId xmlns:a16="http://schemas.microsoft.com/office/drawing/2014/main" id="{D2A40C47-D6A9-42B1-8C2D-0F236DF8A852}"/>
-              </a:ext>
-            </a:extLst>
-          </p:cNvPr>
-          <p:cNvSpPr>
-            <a:spLocks xmlns:a="http://schemas.openxmlformats.org/drawingml/2006/main" noGrp="1"/>
-          </p:cNvSpPr>
-          <p:nvPr/>
-        </p:nvSpPr>
-        <p:spPr>
-          <a:xfrm xmlns:a="http://schemas.openxmlformats.org/drawingml/2006/main">
-            <a:off x="1047750" y="5524500"/>
-            <a:ext cx="6191250" cy="266700"/>
-          </a:xfrm>
-          <a:prstGeom xmlns:a="http://schemas.openxmlformats.org/drawingml/2006/main" prst="rect">
-            <a:avLst/>
-          </a:prstGeom>
-          <a:noFill xmlns:a="http://schemas.openxmlformats.org/drawingml/2006/main"/>
-          <a:ln xmlns:a="http://schemas.openxmlformats.org/drawingml/2006/main" w="0">
-            <a:noFill/>
-            <a:prstDash val="solid"/>
-          </a:ln>
-        </p:spPr>
-        <p:txBody>
-          <a:bodyPr xmlns:a="http://schemas.openxmlformats.org/drawingml/2006/main"/>
-          <a:lstStyle xmlns:a="http://schemas.openxmlformats.org/drawingml/2006/main"/>
-          <a:p xmlns:a="http://schemas.openxmlformats.org/drawingml/2006/main">
-            <a:pPr algn="l">
-              <a:lnSpc>
-                <a:spcPct val="110000"/>
-              </a:lnSpc>
-              <a:buNone/>
-              <a:defRPr sz="1275" b="1">
-                <a:solidFill>
-                  <a:srgbClr val="101820"/>
-                </a:solidFill>
-                <a:latin typeface="Arial"/>
-                <a:ea typeface="Arial"/>
-                <a:cs typeface="Arial"/>
-              </a:defRPr>
-            </a:pPr>
-            <a:r>
-              <a:rPr sz="1275" b="1">
-                <a:solidFill>
-                  <a:srgbClr val="101820"/>
-                </a:solidFill>
-                <a:latin typeface="Arial"/>
-                <a:ea typeface="Arial"/>
-                <a:cs typeface="Arial"/>
-              </a:rPr>
-              <a:t>Run from project root: python IMPL/mountain_car_ga.py</a:t>
-            </a:r>
-          </a:p>
-        </p:txBody>
-      </p:sp>
-      <p:sp>
-        <p:nvSpPr>
-          <p:cNvPr id="18" name="">
-            <a:extLst xmlns:a="http://schemas.openxmlformats.org/drawingml/2006/main">
-              <a:ext uri="{FF2B5EF4-FFF2-40B4-BE49-F238E27FC236}">
-                <a16:creationId xmlns:a16="http://schemas.microsoft.com/office/drawing/2014/main" id="{7CEA1F62-76C7-4B51-9906-6C2C7D8D031F}"/>
-              </a:ext>
-            </a:extLst>
-          </p:cNvPr>
-          <p:cNvSpPr>
-            <a:spLocks xmlns:a="http://schemas.openxmlformats.org/drawingml/2006/main" noGrp="1"/>
-          </p:cNvSpPr>
-          <p:nvPr/>
-        </p:nvSpPr>
-        <p:spPr>
-          <a:xfrm xmlns:a="http://schemas.openxmlformats.org/drawingml/2006/main">
-            <a:off x="1047750" y="5848350"/>
-            <a:ext cx="6191250" cy="228600"/>
-          </a:xfrm>
-          <a:prstGeom xmlns:a="http://schemas.openxmlformats.org/drawingml/2006/main" prst="rect">
-            <a:avLst/>
-          </a:prstGeom>
-          <a:noFill xmlns:a="http://schemas.openxmlformats.org/drawingml/2006/main"/>
-          <a:ln xmlns:a="http://schemas.openxmlformats.org/drawingml/2006/main" w="0">
-            <a:noFill/>
-            <a:prstDash val="solid"/>
-          </a:ln>
-        </p:spPr>
-        <p:txBody>
-          <a:bodyPr xmlns:a="http://schemas.openxmlformats.org/drawingml/2006/main"/>
-          <a:lstStyle xmlns:a="http://schemas.openxmlformats.org/drawingml/2006/main"/>
-          <a:p xmlns:a="http://schemas.openxmlformats.org/drawingml/2006/main">
-            <a:pPr algn="l">
-              <a:lnSpc>
-                <a:spcPct val="110000"/>
-              </a:lnSpc>
-              <a:buNone/>
-              <a:defRPr sz="1125" b="0">
-                <a:solidFill>
-                  <a:srgbClr val="5F6B7A"/>
-                </a:solidFill>
-                <a:latin typeface="Arial"/>
-                <a:ea typeface="Arial"/>
-                <a:cs typeface="Arial"/>
-              </a:defRPr>
-            </a:pPr>
-            <a:r>
-              <a:rPr sz="1125" b="0">
-                <a:solidFill>
-                  <a:srgbClr val="5F6B7A"/>
-                </a:solidFill>
-                <a:latin typeface="Arial"/>
-                <a:ea typeface="Arial"/>
-                <a:cs typeface="Arial"/>
-              </a:rPr>
-              <a:t>All generated outputs are saved under DATA/.</a:t>
-            </a:r>
-          </a:p>
-        </p:txBody>
-      </p:sp>
+          <a:ln xmlns:a="http://schemas.openxmlformats.org/drawingml/2006/main" w="9525">
+            <a:solidFill>
+              <a:srgbClr val="D7DEE8"/>
+            </a:solidFill>
+            <a:prstDash val="solid"/>
+          </a:ln>
+        </p:spPr>
+      </p:sp>
+      <p:pic>
+        <p:nvPicPr>
+          <p:cNvPr id="18" name=""/>
+          <p:cNvPicPr>
+            <a:picLocks xmlns:a="http://schemas.openxmlformats.org/drawingml/2006/main" noChangeAspect="1"/>
+          </p:cNvPicPr>
+          <p:nvPr/>
+        </p:nvPicPr>
+        <p:blipFill>
+          <a:blip xmlns:r="http://schemas.openxmlformats.org/officeDocument/2006/relationships" xmlns:a="http://schemas.openxmlformats.org/drawingml/2006/main" r:embed="R41a3a6db28a4462b"/>
+          <a:stretch xmlns:a="http://schemas.openxmlformats.org/drawingml/2006/main"/>
+        </p:blipFill>
+        <p:spPr>
+          <a:xfrm xmlns:a="http://schemas.openxmlformats.org/drawingml/2006/main">
+            <a:off x="6257925" y="523875"/>
+            <a:ext cx="5105400" cy="5600700"/>
+          </a:xfrm>
+          <a:prstGeom xmlns:a="http://schemas.openxmlformats.org/drawingml/2006/main" prst="rect">
+            <a:avLst/>
+          </a:prstGeom>
+        </p:spPr>
+      </p:pic>
     </p:spTree>
     <p:extLst>
       <p:ext uri="{BB962C8B-B14F-4D97-AF65-F5344CB8AC3E}">
-        <p14:creationId xmlns:p14="http://schemas.microsoft.com/office/powerpoint/2010/main" val="1296537398"/>
+        <p14:creationId xmlns:p14="http://schemas.microsoft.com/office/powerpoint/2010/main" val="315967407"/>
       </p:ext>
     </p:extLst>
   </p:cSld>
@@ -13218,7 +13325,7 @@
           <p:cNvPr id="1" name="">
             <a:extLst xmlns:a="http://schemas.openxmlformats.org/drawingml/2006/main">
               <a:ext uri="{FF2B5EF4-FFF2-40B4-BE49-F238E27FC236}">
-                <a16:creationId xmlns:a16="http://schemas.microsoft.com/office/drawing/2014/main" id="{999F174B-6F16-4E0E-834D-70A42EE488A3}"/>
+                <a16:creationId xmlns:a16="http://schemas.microsoft.com/office/drawing/2014/main" id="{B2892416-6F09-4C75-97F5-1BBBBA35DB66}"/>
               </a:ext>
             </a:extLst>
           </p:cNvPr>
@@ -13249,7 +13356,7 @@
           <p:cNvPr id="2" name="">
             <a:extLst xmlns:a="http://schemas.openxmlformats.org/drawingml/2006/main">
               <a:ext uri="{FF2B5EF4-FFF2-40B4-BE49-F238E27FC236}">
-                <a16:creationId xmlns:a16="http://schemas.microsoft.com/office/drawing/2014/main" id="{711EB5B7-FAC8-457B-998E-FCC9410F8AF7}"/>
+                <a16:creationId xmlns:a16="http://schemas.microsoft.com/office/drawing/2014/main" id="{CE622C4F-7C10-465C-B2F8-1B4D207B061A}"/>
               </a:ext>
             </a:extLst>
           </p:cNvPr>
@@ -13309,7 +13416,7 @@
           <p:cNvPr id="3" name="">
             <a:extLst xmlns:a="http://schemas.openxmlformats.org/drawingml/2006/main">
               <a:ext uri="{FF2B5EF4-FFF2-40B4-BE49-F238E27FC236}">
-                <a16:creationId xmlns:a16="http://schemas.microsoft.com/office/drawing/2014/main" id="{A30F9FD3-DB6B-47E9-A0A6-431286103763}"/>
+                <a16:creationId xmlns:a16="http://schemas.microsoft.com/office/drawing/2014/main" id="{EAED21C3-C3B9-493B-BF63-208FC7638A37}"/>
               </a:ext>
             </a:extLst>
           </p:cNvPr>
@@ -13369,7 +13476,7 @@
           <p:cNvPr id="4" name="">
             <a:extLst xmlns:a="http://schemas.openxmlformats.org/drawingml/2006/main">
               <a:ext uri="{FF2B5EF4-FFF2-40B4-BE49-F238E27FC236}">
-                <a16:creationId xmlns:a16="http://schemas.microsoft.com/office/drawing/2014/main" id="{F26A75ED-E1F3-4725-A97A-30CDCC5A5C48}"/>
+                <a16:creationId xmlns:a16="http://schemas.microsoft.com/office/drawing/2014/main" id="{B0B0DC85-1175-4886-BD96-7B0999FDDD1C}"/>
               </a:ext>
             </a:extLst>
           </p:cNvPr>
@@ -13419,7 +13526,7 @@
                 <a:ea typeface="Arial"/>
                 <a:cs typeface="Arial"/>
               </a:rPr>
-              <a:t>EXPERIMENTS</a:t>
+              <a:t>REPOSITORY STRUCTURE</a:t>
             </a:r>
           </a:p>
         </p:txBody>
@@ -13429,7 +13536,7 @@
           <p:cNvPr id="5" name="">
             <a:extLst xmlns:a="http://schemas.openxmlformats.org/drawingml/2006/main">
               <a:ext uri="{FF2B5EF4-FFF2-40B4-BE49-F238E27FC236}">
-                <a16:creationId xmlns:a16="http://schemas.microsoft.com/office/drawing/2014/main" id="{D92C727A-8E12-4743-A012-7221CB198B47}"/>
+                <a16:creationId xmlns:a16="http://schemas.microsoft.com/office/drawing/2014/main" id="{102BD9EE-BF97-47A6-9F0B-7690E618400D}"/>
               </a:ext>
             </a:extLst>
           </p:cNvPr>
@@ -13460,7 +13567,7 @@
           <p:cNvPr id="6" name="">
             <a:extLst xmlns:a="http://schemas.openxmlformats.org/drawingml/2006/main">
               <a:ext uri="{FF2B5EF4-FFF2-40B4-BE49-F238E27FC236}">
-                <a16:creationId xmlns:a16="http://schemas.microsoft.com/office/drawing/2014/main" id="{A8E1CCE9-66BE-4D2D-B164-0A2043C1D20E}"/>
+                <a16:creationId xmlns:a16="http://schemas.microsoft.com/office/drawing/2014/main" id="{2B26D8DE-8E20-48D6-910D-0F2CA30457C2}"/>
               </a:ext>
             </a:extLst>
           </p:cNvPr>
@@ -13510,7 +13617,7 @@
                 <a:ea typeface="Arial"/>
                 <a:cs typeface="Arial"/>
               </a:rPr>
-              <a:t>Experiment 1: Training Progress</a:t>
+              <a:t>Implementation Overview</a:t>
             </a:r>
           </a:p>
         </p:txBody>
@@ -13520,19 +13627,19 @@
           <p:cNvPr id="7" name="">
             <a:extLst xmlns:a="http://schemas.openxmlformats.org/drawingml/2006/main">
               <a:ext uri="{FF2B5EF4-FFF2-40B4-BE49-F238E27FC236}">
-                <a16:creationId xmlns:a16="http://schemas.microsoft.com/office/drawing/2014/main" id="{25B01A1E-7177-4355-A9EA-645D11486892}"/>
-              </a:ext>
-            </a:extLst>
-          </p:cNvPr>
-          <p:cNvSpPr>
-            <a:spLocks xmlns:a="http://schemas.openxmlformats.org/drawingml/2006/main" noGrp="1"/>
-          </p:cNvSpPr>
-          <p:nvPr/>
-        </p:nvSpPr>
-        <p:spPr>
-          <a:xfrm xmlns:a="http://schemas.openxmlformats.org/drawingml/2006/main">
-            <a:off x="666750" y="2076450"/>
-            <a:ext cx="7429500" cy="304800"/>
+                <a16:creationId xmlns:a16="http://schemas.microsoft.com/office/drawing/2014/main" id="{30A115DB-C5F4-49CD-A431-84A5A879067A}"/>
+              </a:ext>
+            </a:extLst>
+          </p:cNvPr>
+          <p:cNvSpPr>
+            <a:spLocks xmlns:a="http://schemas.openxmlformats.org/drawingml/2006/main" noGrp="1"/>
+          </p:cNvSpPr>
+          <p:nvPr/>
+        </p:nvSpPr>
+        <p:spPr>
+          <a:xfrm xmlns:a="http://schemas.openxmlformats.org/drawingml/2006/main">
+            <a:off x="666750" y="2095500"/>
+            <a:ext cx="7429500" cy="323850"/>
           </a:xfrm>
           <a:prstGeom xmlns:a="http://schemas.openxmlformats.org/drawingml/2006/main" prst="rect">
             <a:avLst/>
@@ -13570,7 +13677,7 @@
                 <a:ea typeface="Arial"/>
                 <a:cs typeface="Arial"/>
               </a:rPr>
-              <a:t>Fitness improves strongly over generations.</a:t>
+              <a:t>The repository is organized for final submission.</a:t>
             </a:r>
           </a:p>
         </p:txBody>
@@ -13580,127 +13687,275 @@
           <p:cNvPr id="8" name="">
             <a:extLst xmlns:a="http://schemas.openxmlformats.org/drawingml/2006/main">
               <a:ext uri="{FF2B5EF4-FFF2-40B4-BE49-F238E27FC236}">
-                <a16:creationId xmlns:a16="http://schemas.microsoft.com/office/drawing/2014/main" id="{368ACAB8-31B6-4E76-AA75-E7E3B7E67EA6}"/>
-              </a:ext>
-            </a:extLst>
-          </p:cNvPr>
-          <p:cNvSpPr>
-            <a:spLocks xmlns:a="http://schemas.openxmlformats.org/drawingml/2006/main" noGrp="1"/>
-          </p:cNvSpPr>
-          <p:nvPr/>
-        </p:nvSpPr>
-        <p:spPr>
-          <a:xfrm xmlns:a="http://schemas.openxmlformats.org/drawingml/2006/main">
-            <a:off x="685800" y="2667000"/>
-            <a:ext cx="6429375" cy="3381375"/>
+                <a16:creationId xmlns:a16="http://schemas.microsoft.com/office/drawing/2014/main" id="{B3A99C73-B91A-4328-B6EF-33345FC4279C}"/>
+              </a:ext>
+            </a:extLst>
+          </p:cNvPr>
+          <p:cNvSpPr>
+            <a:spLocks xmlns:a="http://schemas.openxmlformats.org/drawingml/2006/main" noGrp="1"/>
+          </p:cNvSpPr>
+          <p:nvPr/>
+        </p:nvSpPr>
+        <p:spPr>
+          <a:xfrm xmlns:a="http://schemas.openxmlformats.org/drawingml/2006/main">
+            <a:off x="876300" y="3028950"/>
+            <a:ext cx="2667000" cy="28575"/>
           </a:xfrm>
           <a:prstGeom xmlns:a="http://schemas.openxmlformats.org/drawingml/2006/main" prst="rect">
             <a:avLst/>
           </a:prstGeom>
           <a:solidFill xmlns:a="http://schemas.openxmlformats.org/drawingml/2006/main">
-            <a:srgbClr val="FFFFFF"/>
+            <a:srgbClr val="F2B705"/>
           </a:solidFill>
-          <a:ln xmlns:a="http://schemas.openxmlformats.org/drawingml/2006/main" w="9525">
-            <a:solidFill>
-              <a:srgbClr val="D7DEE8"/>
-            </a:solidFill>
-            <a:prstDash val="solid"/>
-          </a:ln>
-        </p:spPr>
-      </p:sp>
-      <p:pic>
-        <p:nvPicPr>
-          <p:cNvPr id="29" name=""/>
-          <p:cNvPicPr>
-            <a:picLocks xmlns:a="http://schemas.openxmlformats.org/drawingml/2006/main" noChangeAspect="1"/>
-          </p:cNvPicPr>
-          <p:nvPr/>
-        </p:nvPicPr>
-        <p:blipFill>
-          <a:blip xmlns:r="http://schemas.openxmlformats.org/officeDocument/2006/relationships" xmlns:a="http://schemas.openxmlformats.org/drawingml/2006/main" r:embed="Ra2cef4bb5e86467f"/>
-          <a:stretch xmlns:a="http://schemas.openxmlformats.org/drawingml/2006/main"/>
-        </p:blipFill>
-        <p:spPr>
-          <a:xfrm xmlns:a="http://schemas.openxmlformats.org/drawingml/2006/main">
-            <a:off x="1900238" y="2857500"/>
-            <a:ext cx="4000500" cy="3000375"/>
-          </a:xfrm>
-          <a:prstGeom xmlns:a="http://schemas.openxmlformats.org/drawingml/2006/main" prst="rect">
-            <a:avLst/>
-          </a:prstGeom>
-        </p:spPr>
-      </p:pic>
+          <a:ln xmlns:a="http://schemas.openxmlformats.org/drawingml/2006/main" w="0">
+            <a:noFill/>
+            <a:prstDash val="solid"/>
+          </a:ln>
+        </p:spPr>
+      </p:sp>
+      <p:sp>
+        <p:nvSpPr>
+          <p:cNvPr id="9" name="">
+            <a:extLst xmlns:a="http://schemas.openxmlformats.org/drawingml/2006/main">
+              <a:ext uri="{FF2B5EF4-FFF2-40B4-BE49-F238E27FC236}">
+                <a16:creationId xmlns:a16="http://schemas.microsoft.com/office/drawing/2014/main" id="{CE86D803-C880-4EA8-9DBB-425C90908951}"/>
+              </a:ext>
+            </a:extLst>
+          </p:cNvPr>
+          <p:cNvSpPr>
+            <a:spLocks xmlns:a="http://schemas.openxmlformats.org/drawingml/2006/main" noGrp="1"/>
+          </p:cNvSpPr>
+          <p:nvPr/>
+        </p:nvSpPr>
+        <p:spPr>
+          <a:xfrm xmlns:a="http://schemas.openxmlformats.org/drawingml/2006/main">
+            <a:off x="876300" y="3276600"/>
+            <a:ext cx="2476500" cy="361950"/>
+          </a:xfrm>
+          <a:prstGeom xmlns:a="http://schemas.openxmlformats.org/drawingml/2006/main" prst="rect">
+            <a:avLst/>
+          </a:prstGeom>
+          <a:noFill xmlns:a="http://schemas.openxmlformats.org/drawingml/2006/main"/>
+          <a:ln xmlns:a="http://schemas.openxmlformats.org/drawingml/2006/main" w="0">
+            <a:noFill/>
+            <a:prstDash val="solid"/>
+          </a:ln>
+        </p:spPr>
+        <p:txBody>
+          <a:bodyPr xmlns:a="http://schemas.openxmlformats.org/drawingml/2006/main"/>
+          <a:lstStyle xmlns:a="http://schemas.openxmlformats.org/drawingml/2006/main"/>
+          <a:p xmlns:a="http://schemas.openxmlformats.org/drawingml/2006/main">
+            <a:pPr algn="l">
+              <a:lnSpc>
+                <a:spcPct val="110000"/>
+              </a:lnSpc>
+              <a:buNone/>
+              <a:defRPr sz="2025" b="1">
+                <a:solidFill>
+                  <a:srgbClr val="073763"/>
+                </a:solidFill>
+                <a:latin typeface="Arial"/>
+                <a:ea typeface="Arial"/>
+                <a:cs typeface="Arial"/>
+              </a:defRPr>
+            </a:pPr>
+            <a:r>
+              <a:rPr sz="2025" b="1">
+                <a:solidFill>
+                  <a:srgbClr val="073763"/>
+                </a:solidFill>
+                <a:latin typeface="Arial"/>
+                <a:ea typeface="Arial"/>
+                <a:cs typeface="Arial"/>
+              </a:rPr>
+              <a:t>IMPL</a:t>
+            </a:r>
+          </a:p>
+        </p:txBody>
+      </p:sp>
       <p:sp>
         <p:nvSpPr>
           <p:cNvPr id="10" name="">
             <a:extLst xmlns:a="http://schemas.openxmlformats.org/drawingml/2006/main">
               <a:ext uri="{FF2B5EF4-FFF2-40B4-BE49-F238E27FC236}">
-                <a16:creationId xmlns:a16="http://schemas.microsoft.com/office/drawing/2014/main" id="{22468E99-B291-4DD6-BD7D-ACB099838FEC}"/>
-              </a:ext>
-            </a:extLst>
-          </p:cNvPr>
-          <p:cNvSpPr>
-            <a:spLocks xmlns:a="http://schemas.openxmlformats.org/drawingml/2006/main" noGrp="1"/>
-          </p:cNvSpPr>
-          <p:nvPr/>
-        </p:nvSpPr>
-        <p:spPr>
-          <a:xfrm xmlns:a="http://schemas.openxmlformats.org/drawingml/2006/main">
-            <a:off x="7848600" y="2819400"/>
-            <a:ext cx="2381250" cy="819150"/>
+                <a16:creationId xmlns:a16="http://schemas.microsoft.com/office/drawing/2014/main" id="{DD9FF347-F9AB-4035-8701-6946494C1D01}"/>
+              </a:ext>
+            </a:extLst>
+          </p:cNvPr>
+          <p:cNvSpPr>
+            <a:spLocks xmlns:a="http://schemas.openxmlformats.org/drawingml/2006/main" noGrp="1"/>
+          </p:cNvSpPr>
+          <p:nvPr/>
+        </p:nvSpPr>
+        <p:spPr>
+          <a:xfrm xmlns:a="http://schemas.openxmlformats.org/drawingml/2006/main">
+            <a:off x="876300" y="3810000"/>
+            <a:ext cx="2857500" cy="1238250"/>
+          </a:xfrm>
+          <a:prstGeom xmlns:a="http://schemas.openxmlformats.org/drawingml/2006/main" prst="rect">
+            <a:avLst/>
+          </a:prstGeom>
+          <a:noFill xmlns:a="http://schemas.openxmlformats.org/drawingml/2006/main"/>
+          <a:ln xmlns:a="http://schemas.openxmlformats.org/drawingml/2006/main" w="0">
+            <a:noFill/>
+            <a:prstDash val="solid"/>
+          </a:ln>
+        </p:spPr>
+        <p:txBody>
+          <a:bodyPr xmlns:a="http://schemas.openxmlformats.org/drawingml/2006/main"/>
+          <a:lstStyle xmlns:a="http://schemas.openxmlformats.org/drawingml/2006/main"/>
+          <a:p xmlns:a="http://schemas.openxmlformats.org/drawingml/2006/main">
+            <a:pPr algn="l">
+              <a:lnSpc>
+                <a:spcPct val="135000"/>
+              </a:lnSpc>
+              <a:buNone/>
+              <a:defRPr sz="1200" b="0">
+                <a:solidFill>
+                  <a:srgbClr val="101820"/>
+                </a:solidFill>
+                <a:latin typeface="Arial"/>
+                <a:ea typeface="Arial"/>
+                <a:cs typeface="Arial"/>
+              </a:defRPr>
+            </a:pPr>
+            <a:r>
+              <a:rPr sz="1200" b="0">
+                <a:solidFill>
+                  <a:srgbClr val="101820"/>
+                </a:solidFill>
+                <a:latin typeface="Arial"/>
+                <a:ea typeface="Arial"/>
+                <a:cs typeface="Arial"/>
+              </a:rPr>
+              <a:t>mountain_car_ga.py</a:t>
+            </a:r>
+          </a:p>
+          <a:p xmlns:a="http://schemas.openxmlformats.org/drawingml/2006/main">
+            <a:pPr algn="l">
+              <a:lnSpc>
+                <a:spcPct val="135000"/>
+              </a:lnSpc>
+              <a:buNone/>
+              <a:defRPr sz="1200" b="0">
+                <a:solidFill>
+                  <a:srgbClr val="101820"/>
+                </a:solidFill>
+                <a:latin typeface="Arial"/>
+                <a:ea typeface="Arial"/>
+                <a:cs typeface="Arial"/>
+              </a:defRPr>
+            </a:pPr>
+            <a:r>
+              <a:rPr sz="1200" b="0">
+                <a:solidFill>
+                  <a:srgbClr val="101820"/>
+                </a:solidFill>
+                <a:latin typeface="Arial"/>
+                <a:ea typeface="Arial"/>
+                <a:cs typeface="Arial"/>
+              </a:rPr>
+              <a:t>visualize_best_solution.py</a:t>
+            </a:r>
+          </a:p>
+          <a:p xmlns:a="http://schemas.openxmlformats.org/drawingml/2006/main">
+            <a:pPr algn="l">
+              <a:lnSpc>
+                <a:spcPct val="135000"/>
+              </a:lnSpc>
+              <a:buNone/>
+              <a:defRPr sz="1200" b="0">
+                <a:solidFill>
+                  <a:srgbClr val="101820"/>
+                </a:solidFill>
+                <a:latin typeface="Arial"/>
+                <a:ea typeface="Arial"/>
+                <a:cs typeface="Arial"/>
+              </a:defRPr>
+            </a:pPr>
+            <a:r>
+              <a:rPr sz="1200" b="0">
+                <a:solidFill>
+                  <a:srgbClr val="101820"/>
+                </a:solidFill>
+                <a:latin typeface="Arial"/>
+                <a:ea typeface="Arial"/>
+                <a:cs typeface="Arial"/>
+              </a:rPr>
+              <a:t>requirements.txt</a:t>
+            </a:r>
+          </a:p>
+        </p:txBody>
+      </p:sp>
+      <p:sp>
+        <p:nvSpPr>
+          <p:cNvPr id="11" name="">
+            <a:extLst xmlns:a="http://schemas.openxmlformats.org/drawingml/2006/main">
+              <a:ext uri="{FF2B5EF4-FFF2-40B4-BE49-F238E27FC236}">
+                <a16:creationId xmlns:a16="http://schemas.microsoft.com/office/drawing/2014/main" id="{FAA515B2-816F-4481-8B28-AC135134D2DE}"/>
+              </a:ext>
+            </a:extLst>
+          </p:cNvPr>
+          <p:cNvSpPr>
+            <a:spLocks xmlns:a="http://schemas.openxmlformats.org/drawingml/2006/main" noGrp="1"/>
+          </p:cNvSpPr>
+          <p:nvPr/>
+        </p:nvSpPr>
+        <p:spPr>
+          <a:xfrm xmlns:a="http://schemas.openxmlformats.org/drawingml/2006/main">
+            <a:off x="4591050" y="3028950"/>
+            <a:ext cx="2667000" cy="28575"/>
           </a:xfrm>
           <a:prstGeom xmlns:a="http://schemas.openxmlformats.org/drawingml/2006/main" prst="rect">
             <a:avLst/>
           </a:prstGeom>
           <a:solidFill xmlns:a="http://schemas.openxmlformats.org/drawingml/2006/main">
-            <a:srgbClr val="F4F7FA"/>
+            <a:srgbClr val="F2B705"/>
           </a:solidFill>
-          <a:ln xmlns:a="http://schemas.openxmlformats.org/drawingml/2006/main" w="9525">
-            <a:solidFill>
-              <a:srgbClr val="D7DEE8"/>
-            </a:solidFill>
-            <a:prstDash val="solid"/>
-          </a:ln>
-        </p:spPr>
-      </p:sp>
-      <p:sp>
-        <p:nvSpPr>
-          <p:cNvPr id="11" name="">
-            <a:extLst xmlns:a="http://schemas.openxmlformats.org/drawingml/2006/main">
-              <a:ext uri="{FF2B5EF4-FFF2-40B4-BE49-F238E27FC236}">
-                <a16:creationId xmlns:a16="http://schemas.microsoft.com/office/drawing/2014/main" id="{309149DB-F8F2-48F3-B6B7-0AFAA8291017}"/>
-              </a:ext>
-            </a:extLst>
-          </p:cNvPr>
-          <p:cNvSpPr>
-            <a:spLocks xmlns:a="http://schemas.openxmlformats.org/drawingml/2006/main" noGrp="1"/>
-          </p:cNvSpPr>
-          <p:nvPr/>
-        </p:nvSpPr>
-        <p:spPr>
-          <a:xfrm xmlns:a="http://schemas.openxmlformats.org/drawingml/2006/main">
-            <a:off x="8020050" y="2952750"/>
-            <a:ext cx="2038350" cy="304800"/>
-          </a:xfrm>
-          <a:prstGeom xmlns:a="http://schemas.openxmlformats.org/drawingml/2006/main" prst="rect">
-            <a:avLst/>
-          </a:prstGeom>
-          <a:noFill xmlns:a="http://schemas.openxmlformats.org/drawingml/2006/main"/>
-          <a:ln xmlns:a="http://schemas.openxmlformats.org/drawingml/2006/main" w="0">
-            <a:noFill/>
-            <a:prstDash val="solid"/>
-          </a:ln>
-        </p:spPr>
-        <p:txBody>
-          <a:bodyPr xmlns:a="http://schemas.openxmlformats.org/drawingml/2006/main"/>
-          <a:lstStyle xmlns:a="http://schemas.openxmlformats.org/drawingml/2006/main"/>
-          <a:p xmlns:a="http://schemas.openxmlformats.org/drawingml/2006/main">
-            <a:pPr algn="ctr">
+          <a:ln xmlns:a="http://schemas.openxmlformats.org/drawingml/2006/main" w="0">
+            <a:noFill/>
+            <a:prstDash val="solid"/>
+          </a:ln>
+        </p:spPr>
+      </p:sp>
+      <p:sp>
+        <p:nvSpPr>
+          <p:cNvPr id="12" name="">
+            <a:extLst xmlns:a="http://schemas.openxmlformats.org/drawingml/2006/main">
+              <a:ext uri="{FF2B5EF4-FFF2-40B4-BE49-F238E27FC236}">
+                <a16:creationId xmlns:a16="http://schemas.microsoft.com/office/drawing/2014/main" id="{147AB2C2-F3C2-4C68-8941-BDB23DCBF3C5}"/>
+              </a:ext>
+            </a:extLst>
+          </p:cNvPr>
+          <p:cNvSpPr>
+            <a:spLocks xmlns:a="http://schemas.openxmlformats.org/drawingml/2006/main" noGrp="1"/>
+          </p:cNvSpPr>
+          <p:nvPr/>
+        </p:nvSpPr>
+        <p:spPr>
+          <a:xfrm xmlns:a="http://schemas.openxmlformats.org/drawingml/2006/main">
+            <a:off x="4591050" y="3276600"/>
+            <a:ext cx="2476500" cy="361950"/>
+          </a:xfrm>
+          <a:prstGeom xmlns:a="http://schemas.openxmlformats.org/drawingml/2006/main" prst="rect">
+            <a:avLst/>
+          </a:prstGeom>
+          <a:noFill xmlns:a="http://schemas.openxmlformats.org/drawingml/2006/main"/>
+          <a:ln xmlns:a="http://schemas.openxmlformats.org/drawingml/2006/main" w="0">
+            <a:noFill/>
+            <a:prstDash val="solid"/>
+          </a:ln>
+        </p:spPr>
+        <p:txBody>
+          <a:bodyPr xmlns:a="http://schemas.openxmlformats.org/drawingml/2006/main"/>
+          <a:lstStyle xmlns:a="http://schemas.openxmlformats.org/drawingml/2006/main"/>
+          <a:p xmlns:a="http://schemas.openxmlformats.org/drawingml/2006/main">
+            <a:pPr algn="l">
               <a:lnSpc>
                 <a:spcPct val="110000"/>
               </a:lnSpc>
               <a:buNone/>
-              <a:defRPr sz="1875" b="1">
+              <a:defRPr sz="2025" b="1">
                 <a:solidFill>
                   <a:srgbClr val="073763"/>
                 </a:solidFill>
@@ -13710,7 +13965,7 @@
               </a:defRPr>
             </a:pPr>
             <a:r>
-              <a:rPr sz="1875" b="1">
+              <a:rPr sz="2025" b="1">
                 <a:solidFill>
                   <a:srgbClr val="073763"/>
                 </a:solidFill>
@@ -13718,49 +13973,482 @@
                 <a:ea typeface="Arial"/>
                 <a:cs typeface="Arial"/>
               </a:rPr>
-              <a:t>19.78</a:t>
-            </a:r>
-          </a:p>
-        </p:txBody>
-      </p:sp>
-      <p:sp>
-        <p:nvSpPr>
-          <p:cNvPr id="12" name="">
-            <a:extLst xmlns:a="http://schemas.openxmlformats.org/drawingml/2006/main">
-              <a:ext uri="{FF2B5EF4-FFF2-40B4-BE49-F238E27FC236}">
-                <a16:creationId xmlns:a16="http://schemas.microsoft.com/office/drawing/2014/main" id="{57F8B229-43F0-42FC-A2BF-1253F7FE3D57}"/>
-              </a:ext>
-            </a:extLst>
-          </p:cNvPr>
-          <p:cNvSpPr>
-            <a:spLocks xmlns:a="http://schemas.openxmlformats.org/drawingml/2006/main" noGrp="1"/>
-          </p:cNvSpPr>
-          <p:nvPr/>
-        </p:nvSpPr>
-        <p:spPr>
-          <a:xfrm xmlns:a="http://schemas.openxmlformats.org/drawingml/2006/main">
-            <a:off x="8001000" y="3295650"/>
-            <a:ext cx="2076450" cy="209550"/>
-          </a:xfrm>
-          <a:prstGeom xmlns:a="http://schemas.openxmlformats.org/drawingml/2006/main" prst="rect">
-            <a:avLst/>
-          </a:prstGeom>
-          <a:noFill xmlns:a="http://schemas.openxmlformats.org/drawingml/2006/main"/>
-          <a:ln xmlns:a="http://schemas.openxmlformats.org/drawingml/2006/main" w="0">
-            <a:noFill/>
-            <a:prstDash val="solid"/>
-          </a:ln>
-        </p:spPr>
-        <p:txBody>
-          <a:bodyPr xmlns:a="http://schemas.openxmlformats.org/drawingml/2006/main"/>
-          <a:lstStyle xmlns:a="http://schemas.openxmlformats.org/drawingml/2006/main"/>
-          <a:p xmlns:a="http://schemas.openxmlformats.org/drawingml/2006/main">
-            <a:pPr algn="ctr">
+              <a:t>DATA</a:t>
+            </a:r>
+          </a:p>
+        </p:txBody>
+      </p:sp>
+      <p:sp>
+        <p:nvSpPr>
+          <p:cNvPr id="13" name="">
+            <a:extLst xmlns:a="http://schemas.openxmlformats.org/drawingml/2006/main">
+              <a:ext uri="{FF2B5EF4-FFF2-40B4-BE49-F238E27FC236}">
+                <a16:creationId xmlns:a16="http://schemas.microsoft.com/office/drawing/2014/main" id="{00797F38-8D1D-4809-AA19-FED95C1137FE}"/>
+              </a:ext>
+            </a:extLst>
+          </p:cNvPr>
+          <p:cNvSpPr>
+            <a:spLocks xmlns:a="http://schemas.openxmlformats.org/drawingml/2006/main" noGrp="1"/>
+          </p:cNvSpPr>
+          <p:nvPr/>
+        </p:nvSpPr>
+        <p:spPr>
+          <a:xfrm xmlns:a="http://schemas.openxmlformats.org/drawingml/2006/main">
+            <a:off x="4591050" y="3810000"/>
+            <a:ext cx="2857500" cy="1238250"/>
+          </a:xfrm>
+          <a:prstGeom xmlns:a="http://schemas.openxmlformats.org/drawingml/2006/main" prst="rect">
+            <a:avLst/>
+          </a:prstGeom>
+          <a:noFill xmlns:a="http://schemas.openxmlformats.org/drawingml/2006/main"/>
+          <a:ln xmlns:a="http://schemas.openxmlformats.org/drawingml/2006/main" w="0">
+            <a:noFill/>
+            <a:prstDash val="solid"/>
+          </a:ln>
+        </p:spPr>
+        <p:txBody>
+          <a:bodyPr xmlns:a="http://schemas.openxmlformats.org/drawingml/2006/main"/>
+          <a:lstStyle xmlns:a="http://schemas.openxmlformats.org/drawingml/2006/main"/>
+          <a:p xmlns:a="http://schemas.openxmlformats.org/drawingml/2006/main">
+            <a:pPr algn="l">
+              <a:lnSpc>
+                <a:spcPct val="122000"/>
+              </a:lnSpc>
+              <a:buNone/>
+              <a:defRPr sz="1275" b="0">
+                <a:solidFill>
+                  <a:srgbClr val="101820"/>
+                </a:solidFill>
+                <a:latin typeface="Arial"/>
+                <a:ea typeface="Arial"/>
+                <a:cs typeface="Arial"/>
+              </a:defRPr>
+            </a:pPr>
+            <a:r>
+              <a:rPr sz="1275" b="0">
+                <a:solidFill>
+                  <a:srgbClr val="101820"/>
+                </a:solidFill>
+                <a:latin typeface="Arial"/>
+                <a:ea typeface="Arial"/>
+                <a:cs typeface="Arial"/>
+              </a:rPr>
+              <a:t>CSV results</a:t>
+            </a:r>
+          </a:p>
+          <a:p xmlns:a="http://schemas.openxmlformats.org/drawingml/2006/main">
+            <a:pPr algn="l">
+              <a:lnSpc>
+                <a:spcPct val="122000"/>
+              </a:lnSpc>
+              <a:buNone/>
+              <a:defRPr sz="1275" b="0">
+                <a:solidFill>
+                  <a:srgbClr val="101820"/>
+                </a:solidFill>
+                <a:latin typeface="Arial"/>
+                <a:ea typeface="Arial"/>
+                <a:cs typeface="Arial"/>
+              </a:defRPr>
+            </a:pPr>
+            <a:r>
+              <a:rPr sz="1275" b="0">
+                <a:solidFill>
+                  <a:srgbClr val="101820"/>
+                </a:solidFill>
+                <a:latin typeface="Arial"/>
+                <a:ea typeface="Arial"/>
+                <a:cs typeface="Arial"/>
+              </a:rPr>
+              <a:t>training and validation plots</a:t>
+            </a:r>
+          </a:p>
+          <a:p xmlns:a="http://schemas.openxmlformats.org/drawingml/2006/main">
+            <a:pPr algn="l">
+              <a:lnSpc>
+                <a:spcPct val="122000"/>
+              </a:lnSpc>
+              <a:buNone/>
+              <a:defRPr sz="1275" b="0">
+                <a:solidFill>
+                  <a:srgbClr val="101820"/>
+                </a:solidFill>
+                <a:latin typeface="Arial"/>
+                <a:ea typeface="Arial"/>
+                <a:cs typeface="Arial"/>
+              </a:defRPr>
+            </a:pPr>
+            <a:r>
+              <a:rPr sz="1275" b="0">
+                <a:solidFill>
+                  <a:srgbClr val="101820"/>
+                </a:solidFill>
+                <a:latin typeface="Arial"/>
+                <a:ea typeface="Arial"/>
+                <a:cs typeface="Arial"/>
+              </a:rPr>
+              <a:t>best_individual.npy</a:t>
+            </a:r>
+          </a:p>
+          <a:p xmlns:a="http://schemas.openxmlformats.org/drawingml/2006/main">
+            <a:pPr algn="l">
+              <a:lnSpc>
+                <a:spcPct val="122000"/>
+              </a:lnSpc>
+              <a:buNone/>
+              <a:defRPr sz="1275" b="0">
+                <a:solidFill>
+                  <a:srgbClr val="101820"/>
+                </a:solidFill>
+                <a:latin typeface="Arial"/>
+                <a:ea typeface="Arial"/>
+                <a:cs typeface="Arial"/>
+              </a:defRPr>
+            </a:pPr>
+            <a:r>
+              <a:rPr sz="1275" b="0">
+                <a:solidFill>
+                  <a:srgbClr val="101820"/>
+                </a:solidFill>
+                <a:latin typeface="Arial"/>
+                <a:ea typeface="Arial"/>
+                <a:cs typeface="Arial"/>
+              </a:rPr>
+              <a:t>generation champions</a:t>
+            </a:r>
+          </a:p>
+        </p:txBody>
+      </p:sp>
+      <p:sp>
+        <p:nvSpPr>
+          <p:cNvPr id="14" name="">
+            <a:extLst xmlns:a="http://schemas.openxmlformats.org/drawingml/2006/main">
+              <a:ext uri="{FF2B5EF4-FFF2-40B4-BE49-F238E27FC236}">
+                <a16:creationId xmlns:a16="http://schemas.microsoft.com/office/drawing/2014/main" id="{2FA30DE0-9238-4838-A815-E15EBB125B0B}"/>
+              </a:ext>
+            </a:extLst>
+          </p:cNvPr>
+          <p:cNvSpPr>
+            <a:spLocks xmlns:a="http://schemas.openxmlformats.org/drawingml/2006/main" noGrp="1"/>
+          </p:cNvSpPr>
+          <p:nvPr/>
+        </p:nvSpPr>
+        <p:spPr>
+          <a:xfrm xmlns:a="http://schemas.openxmlformats.org/drawingml/2006/main">
+            <a:off x="8305800" y="3028950"/>
+            <a:ext cx="2667000" cy="28575"/>
+          </a:xfrm>
+          <a:prstGeom xmlns:a="http://schemas.openxmlformats.org/drawingml/2006/main" prst="rect">
+            <a:avLst/>
+          </a:prstGeom>
+          <a:solidFill xmlns:a="http://schemas.openxmlformats.org/drawingml/2006/main">
+            <a:srgbClr val="F2B705"/>
+          </a:solidFill>
+          <a:ln xmlns:a="http://schemas.openxmlformats.org/drawingml/2006/main" w="0">
+            <a:noFill/>
+            <a:prstDash val="solid"/>
+          </a:ln>
+        </p:spPr>
+      </p:sp>
+      <p:sp>
+        <p:nvSpPr>
+          <p:cNvPr id="15" name="">
+            <a:extLst xmlns:a="http://schemas.openxmlformats.org/drawingml/2006/main">
+              <a:ext uri="{FF2B5EF4-FFF2-40B4-BE49-F238E27FC236}">
+                <a16:creationId xmlns:a16="http://schemas.microsoft.com/office/drawing/2014/main" id="{E4DBCCDF-1EC3-4E10-A2A4-B444A3D88990}"/>
+              </a:ext>
+            </a:extLst>
+          </p:cNvPr>
+          <p:cNvSpPr>
+            <a:spLocks xmlns:a="http://schemas.openxmlformats.org/drawingml/2006/main" noGrp="1"/>
+          </p:cNvSpPr>
+          <p:nvPr/>
+        </p:nvSpPr>
+        <p:spPr>
+          <a:xfrm xmlns:a="http://schemas.openxmlformats.org/drawingml/2006/main">
+            <a:off x="8305800" y="3276600"/>
+            <a:ext cx="2476500" cy="361950"/>
+          </a:xfrm>
+          <a:prstGeom xmlns:a="http://schemas.openxmlformats.org/drawingml/2006/main" prst="rect">
+            <a:avLst/>
+          </a:prstGeom>
+          <a:noFill xmlns:a="http://schemas.openxmlformats.org/drawingml/2006/main"/>
+          <a:ln xmlns:a="http://schemas.openxmlformats.org/drawingml/2006/main" w="0">
+            <a:noFill/>
+            <a:prstDash val="solid"/>
+          </a:ln>
+        </p:spPr>
+        <p:txBody>
+          <a:bodyPr xmlns:a="http://schemas.openxmlformats.org/drawingml/2006/main"/>
+          <a:lstStyle xmlns:a="http://schemas.openxmlformats.org/drawingml/2006/main"/>
+          <a:p xmlns:a="http://schemas.openxmlformats.org/drawingml/2006/main">
+            <a:pPr algn="l">
               <a:lnSpc>
                 <a:spcPct val="110000"/>
               </a:lnSpc>
               <a:buNone/>
-              <a:defRPr sz="900" b="1">
+              <a:defRPr sz="2025" b="1">
+                <a:solidFill>
+                  <a:srgbClr val="073763"/>
+                </a:solidFill>
+                <a:latin typeface="Arial"/>
+                <a:ea typeface="Arial"/>
+                <a:cs typeface="Arial"/>
+              </a:defRPr>
+            </a:pPr>
+            <a:r>
+              <a:rPr sz="2025" b="1">
+                <a:solidFill>
+                  <a:srgbClr val="073763"/>
+                </a:solidFill>
+                <a:latin typeface="Arial"/>
+                <a:ea typeface="Arial"/>
+                <a:cs typeface="Arial"/>
+              </a:rPr>
+              <a:t>DOC</a:t>
+            </a:r>
+          </a:p>
+        </p:txBody>
+      </p:sp>
+      <p:sp>
+        <p:nvSpPr>
+          <p:cNvPr id="16" name="">
+            <a:extLst xmlns:a="http://schemas.openxmlformats.org/drawingml/2006/main">
+              <a:ext uri="{FF2B5EF4-FFF2-40B4-BE49-F238E27FC236}">
+                <a16:creationId xmlns:a16="http://schemas.microsoft.com/office/drawing/2014/main" id="{404E2A50-3D95-487F-AF47-E6C97EC0FFD2}"/>
+              </a:ext>
+            </a:extLst>
+          </p:cNvPr>
+          <p:cNvSpPr>
+            <a:spLocks xmlns:a="http://schemas.openxmlformats.org/drawingml/2006/main" noGrp="1"/>
+          </p:cNvSpPr>
+          <p:nvPr/>
+        </p:nvSpPr>
+        <p:spPr>
+          <a:xfrm xmlns:a="http://schemas.openxmlformats.org/drawingml/2006/main">
+            <a:off x="8305800" y="3810000"/>
+            <a:ext cx="2857500" cy="1238250"/>
+          </a:xfrm>
+          <a:prstGeom xmlns:a="http://schemas.openxmlformats.org/drawingml/2006/main" prst="rect">
+            <a:avLst/>
+          </a:prstGeom>
+          <a:noFill xmlns:a="http://schemas.openxmlformats.org/drawingml/2006/main"/>
+          <a:ln xmlns:a="http://schemas.openxmlformats.org/drawingml/2006/main" w="0">
+            <a:noFill/>
+            <a:prstDash val="solid"/>
+          </a:ln>
+        </p:spPr>
+        <p:txBody>
+          <a:bodyPr xmlns:a="http://schemas.openxmlformats.org/drawingml/2006/main"/>
+          <a:lstStyle xmlns:a="http://schemas.openxmlformats.org/drawingml/2006/main"/>
+          <a:p xmlns:a="http://schemas.openxmlformats.org/drawingml/2006/main">
+            <a:pPr algn="l">
+              <a:lnSpc>
+                <a:spcPct val="122000"/>
+              </a:lnSpc>
+              <a:buNone/>
+              <a:defRPr sz="1275" b="0">
+                <a:solidFill>
+                  <a:srgbClr val="101820"/>
+                </a:solidFill>
+                <a:latin typeface="Arial"/>
+                <a:ea typeface="Arial"/>
+                <a:cs typeface="Arial"/>
+              </a:defRPr>
+            </a:pPr>
+            <a:r>
+              <a:rPr sz="1275" b="0">
+                <a:solidFill>
+                  <a:srgbClr val="101820"/>
+                </a:solidFill>
+                <a:latin typeface="Arial"/>
+                <a:ea typeface="Arial"/>
+                <a:cs typeface="Arial"/>
+              </a:rPr>
+              <a:t>final report</a:t>
+            </a:r>
+          </a:p>
+          <a:p xmlns:a="http://schemas.openxmlformats.org/drawingml/2006/main">
+            <a:pPr algn="l">
+              <a:lnSpc>
+                <a:spcPct val="122000"/>
+              </a:lnSpc>
+              <a:buNone/>
+              <a:defRPr sz="1275" b="0">
+                <a:solidFill>
+                  <a:srgbClr val="101820"/>
+                </a:solidFill>
+                <a:latin typeface="Arial"/>
+                <a:ea typeface="Arial"/>
+                <a:cs typeface="Arial"/>
+              </a:defRPr>
+            </a:pPr>
+            <a:r>
+              <a:rPr sz="1275" b="0">
+                <a:solidFill>
+                  <a:srgbClr val="101820"/>
+                </a:solidFill>
+                <a:latin typeface="Arial"/>
+                <a:ea typeface="Arial"/>
+                <a:cs typeface="Arial"/>
+              </a:rPr>
+              <a:t>task reports</a:t>
+            </a:r>
+          </a:p>
+          <a:p xmlns:a="http://schemas.openxmlformats.org/drawingml/2006/main">
+            <a:pPr algn="l">
+              <a:lnSpc>
+                <a:spcPct val="122000"/>
+              </a:lnSpc>
+              <a:buNone/>
+              <a:defRPr sz="1275" b="0">
+                <a:solidFill>
+                  <a:srgbClr val="101820"/>
+                </a:solidFill>
+                <a:latin typeface="Arial"/>
+                <a:ea typeface="Arial"/>
+                <a:cs typeface="Arial"/>
+              </a:defRPr>
+            </a:pPr>
+            <a:r>
+              <a:rPr sz="1275" b="0">
+                <a:solidFill>
+                  <a:srgbClr val="101820"/>
+                </a:solidFill>
+                <a:latin typeface="Arial"/>
+                <a:ea typeface="Arial"/>
+                <a:cs typeface="Arial"/>
+              </a:rPr>
+              <a:t>algorithm details</a:t>
+            </a:r>
+          </a:p>
+          <a:p xmlns:a="http://schemas.openxmlformats.org/drawingml/2006/main">
+            <a:pPr algn="l">
+              <a:lnSpc>
+                <a:spcPct val="122000"/>
+              </a:lnSpc>
+              <a:buNone/>
+              <a:defRPr sz="1275" b="0">
+                <a:solidFill>
+                  <a:srgbClr val="101820"/>
+                </a:solidFill>
+                <a:latin typeface="Arial"/>
+                <a:ea typeface="Arial"/>
+                <a:cs typeface="Arial"/>
+              </a:defRPr>
+            </a:pPr>
+            <a:r>
+              <a:rPr sz="1275" b="0">
+                <a:solidFill>
+                  <a:srgbClr val="101820"/>
+                </a:solidFill>
+                <a:latin typeface="Arial"/>
+                <a:ea typeface="Arial"/>
+                <a:cs typeface="Arial"/>
+              </a:rPr>
+              <a:t>presentation</a:t>
+            </a:r>
+          </a:p>
+        </p:txBody>
+      </p:sp>
+      <p:sp>
+        <p:nvSpPr>
+          <p:cNvPr id="17" name="">
+            <a:extLst xmlns:a="http://schemas.openxmlformats.org/drawingml/2006/main">
+              <a:ext uri="{FF2B5EF4-FFF2-40B4-BE49-F238E27FC236}">
+                <a16:creationId xmlns:a16="http://schemas.microsoft.com/office/drawing/2014/main" id="{D2A40C47-D6A9-42B1-8C2D-0F236DF8A852}"/>
+              </a:ext>
+            </a:extLst>
+          </p:cNvPr>
+          <p:cNvSpPr>
+            <a:spLocks xmlns:a="http://schemas.openxmlformats.org/drawingml/2006/main" noGrp="1"/>
+          </p:cNvSpPr>
+          <p:nvPr/>
+        </p:nvSpPr>
+        <p:spPr>
+          <a:xfrm xmlns:a="http://schemas.openxmlformats.org/drawingml/2006/main">
+            <a:off x="1047750" y="5524500"/>
+            <a:ext cx="6191250" cy="266700"/>
+          </a:xfrm>
+          <a:prstGeom xmlns:a="http://schemas.openxmlformats.org/drawingml/2006/main" prst="rect">
+            <a:avLst/>
+          </a:prstGeom>
+          <a:noFill xmlns:a="http://schemas.openxmlformats.org/drawingml/2006/main"/>
+          <a:ln xmlns:a="http://schemas.openxmlformats.org/drawingml/2006/main" w="0">
+            <a:noFill/>
+            <a:prstDash val="solid"/>
+          </a:ln>
+        </p:spPr>
+        <p:txBody>
+          <a:bodyPr xmlns:a="http://schemas.openxmlformats.org/drawingml/2006/main"/>
+          <a:lstStyle xmlns:a="http://schemas.openxmlformats.org/drawingml/2006/main"/>
+          <a:p xmlns:a="http://schemas.openxmlformats.org/drawingml/2006/main">
+            <a:pPr algn="l">
+              <a:lnSpc>
+                <a:spcPct val="110000"/>
+              </a:lnSpc>
+              <a:buNone/>
+              <a:defRPr sz="1275" b="1">
+                <a:solidFill>
+                  <a:srgbClr val="101820"/>
+                </a:solidFill>
+                <a:latin typeface="Arial"/>
+                <a:ea typeface="Arial"/>
+                <a:cs typeface="Arial"/>
+              </a:defRPr>
+            </a:pPr>
+            <a:r>
+              <a:rPr sz="1275" b="1">
+                <a:solidFill>
+                  <a:srgbClr val="101820"/>
+                </a:solidFill>
+                <a:latin typeface="Arial"/>
+                <a:ea typeface="Arial"/>
+                <a:cs typeface="Arial"/>
+              </a:rPr>
+              <a:t>Run from project root: python IMPL/mountain_car_ga.py</a:t>
+            </a:r>
+          </a:p>
+        </p:txBody>
+      </p:sp>
+      <p:sp>
+        <p:nvSpPr>
+          <p:cNvPr id="18" name="">
+            <a:extLst xmlns:a="http://schemas.openxmlformats.org/drawingml/2006/main">
+              <a:ext uri="{FF2B5EF4-FFF2-40B4-BE49-F238E27FC236}">
+                <a16:creationId xmlns:a16="http://schemas.microsoft.com/office/drawing/2014/main" id="{7CEA1F62-76C7-4B51-9906-6C2C7D8D031F}"/>
+              </a:ext>
+            </a:extLst>
+          </p:cNvPr>
+          <p:cNvSpPr>
+            <a:spLocks xmlns:a="http://schemas.openxmlformats.org/drawingml/2006/main" noGrp="1"/>
+          </p:cNvSpPr>
+          <p:nvPr/>
+        </p:nvSpPr>
+        <p:spPr>
+          <a:xfrm xmlns:a="http://schemas.openxmlformats.org/drawingml/2006/main">
+            <a:off x="1047750" y="5848350"/>
+            <a:ext cx="7810500" cy="228600"/>
+          </a:xfrm>
+          <a:prstGeom xmlns:a="http://schemas.openxmlformats.org/drawingml/2006/main" prst="rect">
+            <a:avLst/>
+          </a:prstGeom>
+          <a:noFill xmlns:a="http://schemas.openxmlformats.org/drawingml/2006/main"/>
+          <a:ln xmlns:a="http://schemas.openxmlformats.org/drawingml/2006/main" w="0">
+            <a:noFill/>
+            <a:prstDash val="solid"/>
+          </a:ln>
+        </p:spPr>
+        <p:txBody>
+          <a:bodyPr xmlns:a="http://schemas.openxmlformats.org/drawingml/2006/main"/>
+          <a:lstStyle xmlns:a="http://schemas.openxmlformats.org/drawingml/2006/main"/>
+          <a:p xmlns:a="http://schemas.openxmlformats.org/drawingml/2006/main">
+            <a:pPr algn="l">
+              <a:lnSpc>
+                <a:spcPct val="108000"/>
+              </a:lnSpc>
+              <a:buNone/>
+              <a:defRPr sz="1050" b="0">
                 <a:solidFill>
                   <a:srgbClr val="5F6B7A"/>
                 </a:solidFill>
@@ -13770,7 +14458,7 @@
               </a:defRPr>
             </a:pPr>
             <a:r>
-              <a:rPr sz="900" b="1">
+              <a:rPr sz="1050" b="0">
                 <a:solidFill>
                   <a:srgbClr val="5F6B7A"/>
                 </a:solidFill>
@@ -13778,373 +14466,7 @@
                 <a:ea typeface="Arial"/>
                 <a:cs typeface="Arial"/>
               </a:rPr>
-              <a:t>Gen 1 best</a:t>
-            </a:r>
-          </a:p>
-        </p:txBody>
-      </p:sp>
-      <p:sp>
-        <p:nvSpPr>
-          <p:cNvPr id="13" name="">
-            <a:extLst xmlns:a="http://schemas.openxmlformats.org/drawingml/2006/main">
-              <a:ext uri="{FF2B5EF4-FFF2-40B4-BE49-F238E27FC236}">
-                <a16:creationId xmlns:a16="http://schemas.microsoft.com/office/drawing/2014/main" id="{9765E1B3-D3AE-4B3A-BB92-F2752E903DD3}"/>
-              </a:ext>
-            </a:extLst>
-          </p:cNvPr>
-          <p:cNvSpPr>
-            <a:spLocks xmlns:a="http://schemas.openxmlformats.org/drawingml/2006/main" noGrp="1"/>
-          </p:cNvSpPr>
-          <p:nvPr/>
-        </p:nvSpPr>
-        <p:spPr>
-          <a:xfrm xmlns:a="http://schemas.openxmlformats.org/drawingml/2006/main">
-            <a:off x="7848600" y="3848100"/>
-            <a:ext cx="2381250" cy="819150"/>
-          </a:xfrm>
-          <a:prstGeom xmlns:a="http://schemas.openxmlformats.org/drawingml/2006/main" prst="rect">
-            <a:avLst/>
-          </a:prstGeom>
-          <a:solidFill xmlns:a="http://schemas.openxmlformats.org/drawingml/2006/main">
-            <a:srgbClr val="F4F7FA"/>
-          </a:solidFill>
-          <a:ln xmlns:a="http://schemas.openxmlformats.org/drawingml/2006/main" w="9525">
-            <a:solidFill>
-              <a:srgbClr val="D7DEE8"/>
-            </a:solidFill>
-            <a:prstDash val="solid"/>
-          </a:ln>
-        </p:spPr>
-      </p:sp>
-      <p:sp>
-        <p:nvSpPr>
-          <p:cNvPr id="14" name="">
-            <a:extLst xmlns:a="http://schemas.openxmlformats.org/drawingml/2006/main">
-              <a:ext uri="{FF2B5EF4-FFF2-40B4-BE49-F238E27FC236}">
-                <a16:creationId xmlns:a16="http://schemas.microsoft.com/office/drawing/2014/main" id="{78DB7EA7-F9FD-4CDC-B066-BAC4D0593B2A}"/>
-              </a:ext>
-            </a:extLst>
-          </p:cNvPr>
-          <p:cNvSpPr>
-            <a:spLocks xmlns:a="http://schemas.openxmlformats.org/drawingml/2006/main" noGrp="1"/>
-          </p:cNvSpPr>
-          <p:nvPr/>
-        </p:nvSpPr>
-        <p:spPr>
-          <a:xfrm xmlns:a="http://schemas.openxmlformats.org/drawingml/2006/main">
-            <a:off x="8020050" y="3981450"/>
-            <a:ext cx="2038350" cy="304800"/>
-          </a:xfrm>
-          <a:prstGeom xmlns:a="http://schemas.openxmlformats.org/drawingml/2006/main" prst="rect">
-            <a:avLst/>
-          </a:prstGeom>
-          <a:noFill xmlns:a="http://schemas.openxmlformats.org/drawingml/2006/main"/>
-          <a:ln xmlns:a="http://schemas.openxmlformats.org/drawingml/2006/main" w="0">
-            <a:noFill/>
-            <a:prstDash val="solid"/>
-          </a:ln>
-        </p:spPr>
-        <p:txBody>
-          <a:bodyPr xmlns:a="http://schemas.openxmlformats.org/drawingml/2006/main"/>
-          <a:lstStyle xmlns:a="http://schemas.openxmlformats.org/drawingml/2006/main"/>
-          <a:p xmlns:a="http://schemas.openxmlformats.org/drawingml/2006/main">
-            <a:pPr algn="ctr">
-              <a:lnSpc>
-                <a:spcPct val="110000"/>
-              </a:lnSpc>
-              <a:buNone/>
-              <a:defRPr sz="1875" b="1">
-                <a:solidFill>
-                  <a:srgbClr val="073763"/>
-                </a:solidFill>
-                <a:latin typeface="Arial"/>
-                <a:ea typeface="Arial"/>
-                <a:cs typeface="Arial"/>
-              </a:defRPr>
-            </a:pPr>
-            <a:r>
-              <a:rPr sz="1875" b="1">
-                <a:solidFill>
-                  <a:srgbClr val="073763"/>
-                </a:solidFill>
-                <a:latin typeface="Arial"/>
-                <a:ea typeface="Arial"/>
-                <a:cs typeface="Arial"/>
-              </a:rPr>
-              <a:t>574.67</a:t>
-            </a:r>
-          </a:p>
-        </p:txBody>
-      </p:sp>
-      <p:sp>
-        <p:nvSpPr>
-          <p:cNvPr id="15" name="">
-            <a:extLst xmlns:a="http://schemas.openxmlformats.org/drawingml/2006/main">
-              <a:ext uri="{FF2B5EF4-FFF2-40B4-BE49-F238E27FC236}">
-                <a16:creationId xmlns:a16="http://schemas.microsoft.com/office/drawing/2014/main" id="{A52A1D3A-7A25-4C70-83A0-62CDAAF7E87A}"/>
-              </a:ext>
-            </a:extLst>
-          </p:cNvPr>
-          <p:cNvSpPr>
-            <a:spLocks xmlns:a="http://schemas.openxmlformats.org/drawingml/2006/main" noGrp="1"/>
-          </p:cNvSpPr>
-          <p:nvPr/>
-        </p:nvSpPr>
-        <p:spPr>
-          <a:xfrm xmlns:a="http://schemas.openxmlformats.org/drawingml/2006/main">
-            <a:off x="8001000" y="4324350"/>
-            <a:ext cx="2076450" cy="209550"/>
-          </a:xfrm>
-          <a:prstGeom xmlns:a="http://schemas.openxmlformats.org/drawingml/2006/main" prst="rect">
-            <a:avLst/>
-          </a:prstGeom>
-          <a:noFill xmlns:a="http://schemas.openxmlformats.org/drawingml/2006/main"/>
-          <a:ln xmlns:a="http://schemas.openxmlformats.org/drawingml/2006/main" w="0">
-            <a:noFill/>
-            <a:prstDash val="solid"/>
-          </a:ln>
-        </p:spPr>
-        <p:txBody>
-          <a:bodyPr xmlns:a="http://schemas.openxmlformats.org/drawingml/2006/main"/>
-          <a:lstStyle xmlns:a="http://schemas.openxmlformats.org/drawingml/2006/main"/>
-          <a:p xmlns:a="http://schemas.openxmlformats.org/drawingml/2006/main">
-            <a:pPr algn="ctr">
-              <a:lnSpc>
-                <a:spcPct val="110000"/>
-              </a:lnSpc>
-              <a:buNone/>
-              <a:defRPr sz="900" b="1">
-                <a:solidFill>
-                  <a:srgbClr val="5F6B7A"/>
-                </a:solidFill>
-                <a:latin typeface="Arial"/>
-                <a:ea typeface="Arial"/>
-                <a:cs typeface="Arial"/>
-              </a:defRPr>
-            </a:pPr>
-            <a:r>
-              <a:rPr sz="900" b="1">
-                <a:solidFill>
-                  <a:srgbClr val="5F6B7A"/>
-                </a:solidFill>
-                <a:latin typeface="Arial"/>
-                <a:ea typeface="Arial"/>
-                <a:cs typeface="Arial"/>
-              </a:rPr>
-              <a:t>Gen 56 best</a:t>
-            </a:r>
-          </a:p>
-        </p:txBody>
-      </p:sp>
-      <p:sp>
-        <p:nvSpPr>
-          <p:cNvPr id="16" name="">
-            <a:extLst xmlns:a="http://schemas.openxmlformats.org/drawingml/2006/main">
-              <a:ext uri="{FF2B5EF4-FFF2-40B4-BE49-F238E27FC236}">
-                <a16:creationId xmlns:a16="http://schemas.microsoft.com/office/drawing/2014/main" id="{5F55B0B3-254B-472B-9127-41CA976213D6}"/>
-              </a:ext>
-            </a:extLst>
-          </p:cNvPr>
-          <p:cNvSpPr>
-            <a:spLocks xmlns:a="http://schemas.openxmlformats.org/drawingml/2006/main" noGrp="1"/>
-          </p:cNvSpPr>
-          <p:nvPr/>
-        </p:nvSpPr>
-        <p:spPr>
-          <a:xfrm xmlns:a="http://schemas.openxmlformats.org/drawingml/2006/main">
-            <a:off x="7848600" y="4876800"/>
-            <a:ext cx="2381250" cy="819150"/>
-          </a:xfrm>
-          <a:prstGeom xmlns:a="http://schemas.openxmlformats.org/drawingml/2006/main" prst="rect">
-            <a:avLst/>
-          </a:prstGeom>
-          <a:solidFill xmlns:a="http://schemas.openxmlformats.org/drawingml/2006/main">
-            <a:srgbClr val="F4F7FA"/>
-          </a:solidFill>
-          <a:ln xmlns:a="http://schemas.openxmlformats.org/drawingml/2006/main" w="9525">
-            <a:solidFill>
-              <a:srgbClr val="D7DEE8"/>
-            </a:solidFill>
-            <a:prstDash val="solid"/>
-          </a:ln>
-        </p:spPr>
-      </p:sp>
-      <p:sp>
-        <p:nvSpPr>
-          <p:cNvPr id="17" name="">
-            <a:extLst xmlns:a="http://schemas.openxmlformats.org/drawingml/2006/main">
-              <a:ext uri="{FF2B5EF4-FFF2-40B4-BE49-F238E27FC236}">
-                <a16:creationId xmlns:a16="http://schemas.microsoft.com/office/drawing/2014/main" id="{FA31BFD9-0F39-48F5-B539-7A9F5CA67082}"/>
-              </a:ext>
-            </a:extLst>
-          </p:cNvPr>
-          <p:cNvSpPr>
-            <a:spLocks xmlns:a="http://schemas.openxmlformats.org/drawingml/2006/main" noGrp="1"/>
-          </p:cNvSpPr>
-          <p:nvPr/>
-        </p:nvSpPr>
-        <p:spPr>
-          <a:xfrm xmlns:a="http://schemas.openxmlformats.org/drawingml/2006/main">
-            <a:off x="8020050" y="5010150"/>
-            <a:ext cx="2038350" cy="304800"/>
-          </a:xfrm>
-          <a:prstGeom xmlns:a="http://schemas.openxmlformats.org/drawingml/2006/main" prst="rect">
-            <a:avLst/>
-          </a:prstGeom>
-          <a:noFill xmlns:a="http://schemas.openxmlformats.org/drawingml/2006/main"/>
-          <a:ln xmlns:a="http://schemas.openxmlformats.org/drawingml/2006/main" w="0">
-            <a:noFill/>
-            <a:prstDash val="solid"/>
-          </a:ln>
-        </p:spPr>
-        <p:txBody>
-          <a:bodyPr xmlns:a="http://schemas.openxmlformats.org/drawingml/2006/main"/>
-          <a:lstStyle xmlns:a="http://schemas.openxmlformats.org/drawingml/2006/main"/>
-          <a:p xmlns:a="http://schemas.openxmlformats.org/drawingml/2006/main">
-            <a:pPr algn="ctr">
-              <a:lnSpc>
-                <a:spcPct val="110000"/>
-              </a:lnSpc>
-              <a:buNone/>
-              <a:defRPr sz="1875" b="1">
-                <a:solidFill>
-                  <a:srgbClr val="073763"/>
-                </a:solidFill>
-                <a:latin typeface="Arial"/>
-                <a:ea typeface="Arial"/>
-                <a:cs typeface="Arial"/>
-              </a:defRPr>
-            </a:pPr>
-            <a:r>
-              <a:rPr sz="1875" b="1">
-                <a:solidFill>
-                  <a:srgbClr val="073763"/>
-                </a:solidFill>
-                <a:latin typeface="Arial"/>
-                <a:ea typeface="Arial"/>
-                <a:cs typeface="Arial"/>
-              </a:rPr>
-              <a:t>572.00</a:t>
-            </a:r>
-          </a:p>
-        </p:txBody>
-      </p:sp>
-      <p:sp>
-        <p:nvSpPr>
-          <p:cNvPr id="18" name="">
-            <a:extLst xmlns:a="http://schemas.openxmlformats.org/drawingml/2006/main">
-              <a:ext uri="{FF2B5EF4-FFF2-40B4-BE49-F238E27FC236}">
-                <a16:creationId xmlns:a16="http://schemas.microsoft.com/office/drawing/2014/main" id="{4518DED1-CB56-422F-908F-89273EC823DA}"/>
-              </a:ext>
-            </a:extLst>
-          </p:cNvPr>
-          <p:cNvSpPr>
-            <a:spLocks xmlns:a="http://schemas.openxmlformats.org/drawingml/2006/main" noGrp="1"/>
-          </p:cNvSpPr>
-          <p:nvPr/>
-        </p:nvSpPr>
-        <p:spPr>
-          <a:xfrm xmlns:a="http://schemas.openxmlformats.org/drawingml/2006/main">
-            <a:off x="8001000" y="5353050"/>
-            <a:ext cx="2076450" cy="209550"/>
-          </a:xfrm>
-          <a:prstGeom xmlns:a="http://schemas.openxmlformats.org/drawingml/2006/main" prst="rect">
-            <a:avLst/>
-          </a:prstGeom>
-          <a:noFill xmlns:a="http://schemas.openxmlformats.org/drawingml/2006/main"/>
-          <a:ln xmlns:a="http://schemas.openxmlformats.org/drawingml/2006/main" w="0">
-            <a:noFill/>
-            <a:prstDash val="solid"/>
-          </a:ln>
-        </p:spPr>
-        <p:txBody>
-          <a:bodyPr xmlns:a="http://schemas.openxmlformats.org/drawingml/2006/main"/>
-          <a:lstStyle xmlns:a="http://schemas.openxmlformats.org/drawingml/2006/main"/>
-          <a:p xmlns:a="http://schemas.openxmlformats.org/drawingml/2006/main">
-            <a:pPr algn="ctr">
-              <a:lnSpc>
-                <a:spcPct val="110000"/>
-              </a:lnSpc>
-              <a:buNone/>
-              <a:defRPr sz="900" b="1">
-                <a:solidFill>
-                  <a:srgbClr val="5F6B7A"/>
-                </a:solidFill>
-                <a:latin typeface="Arial"/>
-                <a:ea typeface="Arial"/>
-                <a:cs typeface="Arial"/>
-              </a:defRPr>
-            </a:pPr>
-            <a:r>
-              <a:rPr sz="900" b="1">
-                <a:solidFill>
-                  <a:srgbClr val="5F6B7A"/>
-                </a:solidFill>
-                <a:latin typeface="Arial"/>
-                <a:ea typeface="Arial"/>
-                <a:cs typeface="Arial"/>
-              </a:rPr>
-              <a:t>Gen 60 best</a:t>
-            </a:r>
-          </a:p>
-        </p:txBody>
-      </p:sp>
-      <p:sp>
-        <p:nvSpPr>
-          <p:cNvPr id="19" name="">
-            <a:extLst xmlns:a="http://schemas.openxmlformats.org/drawingml/2006/main">
-              <a:ext uri="{FF2B5EF4-FFF2-40B4-BE49-F238E27FC236}">
-                <a16:creationId xmlns:a16="http://schemas.microsoft.com/office/drawing/2014/main" id="{F2010A94-9CCC-4342-911F-93B07FAEAC57}"/>
-              </a:ext>
-            </a:extLst>
-          </p:cNvPr>
-          <p:cNvSpPr>
-            <a:spLocks xmlns:a="http://schemas.openxmlformats.org/drawingml/2006/main" noGrp="1"/>
-          </p:cNvSpPr>
-          <p:nvPr/>
-        </p:nvSpPr>
-        <p:spPr>
-          <a:xfrm xmlns:a="http://schemas.openxmlformats.org/drawingml/2006/main">
-            <a:off x="7524750" y="5848350"/>
-            <a:ext cx="3143250" cy="400050"/>
-          </a:xfrm>
-          <a:prstGeom xmlns:a="http://schemas.openxmlformats.org/drawingml/2006/main" prst="rect">
-            <a:avLst/>
-          </a:prstGeom>
-          <a:noFill xmlns:a="http://schemas.openxmlformats.org/drawingml/2006/main"/>
-          <a:ln xmlns:a="http://schemas.openxmlformats.org/drawingml/2006/main" w="0">
-            <a:noFill/>
-            <a:prstDash val="solid"/>
-          </a:ln>
-        </p:spPr>
-        <p:txBody>
-          <a:bodyPr xmlns:a="http://schemas.openxmlformats.org/drawingml/2006/main"/>
-          <a:lstStyle xmlns:a="http://schemas.openxmlformats.org/drawingml/2006/main"/>
-          <a:p xmlns:a="http://schemas.openxmlformats.org/drawingml/2006/main">
-            <a:pPr algn="ctr">
-              <a:lnSpc>
-                <a:spcPct val="110000"/>
-              </a:lnSpc>
-              <a:buNone/>
-              <a:defRPr sz="975" b="1">
-                <a:solidFill>
-                  <a:srgbClr val="5F6B7A"/>
-                </a:solidFill>
-                <a:latin typeface="Arial"/>
-                <a:ea typeface="Arial"/>
-                <a:cs typeface="Arial"/>
-              </a:defRPr>
-            </a:pPr>
-            <a:r>
-              <a:rPr sz="975" b="1">
-                <a:solidFill>
-                  <a:srgbClr val="5F6B7A"/>
-                </a:solidFill>
-                <a:latin typeface="Arial"/>
-                <a:ea typeface="Arial"/>
-                <a:cs typeface="Arial"/>
-              </a:rPr>
-              <a:t>Gen 56 is training-best; Gen 55 is validation-best because validation uses fixed seeds.</a:t>
+              <a:t>README.md is kept at the project root; generated outputs are saved under DATA/.</a:t>
             </a:r>
           </a:p>
         </p:txBody>
@@ -14152,7 +14474,7 @@
     </p:spTree>
     <p:extLst>
       <p:ext uri="{BB962C8B-B14F-4D97-AF65-F5344CB8AC3E}">
-        <p14:creationId xmlns:p14="http://schemas.microsoft.com/office/powerpoint/2010/main" val="776301702"/>
+        <p14:creationId xmlns:p14="http://schemas.microsoft.com/office/powerpoint/2010/main" val="1296537398"/>
       </p:ext>
     </p:extLst>
   </p:cSld>
@@ -14183,7 +14505,7 @@
           <p:cNvPr id="1" name="">
             <a:extLst xmlns:a="http://schemas.openxmlformats.org/drawingml/2006/main">
               <a:ext uri="{FF2B5EF4-FFF2-40B4-BE49-F238E27FC236}">
-                <a16:creationId xmlns:a16="http://schemas.microsoft.com/office/drawing/2014/main" id="{52B683D1-8435-4833-91BA-B6771448C957}"/>
+                <a16:creationId xmlns:a16="http://schemas.microsoft.com/office/drawing/2014/main" id="{999F174B-6F16-4E0E-834D-70A42EE488A3}"/>
               </a:ext>
             </a:extLst>
           </p:cNvPr>
@@ -14214,7 +14536,7 @@
           <p:cNvPr id="2" name="">
             <a:extLst xmlns:a="http://schemas.openxmlformats.org/drawingml/2006/main">
               <a:ext uri="{FF2B5EF4-FFF2-40B4-BE49-F238E27FC236}">
-                <a16:creationId xmlns:a16="http://schemas.microsoft.com/office/drawing/2014/main" id="{450E4865-5B0D-40A4-98E6-9A3C6DB0ECC5}"/>
+                <a16:creationId xmlns:a16="http://schemas.microsoft.com/office/drawing/2014/main" id="{711EB5B7-FAC8-457B-998E-FCC9410F8AF7}"/>
               </a:ext>
             </a:extLst>
           </p:cNvPr>
@@ -14274,7 +14596,7 @@
           <p:cNvPr id="3" name="">
             <a:extLst xmlns:a="http://schemas.openxmlformats.org/drawingml/2006/main">
               <a:ext uri="{FF2B5EF4-FFF2-40B4-BE49-F238E27FC236}">
-                <a16:creationId xmlns:a16="http://schemas.microsoft.com/office/drawing/2014/main" id="{4FA79CE5-5ACD-45A7-AA1F-B45FF3090BC6}"/>
+                <a16:creationId xmlns:a16="http://schemas.microsoft.com/office/drawing/2014/main" id="{A30F9FD3-DB6B-47E9-A0A6-431286103763}"/>
               </a:ext>
             </a:extLst>
           </p:cNvPr>
@@ -14334,7 +14656,7 @@
           <p:cNvPr id="4" name="">
             <a:extLst xmlns:a="http://schemas.openxmlformats.org/drawingml/2006/main">
               <a:ext uri="{FF2B5EF4-FFF2-40B4-BE49-F238E27FC236}">
-                <a16:creationId xmlns:a16="http://schemas.microsoft.com/office/drawing/2014/main" id="{DF6C63E4-21BA-4265-8FF8-F6C82CF848F6}"/>
+                <a16:creationId xmlns:a16="http://schemas.microsoft.com/office/drawing/2014/main" id="{F26A75ED-E1F3-4725-A97A-30CDCC5A5C48}"/>
               </a:ext>
             </a:extLst>
           </p:cNvPr>
@@ -14384,7 +14706,7 @@
                 <a:ea typeface="Arial"/>
                 <a:cs typeface="Arial"/>
               </a:rPr>
-              <a:t>VALIDATION</a:t>
+              <a:t>EXPERIMENTS</a:t>
             </a:r>
           </a:p>
         </p:txBody>
@@ -14394,7 +14716,7 @@
           <p:cNvPr id="5" name="">
             <a:extLst xmlns:a="http://schemas.openxmlformats.org/drawingml/2006/main">
               <a:ext uri="{FF2B5EF4-FFF2-40B4-BE49-F238E27FC236}">
-                <a16:creationId xmlns:a16="http://schemas.microsoft.com/office/drawing/2014/main" id="{A5A22EAD-ECC9-4F92-9B5C-D900B387E438}"/>
+                <a16:creationId xmlns:a16="http://schemas.microsoft.com/office/drawing/2014/main" id="{D92C727A-8E12-4743-A012-7221CB198B47}"/>
               </a:ext>
             </a:extLst>
           </p:cNvPr>
@@ -14425,7 +14747,7 @@
           <p:cNvPr id="6" name="">
             <a:extLst xmlns:a="http://schemas.openxmlformats.org/drawingml/2006/main">
               <a:ext uri="{FF2B5EF4-FFF2-40B4-BE49-F238E27FC236}">
-                <a16:creationId xmlns:a16="http://schemas.microsoft.com/office/drawing/2014/main" id="{07F74510-4CD3-48D1-9E38-9BFB471977D8}"/>
+                <a16:creationId xmlns:a16="http://schemas.microsoft.com/office/drawing/2014/main" id="{A8E1CCE9-66BE-4D2D-B164-0A2043C1D20E}"/>
               </a:ext>
             </a:extLst>
           </p:cNvPr>
@@ -14475,7 +14797,7 @@
                 <a:ea typeface="Arial"/>
                 <a:cs typeface="Arial"/>
               </a:rPr>
-              <a:t>Experiment 2: Champion Comparison</a:t>
+              <a:t>Experiment 1: Training Progress</a:t>
             </a:r>
           </a:p>
         </p:txBody>
@@ -14485,7 +14807,7 @@
           <p:cNvPr id="7" name="">
             <a:extLst xmlns:a="http://schemas.openxmlformats.org/drawingml/2006/main">
               <a:ext uri="{FF2B5EF4-FFF2-40B4-BE49-F238E27FC236}">
-                <a16:creationId xmlns:a16="http://schemas.microsoft.com/office/drawing/2014/main" id="{1440976C-715E-450E-B308-916F699AF73B}"/>
+                <a16:creationId xmlns:a16="http://schemas.microsoft.com/office/drawing/2014/main" id="{25B01A1E-7177-4355-A9EA-645D11486892}"/>
               </a:ext>
             </a:extLst>
           </p:cNvPr>
@@ -14497,7 +14819,7 @@
         <p:spPr>
           <a:xfrm xmlns:a="http://schemas.openxmlformats.org/drawingml/2006/main">
             <a:off x="666750" y="2076450"/>
-            <a:ext cx="8572500" cy="304800"/>
+            <a:ext cx="7429500" cy="304800"/>
           </a:xfrm>
           <a:prstGeom xmlns:a="http://schemas.openxmlformats.org/drawingml/2006/main" prst="rect">
             <a:avLst/>
@@ -14517,7 +14839,7 @@
                 <a:spcPct val="110000"/>
               </a:lnSpc>
               <a:buNone/>
-              <a:defRPr sz="1575" b="1">
+              <a:defRPr sz="1650" b="1">
                 <a:solidFill>
                   <a:srgbClr val="073763"/>
                 </a:solidFill>
@@ -14527,7 +14849,7 @@
               </a:defRPr>
             </a:pPr>
             <a:r>
-              <a:rPr sz="1575" b="1">
+              <a:rPr sz="1650" b="1">
                 <a:solidFill>
                   <a:srgbClr val="073763"/>
                 </a:solidFill>
@@ -14535,7 +14857,7 @@
                 <a:ea typeface="Arial"/>
                 <a:cs typeface="Arial"/>
               </a:rPr>
-              <a:t>Each generation best policy is re-tested using the same validation seeds.</a:t>
+              <a:t>Fitness improves strongly over generations.</a:t>
             </a:r>
           </a:p>
         </p:txBody>
@@ -14545,19 +14867,19 @@
           <p:cNvPr id="8" name="">
             <a:extLst xmlns:a="http://schemas.openxmlformats.org/drawingml/2006/main">
               <a:ext uri="{FF2B5EF4-FFF2-40B4-BE49-F238E27FC236}">
-                <a16:creationId xmlns:a16="http://schemas.microsoft.com/office/drawing/2014/main" id="{55F66687-2A80-4960-9402-520648C5AAA7}"/>
-              </a:ext>
-            </a:extLst>
-          </p:cNvPr>
-          <p:cNvSpPr>
-            <a:spLocks xmlns:a="http://schemas.openxmlformats.org/drawingml/2006/main" noGrp="1"/>
-          </p:cNvSpPr>
-          <p:nvPr/>
-        </p:nvSpPr>
-        <p:spPr>
-          <a:xfrm xmlns:a="http://schemas.openxmlformats.org/drawingml/2006/main">
-            <a:off x="666750" y="2647950"/>
-            <a:ext cx="4857750" cy="2400300"/>
+                <a16:creationId xmlns:a16="http://schemas.microsoft.com/office/drawing/2014/main" id="{368ACAB8-31B6-4E76-AA75-E7E3B7E67EA6}"/>
+              </a:ext>
+            </a:extLst>
+          </p:cNvPr>
+          <p:cNvSpPr>
+            <a:spLocks xmlns:a="http://schemas.openxmlformats.org/drawingml/2006/main" noGrp="1"/>
+          </p:cNvSpPr>
+          <p:nvPr/>
+        </p:nvSpPr>
+        <p:spPr>
+          <a:xfrm xmlns:a="http://schemas.openxmlformats.org/drawingml/2006/main">
+            <a:off x="685800" y="2667000"/>
+            <a:ext cx="6429375" cy="3381375"/>
           </a:xfrm>
           <a:prstGeom xmlns:a="http://schemas.openxmlformats.org/drawingml/2006/main" prst="rect">
             <a:avLst/>
@@ -14575,20 +14897,20 @@
       </p:sp>
       <p:pic>
         <p:nvPicPr>
-          <p:cNvPr id="28" name=""/>
+          <p:cNvPr id="29" name=""/>
           <p:cNvPicPr>
             <a:picLocks xmlns:a="http://schemas.openxmlformats.org/drawingml/2006/main" noChangeAspect="1"/>
           </p:cNvPicPr>
           <p:nvPr/>
         </p:nvPicPr>
         <p:blipFill>
-          <a:blip xmlns:r="http://schemas.openxmlformats.org/officeDocument/2006/relationships" xmlns:a="http://schemas.openxmlformats.org/drawingml/2006/main" r:embed="Rc9964c3553504f48"/>
+          <a:blip xmlns:r="http://schemas.openxmlformats.org/officeDocument/2006/relationships" xmlns:a="http://schemas.openxmlformats.org/drawingml/2006/main" r:embed="R0620d4b3788b45c7"/>
           <a:stretch xmlns:a="http://schemas.openxmlformats.org/drawingml/2006/main"/>
         </p:blipFill>
         <p:spPr>
           <a:xfrm xmlns:a="http://schemas.openxmlformats.org/drawingml/2006/main">
-            <a:off x="962025" y="2781300"/>
-            <a:ext cx="4267200" cy="2133600"/>
+            <a:off x="1900238" y="2857500"/>
+            <a:ext cx="4000500" cy="3000375"/>
           </a:xfrm>
           <a:prstGeom xmlns:a="http://schemas.openxmlformats.org/drawingml/2006/main" prst="rect">
             <a:avLst/>
@@ -14600,25 +14922,25 @@
           <p:cNvPr id="10" name="">
             <a:extLst xmlns:a="http://schemas.openxmlformats.org/drawingml/2006/main">
               <a:ext uri="{FF2B5EF4-FFF2-40B4-BE49-F238E27FC236}">
-                <a16:creationId xmlns:a16="http://schemas.microsoft.com/office/drawing/2014/main" id="{F0D231BC-7F65-4B9E-A2B1-C47A50539461}"/>
-              </a:ext>
-            </a:extLst>
-          </p:cNvPr>
-          <p:cNvSpPr>
-            <a:spLocks xmlns:a="http://schemas.openxmlformats.org/drawingml/2006/main" noGrp="1"/>
-          </p:cNvSpPr>
-          <p:nvPr/>
-        </p:nvSpPr>
-        <p:spPr>
-          <a:xfrm xmlns:a="http://schemas.openxmlformats.org/drawingml/2006/main">
-            <a:off x="6000750" y="2647950"/>
-            <a:ext cx="4857750" cy="2400300"/>
+                <a16:creationId xmlns:a16="http://schemas.microsoft.com/office/drawing/2014/main" id="{22468E99-B291-4DD6-BD7D-ACB099838FEC}"/>
+              </a:ext>
+            </a:extLst>
+          </p:cNvPr>
+          <p:cNvSpPr>
+            <a:spLocks xmlns:a="http://schemas.openxmlformats.org/drawingml/2006/main" noGrp="1"/>
+          </p:cNvSpPr>
+          <p:nvPr/>
+        </p:nvSpPr>
+        <p:spPr>
+          <a:xfrm xmlns:a="http://schemas.openxmlformats.org/drawingml/2006/main">
+            <a:off x="7848600" y="2819400"/>
+            <a:ext cx="2381250" cy="819150"/>
           </a:xfrm>
           <a:prstGeom xmlns:a="http://schemas.openxmlformats.org/drawingml/2006/main" prst="rect">
             <a:avLst/>
           </a:prstGeom>
           <a:solidFill xmlns:a="http://schemas.openxmlformats.org/drawingml/2006/main">
-            <a:srgbClr val="FFFFFF"/>
+            <a:srgbClr val="F4F7FA"/>
           </a:solidFill>
           <a:ln xmlns:a="http://schemas.openxmlformats.org/drawingml/2006/main" w="9525">
             <a:solidFill>
@@ -14628,237 +14950,308 @@
           </a:ln>
         </p:spPr>
       </p:sp>
-      <p:pic>
-        <p:nvPicPr>
-          <p:cNvPr id="30" name=""/>
-          <p:cNvPicPr>
-            <a:picLocks xmlns:a="http://schemas.openxmlformats.org/drawingml/2006/main" noChangeAspect="1"/>
-          </p:cNvPicPr>
-          <p:nvPr/>
-        </p:nvPicPr>
-        <p:blipFill>
-          <a:blip xmlns:r="http://schemas.openxmlformats.org/officeDocument/2006/relationships" xmlns:a="http://schemas.openxmlformats.org/drawingml/2006/main" r:embed="R26eaacdbc8504593"/>
-          <a:stretch xmlns:a="http://schemas.openxmlformats.org/drawingml/2006/main"/>
-        </p:blipFill>
-        <p:spPr>
-          <a:xfrm xmlns:a="http://schemas.openxmlformats.org/drawingml/2006/main">
-            <a:off x="6296025" y="2781300"/>
-            <a:ext cx="4267200" cy="2133600"/>
-          </a:xfrm>
-          <a:prstGeom xmlns:a="http://schemas.openxmlformats.org/drawingml/2006/main" prst="rect">
-            <a:avLst/>
-          </a:prstGeom>
-        </p:spPr>
-      </p:pic>
+      <p:sp>
+        <p:nvSpPr>
+          <p:cNvPr id="11" name="">
+            <a:extLst xmlns:a="http://schemas.openxmlformats.org/drawingml/2006/main">
+              <a:ext uri="{FF2B5EF4-FFF2-40B4-BE49-F238E27FC236}">
+                <a16:creationId xmlns:a16="http://schemas.microsoft.com/office/drawing/2014/main" id="{309149DB-F8F2-48F3-B6B7-0AFAA8291017}"/>
+              </a:ext>
+            </a:extLst>
+          </p:cNvPr>
+          <p:cNvSpPr>
+            <a:spLocks xmlns:a="http://schemas.openxmlformats.org/drawingml/2006/main" noGrp="1"/>
+          </p:cNvSpPr>
+          <p:nvPr/>
+        </p:nvSpPr>
+        <p:spPr>
+          <a:xfrm xmlns:a="http://schemas.openxmlformats.org/drawingml/2006/main">
+            <a:off x="8020050" y="2952750"/>
+            <a:ext cx="2038350" cy="304800"/>
+          </a:xfrm>
+          <a:prstGeom xmlns:a="http://schemas.openxmlformats.org/drawingml/2006/main" prst="rect">
+            <a:avLst/>
+          </a:prstGeom>
+          <a:noFill xmlns:a="http://schemas.openxmlformats.org/drawingml/2006/main"/>
+          <a:ln xmlns:a="http://schemas.openxmlformats.org/drawingml/2006/main" w="0">
+            <a:noFill/>
+            <a:prstDash val="solid"/>
+          </a:ln>
+        </p:spPr>
+        <p:txBody>
+          <a:bodyPr xmlns:a="http://schemas.openxmlformats.org/drawingml/2006/main"/>
+          <a:lstStyle xmlns:a="http://schemas.openxmlformats.org/drawingml/2006/main"/>
+          <a:p xmlns:a="http://schemas.openxmlformats.org/drawingml/2006/main">
+            <a:pPr algn="ctr">
+              <a:lnSpc>
+                <a:spcPct val="110000"/>
+              </a:lnSpc>
+              <a:buNone/>
+              <a:defRPr sz="1875" b="1">
+                <a:solidFill>
+                  <a:srgbClr val="073763"/>
+                </a:solidFill>
+                <a:latin typeface="Arial"/>
+                <a:ea typeface="Arial"/>
+                <a:cs typeface="Arial"/>
+              </a:defRPr>
+            </a:pPr>
+            <a:r>
+              <a:rPr sz="1875" b="1">
+                <a:solidFill>
+                  <a:srgbClr val="073763"/>
+                </a:solidFill>
+                <a:latin typeface="Arial"/>
+                <a:ea typeface="Arial"/>
+                <a:cs typeface="Arial"/>
+              </a:rPr>
+              <a:t>19.78</a:t>
+            </a:r>
+          </a:p>
+        </p:txBody>
+      </p:sp>
       <p:sp>
         <p:nvSpPr>
           <p:cNvPr id="12" name="">
             <a:extLst xmlns:a="http://schemas.openxmlformats.org/drawingml/2006/main">
               <a:ext uri="{FF2B5EF4-FFF2-40B4-BE49-F238E27FC236}">
-                <a16:creationId xmlns:a16="http://schemas.microsoft.com/office/drawing/2014/main" id="{67BDDCEA-5096-49B0-AE3E-C5F4FDD71783}"/>
-              </a:ext>
-            </a:extLst>
-          </p:cNvPr>
-          <p:cNvSpPr>
-            <a:spLocks xmlns:a="http://schemas.openxmlformats.org/drawingml/2006/main" noGrp="1"/>
-          </p:cNvSpPr>
-          <p:nvPr/>
-        </p:nvSpPr>
-        <p:spPr>
-          <a:xfrm xmlns:a="http://schemas.openxmlformats.org/drawingml/2006/main">
-            <a:off x="1524000" y="5410200"/>
-            <a:ext cx="85725" cy="85725"/>
+                <a16:creationId xmlns:a16="http://schemas.microsoft.com/office/drawing/2014/main" id="{57F8B229-43F0-42FC-A2BF-1253F7FE3D57}"/>
+              </a:ext>
+            </a:extLst>
+          </p:cNvPr>
+          <p:cNvSpPr>
+            <a:spLocks xmlns:a="http://schemas.openxmlformats.org/drawingml/2006/main" noGrp="1"/>
+          </p:cNvSpPr>
+          <p:nvPr/>
+        </p:nvSpPr>
+        <p:spPr>
+          <a:xfrm xmlns:a="http://schemas.openxmlformats.org/drawingml/2006/main">
+            <a:off x="8001000" y="3295650"/>
+            <a:ext cx="2076450" cy="209550"/>
+          </a:xfrm>
+          <a:prstGeom xmlns:a="http://schemas.openxmlformats.org/drawingml/2006/main" prst="rect">
+            <a:avLst/>
+          </a:prstGeom>
+          <a:noFill xmlns:a="http://schemas.openxmlformats.org/drawingml/2006/main"/>
+          <a:ln xmlns:a="http://schemas.openxmlformats.org/drawingml/2006/main" w="0">
+            <a:noFill/>
+            <a:prstDash val="solid"/>
+          </a:ln>
+        </p:spPr>
+        <p:txBody>
+          <a:bodyPr xmlns:a="http://schemas.openxmlformats.org/drawingml/2006/main"/>
+          <a:lstStyle xmlns:a="http://schemas.openxmlformats.org/drawingml/2006/main"/>
+          <a:p xmlns:a="http://schemas.openxmlformats.org/drawingml/2006/main">
+            <a:pPr algn="ctr">
+              <a:lnSpc>
+                <a:spcPct val="110000"/>
+              </a:lnSpc>
+              <a:buNone/>
+              <a:defRPr sz="900" b="1">
+                <a:solidFill>
+                  <a:srgbClr val="5F6B7A"/>
+                </a:solidFill>
+                <a:latin typeface="Arial"/>
+                <a:ea typeface="Arial"/>
+                <a:cs typeface="Arial"/>
+              </a:defRPr>
+            </a:pPr>
+            <a:r>
+              <a:rPr sz="900" b="1">
+                <a:solidFill>
+                  <a:srgbClr val="5F6B7A"/>
+                </a:solidFill>
+                <a:latin typeface="Arial"/>
+                <a:ea typeface="Arial"/>
+                <a:cs typeface="Arial"/>
+              </a:rPr>
+              <a:t>Gen 1 best</a:t>
+            </a:r>
+          </a:p>
+        </p:txBody>
+      </p:sp>
+      <p:sp>
+        <p:nvSpPr>
+          <p:cNvPr id="13" name="">
+            <a:extLst xmlns:a="http://schemas.openxmlformats.org/drawingml/2006/main">
+              <a:ext uri="{FF2B5EF4-FFF2-40B4-BE49-F238E27FC236}">
+                <a16:creationId xmlns:a16="http://schemas.microsoft.com/office/drawing/2014/main" id="{9765E1B3-D3AE-4B3A-BB92-F2752E903DD3}"/>
+              </a:ext>
+            </a:extLst>
+          </p:cNvPr>
+          <p:cNvSpPr>
+            <a:spLocks xmlns:a="http://schemas.openxmlformats.org/drawingml/2006/main" noGrp="1"/>
+          </p:cNvSpPr>
+          <p:nvPr/>
+        </p:nvSpPr>
+        <p:spPr>
+          <a:xfrm xmlns:a="http://schemas.openxmlformats.org/drawingml/2006/main">
+            <a:off x="7848600" y="3848100"/>
+            <a:ext cx="2381250" cy="819150"/>
           </a:xfrm>
           <a:prstGeom xmlns:a="http://schemas.openxmlformats.org/drawingml/2006/main" prst="rect">
             <a:avLst/>
           </a:prstGeom>
           <a:solidFill xmlns:a="http://schemas.openxmlformats.org/drawingml/2006/main">
-            <a:srgbClr val="005AA9"/>
+            <a:srgbClr val="F4F7FA"/>
           </a:solidFill>
-          <a:ln xmlns:a="http://schemas.openxmlformats.org/drawingml/2006/main" w="0">
-            <a:noFill/>
-            <a:prstDash val="solid"/>
-          </a:ln>
-        </p:spPr>
-      </p:sp>
-      <p:sp>
-        <p:nvSpPr>
-          <p:cNvPr id="13" name="">
-            <a:extLst xmlns:a="http://schemas.openxmlformats.org/drawingml/2006/main">
-              <a:ext uri="{FF2B5EF4-FFF2-40B4-BE49-F238E27FC236}">
-                <a16:creationId xmlns:a16="http://schemas.microsoft.com/office/drawing/2014/main" id="{06608694-D935-4F3A-8E6C-E5F4014BF85D}"/>
-              </a:ext>
-            </a:extLst>
-          </p:cNvPr>
-          <p:cNvSpPr>
-            <a:spLocks xmlns:a="http://schemas.openxmlformats.org/drawingml/2006/main" noGrp="1"/>
-          </p:cNvSpPr>
-          <p:nvPr/>
-        </p:nvSpPr>
-        <p:spPr>
-          <a:xfrm xmlns:a="http://schemas.openxmlformats.org/drawingml/2006/main">
-            <a:off x="1752600" y="5334000"/>
-            <a:ext cx="7867650" cy="361950"/>
-          </a:xfrm>
-          <a:prstGeom xmlns:a="http://schemas.openxmlformats.org/drawingml/2006/main" prst="rect">
-            <a:avLst/>
-          </a:prstGeom>
-          <a:noFill xmlns:a="http://schemas.openxmlformats.org/drawingml/2006/main"/>
-          <a:ln xmlns:a="http://schemas.openxmlformats.org/drawingml/2006/main" w="0">
-            <a:noFill/>
-            <a:prstDash val="solid"/>
-          </a:ln>
-        </p:spPr>
-        <p:txBody>
-          <a:bodyPr xmlns:a="http://schemas.openxmlformats.org/drawingml/2006/main"/>
-          <a:lstStyle xmlns:a="http://schemas.openxmlformats.org/drawingml/2006/main"/>
-          <a:p xmlns:a="http://schemas.openxmlformats.org/drawingml/2006/main">
-            <a:pPr algn="l">
-              <a:lnSpc>
-                <a:spcPct val="108000"/>
-              </a:lnSpc>
-              <a:buNone/>
-              <a:defRPr sz="1200" b="0">
-                <a:solidFill>
-                  <a:srgbClr val="101820"/>
-                </a:solidFill>
-                <a:latin typeface="Arial"/>
-                <a:ea typeface="Arial"/>
-                <a:cs typeface="Arial"/>
-              </a:defRPr>
-            </a:pPr>
-            <a:r>
-              <a:rPr sz="1200" b="0">
-                <a:solidFill>
-                  <a:srgbClr val="101820"/>
-                </a:solidFill>
-                <a:latin typeface="Arial"/>
-                <a:ea typeface="Arial"/>
-                <a:cs typeface="Arial"/>
-              </a:rPr>
-              <a:t>Generation 1: 0% success</a:t>
-            </a:r>
-          </a:p>
-        </p:txBody>
+          <a:ln xmlns:a="http://schemas.openxmlformats.org/drawingml/2006/main" w="9525">
+            <a:solidFill>
+              <a:srgbClr val="D7DEE8"/>
+            </a:solidFill>
+            <a:prstDash val="solid"/>
+          </a:ln>
+        </p:spPr>
       </p:sp>
       <p:sp>
         <p:nvSpPr>
           <p:cNvPr id="14" name="">
             <a:extLst xmlns:a="http://schemas.openxmlformats.org/drawingml/2006/main">
               <a:ext uri="{FF2B5EF4-FFF2-40B4-BE49-F238E27FC236}">
-                <a16:creationId xmlns:a16="http://schemas.microsoft.com/office/drawing/2014/main" id="{3F1D5DE9-4B8E-4C53-910F-3668C8C98D12}"/>
-              </a:ext>
-            </a:extLst>
-          </p:cNvPr>
-          <p:cNvSpPr>
-            <a:spLocks xmlns:a="http://schemas.openxmlformats.org/drawingml/2006/main" noGrp="1"/>
-          </p:cNvSpPr>
-          <p:nvPr/>
-        </p:nvSpPr>
-        <p:spPr>
-          <a:xfrm xmlns:a="http://schemas.openxmlformats.org/drawingml/2006/main">
-            <a:off x="1524000" y="5695950"/>
-            <a:ext cx="85725" cy="85725"/>
+                <a16:creationId xmlns:a16="http://schemas.microsoft.com/office/drawing/2014/main" id="{78DB7EA7-F9FD-4CDC-B066-BAC4D0593B2A}"/>
+              </a:ext>
+            </a:extLst>
+          </p:cNvPr>
+          <p:cNvSpPr>
+            <a:spLocks xmlns:a="http://schemas.openxmlformats.org/drawingml/2006/main" noGrp="1"/>
+          </p:cNvSpPr>
+          <p:nvPr/>
+        </p:nvSpPr>
+        <p:spPr>
+          <a:xfrm xmlns:a="http://schemas.openxmlformats.org/drawingml/2006/main">
+            <a:off x="8020050" y="3981450"/>
+            <a:ext cx="2038350" cy="304800"/>
+          </a:xfrm>
+          <a:prstGeom xmlns:a="http://schemas.openxmlformats.org/drawingml/2006/main" prst="rect">
+            <a:avLst/>
+          </a:prstGeom>
+          <a:noFill xmlns:a="http://schemas.openxmlformats.org/drawingml/2006/main"/>
+          <a:ln xmlns:a="http://schemas.openxmlformats.org/drawingml/2006/main" w="0">
+            <a:noFill/>
+            <a:prstDash val="solid"/>
+          </a:ln>
+        </p:spPr>
+        <p:txBody>
+          <a:bodyPr xmlns:a="http://schemas.openxmlformats.org/drawingml/2006/main"/>
+          <a:lstStyle xmlns:a="http://schemas.openxmlformats.org/drawingml/2006/main"/>
+          <a:p xmlns:a="http://schemas.openxmlformats.org/drawingml/2006/main">
+            <a:pPr algn="ctr">
+              <a:lnSpc>
+                <a:spcPct val="110000"/>
+              </a:lnSpc>
+              <a:buNone/>
+              <a:defRPr sz="1875" b="1">
+                <a:solidFill>
+                  <a:srgbClr val="073763"/>
+                </a:solidFill>
+                <a:latin typeface="Arial"/>
+                <a:ea typeface="Arial"/>
+                <a:cs typeface="Arial"/>
+              </a:defRPr>
+            </a:pPr>
+            <a:r>
+              <a:rPr sz="1875" b="1">
+                <a:solidFill>
+                  <a:srgbClr val="073763"/>
+                </a:solidFill>
+                <a:latin typeface="Arial"/>
+                <a:ea typeface="Arial"/>
+                <a:cs typeface="Arial"/>
+              </a:rPr>
+              <a:t>574.67</a:t>
+            </a:r>
+          </a:p>
+        </p:txBody>
+      </p:sp>
+      <p:sp>
+        <p:nvSpPr>
+          <p:cNvPr id="15" name="">
+            <a:extLst xmlns:a="http://schemas.openxmlformats.org/drawingml/2006/main">
+              <a:ext uri="{FF2B5EF4-FFF2-40B4-BE49-F238E27FC236}">
+                <a16:creationId xmlns:a16="http://schemas.microsoft.com/office/drawing/2014/main" id="{A52A1D3A-7A25-4C70-83A0-62CDAAF7E87A}"/>
+              </a:ext>
+            </a:extLst>
+          </p:cNvPr>
+          <p:cNvSpPr>
+            <a:spLocks xmlns:a="http://schemas.openxmlformats.org/drawingml/2006/main" noGrp="1"/>
+          </p:cNvSpPr>
+          <p:nvPr/>
+        </p:nvSpPr>
+        <p:spPr>
+          <a:xfrm xmlns:a="http://schemas.openxmlformats.org/drawingml/2006/main">
+            <a:off x="8001000" y="4324350"/>
+            <a:ext cx="2076450" cy="209550"/>
+          </a:xfrm>
+          <a:prstGeom xmlns:a="http://schemas.openxmlformats.org/drawingml/2006/main" prst="rect">
+            <a:avLst/>
+          </a:prstGeom>
+          <a:noFill xmlns:a="http://schemas.openxmlformats.org/drawingml/2006/main"/>
+          <a:ln xmlns:a="http://schemas.openxmlformats.org/drawingml/2006/main" w="0">
+            <a:noFill/>
+            <a:prstDash val="solid"/>
+          </a:ln>
+        </p:spPr>
+        <p:txBody>
+          <a:bodyPr xmlns:a="http://schemas.openxmlformats.org/drawingml/2006/main"/>
+          <a:lstStyle xmlns:a="http://schemas.openxmlformats.org/drawingml/2006/main"/>
+          <a:p xmlns:a="http://schemas.openxmlformats.org/drawingml/2006/main">
+            <a:pPr algn="ctr">
+              <a:lnSpc>
+                <a:spcPct val="110000"/>
+              </a:lnSpc>
+              <a:buNone/>
+              <a:defRPr sz="900" b="1">
+                <a:solidFill>
+                  <a:srgbClr val="5F6B7A"/>
+                </a:solidFill>
+                <a:latin typeface="Arial"/>
+                <a:ea typeface="Arial"/>
+                <a:cs typeface="Arial"/>
+              </a:defRPr>
+            </a:pPr>
+            <a:r>
+              <a:rPr sz="900" b="1">
+                <a:solidFill>
+                  <a:srgbClr val="5F6B7A"/>
+                </a:solidFill>
+                <a:latin typeface="Arial"/>
+                <a:ea typeface="Arial"/>
+                <a:cs typeface="Arial"/>
+              </a:rPr>
+              <a:t>Gen 56 best</a:t>
+            </a:r>
+          </a:p>
+        </p:txBody>
+      </p:sp>
+      <p:sp>
+        <p:nvSpPr>
+          <p:cNvPr id="16" name="">
+            <a:extLst xmlns:a="http://schemas.openxmlformats.org/drawingml/2006/main">
+              <a:ext uri="{FF2B5EF4-FFF2-40B4-BE49-F238E27FC236}">
+                <a16:creationId xmlns:a16="http://schemas.microsoft.com/office/drawing/2014/main" id="{5F55B0B3-254B-472B-9127-41CA976213D6}"/>
+              </a:ext>
+            </a:extLst>
+          </p:cNvPr>
+          <p:cNvSpPr>
+            <a:spLocks xmlns:a="http://schemas.openxmlformats.org/drawingml/2006/main" noGrp="1"/>
+          </p:cNvSpPr>
+          <p:nvPr/>
+        </p:nvSpPr>
+        <p:spPr>
+          <a:xfrm xmlns:a="http://schemas.openxmlformats.org/drawingml/2006/main">
+            <a:off x="7848600" y="4876800"/>
+            <a:ext cx="2381250" cy="819150"/>
           </a:xfrm>
           <a:prstGeom xmlns:a="http://schemas.openxmlformats.org/drawingml/2006/main" prst="rect">
             <a:avLst/>
           </a:prstGeom>
           <a:solidFill xmlns:a="http://schemas.openxmlformats.org/drawingml/2006/main">
-            <a:srgbClr val="005AA9"/>
+            <a:srgbClr val="F4F7FA"/>
           </a:solidFill>
-          <a:ln xmlns:a="http://schemas.openxmlformats.org/drawingml/2006/main" w="0">
-            <a:noFill/>
-            <a:prstDash val="solid"/>
-          </a:ln>
-        </p:spPr>
-      </p:sp>
-      <p:sp>
-        <p:nvSpPr>
-          <p:cNvPr id="15" name="">
-            <a:extLst xmlns:a="http://schemas.openxmlformats.org/drawingml/2006/main">
-              <a:ext uri="{FF2B5EF4-FFF2-40B4-BE49-F238E27FC236}">
-                <a16:creationId xmlns:a16="http://schemas.microsoft.com/office/drawing/2014/main" id="{7EDB8465-9A8D-4CF8-9AC6-78232E6B50D1}"/>
-              </a:ext>
-            </a:extLst>
-          </p:cNvPr>
-          <p:cNvSpPr>
-            <a:spLocks xmlns:a="http://schemas.openxmlformats.org/drawingml/2006/main" noGrp="1"/>
-          </p:cNvSpPr>
-          <p:nvPr/>
-        </p:nvSpPr>
-        <p:spPr>
-          <a:xfrm xmlns:a="http://schemas.openxmlformats.org/drawingml/2006/main">
-            <a:off x="1752600" y="5619750"/>
-            <a:ext cx="7867650" cy="361950"/>
-          </a:xfrm>
-          <a:prstGeom xmlns:a="http://schemas.openxmlformats.org/drawingml/2006/main" prst="rect">
-            <a:avLst/>
-          </a:prstGeom>
-          <a:noFill xmlns:a="http://schemas.openxmlformats.org/drawingml/2006/main"/>
-          <a:ln xmlns:a="http://schemas.openxmlformats.org/drawingml/2006/main" w="0">
-            <a:noFill/>
-            <a:prstDash val="solid"/>
-          </a:ln>
-        </p:spPr>
-        <p:txBody>
-          <a:bodyPr xmlns:a="http://schemas.openxmlformats.org/drawingml/2006/main"/>
-          <a:lstStyle xmlns:a="http://schemas.openxmlformats.org/drawingml/2006/main"/>
-          <a:p xmlns:a="http://schemas.openxmlformats.org/drawingml/2006/main">
-            <a:pPr algn="l">
-              <a:lnSpc>
-                <a:spcPct val="108000"/>
-              </a:lnSpc>
-              <a:buNone/>
-              <a:defRPr sz="1200" b="0">
-                <a:solidFill>
-                  <a:srgbClr val="101820"/>
-                </a:solidFill>
-                <a:latin typeface="Arial"/>
-                <a:ea typeface="Arial"/>
-                <a:cs typeface="Arial"/>
-              </a:defRPr>
-            </a:pPr>
-            <a:r>
-              <a:rPr sz="1200" b="0">
-                <a:solidFill>
-                  <a:srgbClr val="101820"/>
-                </a:solidFill>
-                <a:latin typeface="Arial"/>
-                <a:ea typeface="Arial"/>
-                <a:cs typeface="Arial"/>
-              </a:rPr>
-              <a:t>Generation 55: 100% success, avg fitness 560.20</a:t>
-            </a:r>
-          </a:p>
-        </p:txBody>
-      </p:sp>
-      <p:sp>
-        <p:nvSpPr>
-          <p:cNvPr id="16" name="">
-            <a:extLst xmlns:a="http://schemas.openxmlformats.org/drawingml/2006/main">
-              <a:ext uri="{FF2B5EF4-FFF2-40B4-BE49-F238E27FC236}">
-                <a16:creationId xmlns:a16="http://schemas.microsoft.com/office/drawing/2014/main" id="{22370712-3CEE-44D0-9E7E-2E2242CC0091}"/>
-              </a:ext>
-            </a:extLst>
-          </p:cNvPr>
-          <p:cNvSpPr>
-            <a:spLocks xmlns:a="http://schemas.openxmlformats.org/drawingml/2006/main" noGrp="1"/>
-          </p:cNvSpPr>
-          <p:nvPr/>
-        </p:nvSpPr>
-        <p:spPr>
-          <a:xfrm xmlns:a="http://schemas.openxmlformats.org/drawingml/2006/main">
-            <a:off x="1524000" y="5981700"/>
-            <a:ext cx="85725" cy="85725"/>
-          </a:xfrm>
-          <a:prstGeom xmlns:a="http://schemas.openxmlformats.org/drawingml/2006/main" prst="rect">
-            <a:avLst/>
-          </a:prstGeom>
-          <a:solidFill xmlns:a="http://schemas.openxmlformats.org/drawingml/2006/main">
-            <a:srgbClr val="005AA9"/>
-          </a:solidFill>
-          <a:ln xmlns:a="http://schemas.openxmlformats.org/drawingml/2006/main" w="0">
-            <a:noFill/>
+          <a:ln xmlns:a="http://schemas.openxmlformats.org/drawingml/2006/main" w="9525">
+            <a:solidFill>
+              <a:srgbClr val="D7DEE8"/>
+            </a:solidFill>
             <a:prstDash val="solid"/>
           </a:ln>
         </p:spPr>
@@ -14868,57 +15261,177 @@
           <p:cNvPr id="17" name="">
             <a:extLst xmlns:a="http://schemas.openxmlformats.org/drawingml/2006/main">
               <a:ext uri="{FF2B5EF4-FFF2-40B4-BE49-F238E27FC236}">
-                <a16:creationId xmlns:a16="http://schemas.microsoft.com/office/drawing/2014/main" id="{7AD1E51B-4E42-4243-8875-8325F89F273F}"/>
-              </a:ext>
-            </a:extLst>
-          </p:cNvPr>
-          <p:cNvSpPr>
-            <a:spLocks xmlns:a="http://schemas.openxmlformats.org/drawingml/2006/main" noGrp="1"/>
-          </p:cNvSpPr>
-          <p:nvPr/>
-        </p:nvSpPr>
-        <p:spPr>
-          <a:xfrm xmlns:a="http://schemas.openxmlformats.org/drawingml/2006/main">
-            <a:off x="1752600" y="5905500"/>
-            <a:ext cx="7867650" cy="361950"/>
-          </a:xfrm>
-          <a:prstGeom xmlns:a="http://schemas.openxmlformats.org/drawingml/2006/main" prst="rect">
-            <a:avLst/>
-          </a:prstGeom>
-          <a:noFill xmlns:a="http://schemas.openxmlformats.org/drawingml/2006/main"/>
-          <a:ln xmlns:a="http://schemas.openxmlformats.org/drawingml/2006/main" w="0">
-            <a:noFill/>
-            <a:prstDash val="solid"/>
-          </a:ln>
-        </p:spPr>
-        <p:txBody>
-          <a:bodyPr xmlns:a="http://schemas.openxmlformats.org/drawingml/2006/main"/>
-          <a:lstStyle xmlns:a="http://schemas.openxmlformats.org/drawingml/2006/main"/>
-          <a:p xmlns:a="http://schemas.openxmlformats.org/drawingml/2006/main">
-            <a:pPr algn="l">
-              <a:lnSpc>
-                <a:spcPct val="108000"/>
-              </a:lnSpc>
-              <a:buNone/>
-              <a:defRPr sz="1200" b="0">
-                <a:solidFill>
-                  <a:srgbClr val="101820"/>
-                </a:solidFill>
-                <a:latin typeface="Arial"/>
-                <a:ea typeface="Arial"/>
-                <a:cs typeface="Arial"/>
-              </a:defRPr>
-            </a:pPr>
-            <a:r>
-              <a:rPr sz="1200" b="0">
-                <a:solidFill>
-                  <a:srgbClr val="101820"/>
-                </a:solidFill>
-                <a:latin typeface="Arial"/>
-                <a:ea typeface="Arial"/>
-                <a:cs typeface="Arial"/>
-              </a:rPr>
-              <a:t>Generation 60: 100% success, avg fitness 558.80</a:t>
+                <a16:creationId xmlns:a16="http://schemas.microsoft.com/office/drawing/2014/main" id="{FA31BFD9-0F39-48F5-B539-7A9F5CA67082}"/>
+              </a:ext>
+            </a:extLst>
+          </p:cNvPr>
+          <p:cNvSpPr>
+            <a:spLocks xmlns:a="http://schemas.openxmlformats.org/drawingml/2006/main" noGrp="1"/>
+          </p:cNvSpPr>
+          <p:nvPr/>
+        </p:nvSpPr>
+        <p:spPr>
+          <a:xfrm xmlns:a="http://schemas.openxmlformats.org/drawingml/2006/main">
+            <a:off x="8020050" y="5010150"/>
+            <a:ext cx="2038350" cy="304800"/>
+          </a:xfrm>
+          <a:prstGeom xmlns:a="http://schemas.openxmlformats.org/drawingml/2006/main" prst="rect">
+            <a:avLst/>
+          </a:prstGeom>
+          <a:noFill xmlns:a="http://schemas.openxmlformats.org/drawingml/2006/main"/>
+          <a:ln xmlns:a="http://schemas.openxmlformats.org/drawingml/2006/main" w="0">
+            <a:noFill/>
+            <a:prstDash val="solid"/>
+          </a:ln>
+        </p:spPr>
+        <p:txBody>
+          <a:bodyPr xmlns:a="http://schemas.openxmlformats.org/drawingml/2006/main"/>
+          <a:lstStyle xmlns:a="http://schemas.openxmlformats.org/drawingml/2006/main"/>
+          <a:p xmlns:a="http://schemas.openxmlformats.org/drawingml/2006/main">
+            <a:pPr algn="ctr">
+              <a:lnSpc>
+                <a:spcPct val="110000"/>
+              </a:lnSpc>
+              <a:buNone/>
+              <a:defRPr sz="1875" b="1">
+                <a:solidFill>
+                  <a:srgbClr val="073763"/>
+                </a:solidFill>
+                <a:latin typeface="Arial"/>
+                <a:ea typeface="Arial"/>
+                <a:cs typeface="Arial"/>
+              </a:defRPr>
+            </a:pPr>
+            <a:r>
+              <a:rPr sz="1875" b="1">
+                <a:solidFill>
+                  <a:srgbClr val="073763"/>
+                </a:solidFill>
+                <a:latin typeface="Arial"/>
+                <a:ea typeface="Arial"/>
+                <a:cs typeface="Arial"/>
+              </a:rPr>
+              <a:t>572.00</a:t>
+            </a:r>
+          </a:p>
+        </p:txBody>
+      </p:sp>
+      <p:sp>
+        <p:nvSpPr>
+          <p:cNvPr id="18" name="">
+            <a:extLst xmlns:a="http://schemas.openxmlformats.org/drawingml/2006/main">
+              <a:ext uri="{FF2B5EF4-FFF2-40B4-BE49-F238E27FC236}">
+                <a16:creationId xmlns:a16="http://schemas.microsoft.com/office/drawing/2014/main" id="{4518DED1-CB56-422F-908F-89273EC823DA}"/>
+              </a:ext>
+            </a:extLst>
+          </p:cNvPr>
+          <p:cNvSpPr>
+            <a:spLocks xmlns:a="http://schemas.openxmlformats.org/drawingml/2006/main" noGrp="1"/>
+          </p:cNvSpPr>
+          <p:nvPr/>
+        </p:nvSpPr>
+        <p:spPr>
+          <a:xfrm xmlns:a="http://schemas.openxmlformats.org/drawingml/2006/main">
+            <a:off x="8001000" y="5353050"/>
+            <a:ext cx="2076450" cy="209550"/>
+          </a:xfrm>
+          <a:prstGeom xmlns:a="http://schemas.openxmlformats.org/drawingml/2006/main" prst="rect">
+            <a:avLst/>
+          </a:prstGeom>
+          <a:noFill xmlns:a="http://schemas.openxmlformats.org/drawingml/2006/main"/>
+          <a:ln xmlns:a="http://schemas.openxmlformats.org/drawingml/2006/main" w="0">
+            <a:noFill/>
+            <a:prstDash val="solid"/>
+          </a:ln>
+        </p:spPr>
+        <p:txBody>
+          <a:bodyPr xmlns:a="http://schemas.openxmlformats.org/drawingml/2006/main"/>
+          <a:lstStyle xmlns:a="http://schemas.openxmlformats.org/drawingml/2006/main"/>
+          <a:p xmlns:a="http://schemas.openxmlformats.org/drawingml/2006/main">
+            <a:pPr algn="ctr">
+              <a:lnSpc>
+                <a:spcPct val="110000"/>
+              </a:lnSpc>
+              <a:buNone/>
+              <a:defRPr sz="900" b="1">
+                <a:solidFill>
+                  <a:srgbClr val="5F6B7A"/>
+                </a:solidFill>
+                <a:latin typeface="Arial"/>
+                <a:ea typeface="Arial"/>
+                <a:cs typeface="Arial"/>
+              </a:defRPr>
+            </a:pPr>
+            <a:r>
+              <a:rPr sz="900" b="1">
+                <a:solidFill>
+                  <a:srgbClr val="5F6B7A"/>
+                </a:solidFill>
+                <a:latin typeface="Arial"/>
+                <a:ea typeface="Arial"/>
+                <a:cs typeface="Arial"/>
+              </a:rPr>
+              <a:t>Gen 60 best</a:t>
+            </a:r>
+          </a:p>
+        </p:txBody>
+      </p:sp>
+      <p:sp>
+        <p:nvSpPr>
+          <p:cNvPr id="19" name="">
+            <a:extLst xmlns:a="http://schemas.openxmlformats.org/drawingml/2006/main">
+              <a:ext uri="{FF2B5EF4-FFF2-40B4-BE49-F238E27FC236}">
+                <a16:creationId xmlns:a16="http://schemas.microsoft.com/office/drawing/2014/main" id="{F2010A94-9CCC-4342-911F-93B07FAEAC57}"/>
+              </a:ext>
+            </a:extLst>
+          </p:cNvPr>
+          <p:cNvSpPr>
+            <a:spLocks xmlns:a="http://schemas.openxmlformats.org/drawingml/2006/main" noGrp="1"/>
+          </p:cNvSpPr>
+          <p:nvPr/>
+        </p:nvSpPr>
+        <p:spPr>
+          <a:xfrm xmlns:a="http://schemas.openxmlformats.org/drawingml/2006/main">
+            <a:off x="7524750" y="5848350"/>
+            <a:ext cx="3143250" cy="400050"/>
+          </a:xfrm>
+          <a:prstGeom xmlns:a="http://schemas.openxmlformats.org/drawingml/2006/main" prst="rect">
+            <a:avLst/>
+          </a:prstGeom>
+          <a:noFill xmlns:a="http://schemas.openxmlformats.org/drawingml/2006/main"/>
+          <a:ln xmlns:a="http://schemas.openxmlformats.org/drawingml/2006/main" w="0">
+            <a:noFill/>
+            <a:prstDash val="solid"/>
+          </a:ln>
+        </p:spPr>
+        <p:txBody>
+          <a:bodyPr xmlns:a="http://schemas.openxmlformats.org/drawingml/2006/main"/>
+          <a:lstStyle xmlns:a="http://schemas.openxmlformats.org/drawingml/2006/main"/>
+          <a:p xmlns:a="http://schemas.openxmlformats.org/drawingml/2006/main">
+            <a:pPr algn="ctr">
+              <a:lnSpc>
+                <a:spcPct val="110000"/>
+              </a:lnSpc>
+              <a:buNone/>
+              <a:defRPr sz="975" b="1">
+                <a:solidFill>
+                  <a:srgbClr val="5F6B7A"/>
+                </a:solidFill>
+                <a:latin typeface="Arial"/>
+                <a:ea typeface="Arial"/>
+                <a:cs typeface="Arial"/>
+              </a:defRPr>
+            </a:pPr>
+            <a:r>
+              <a:rPr sz="975" b="1">
+                <a:solidFill>
+                  <a:srgbClr val="5F6B7A"/>
+                </a:solidFill>
+                <a:latin typeface="Arial"/>
+                <a:ea typeface="Arial"/>
+                <a:cs typeface="Arial"/>
+              </a:rPr>
+              <a:t>Gen 56 is training-best; Gen 55 is validation-best because validation uses fixed seeds.</a:t>
             </a:r>
           </a:p>
         </p:txBody>
@@ -14926,7 +15439,7 @@
     </p:spTree>
     <p:extLst>
       <p:ext uri="{BB962C8B-B14F-4D97-AF65-F5344CB8AC3E}">
-        <p14:creationId xmlns:p14="http://schemas.microsoft.com/office/powerpoint/2010/main" val="665453961"/>
+        <p14:creationId xmlns:p14="http://schemas.microsoft.com/office/powerpoint/2010/main" val="776301702"/>
       </p:ext>
     </p:extLst>
   </p:cSld>
